--- a/presentation/Rigoberto_Cortez_Portfolio.pptx
+++ b/presentation/Rigoberto_Cortez_Portfolio.pptx
@@ -2,22 +2,28 @@
 <file path=ppt/presentation.xml><?xml version="1.0" encoding="utf-8"?>
 <p:presentation xmlns:p="http://schemas.openxmlformats.org/presentationml/2006/main">
   <p:sldMasterIdLst>
-    <p:sldMasterId xmlns:r="http://schemas.openxmlformats.org/officeDocument/2006/relationships" id="2147483648" r:id="R76fd04e4a707473f"/>
+    <p:sldMasterId xmlns:r="http://schemas.openxmlformats.org/officeDocument/2006/relationships" id="2147483648" r:id="Rc7e60f0e1d3248e0"/>
   </p:sldMasterIdLst>
   <p:notesMasterIdLst>
-    <p:notesMasterId xmlns:r="http://schemas.openxmlformats.org/officeDocument/2006/relationships" r:id="R8efbf855af0d4e0d"/>
+    <p:notesMasterId xmlns:r="http://schemas.openxmlformats.org/officeDocument/2006/relationships" r:id="R41e3701740df46b2"/>
   </p:notesMasterIdLst>
   <p:sldIdLst>
-    <p:sldId xmlns:r="http://schemas.openxmlformats.org/officeDocument/2006/relationships" id="256" r:id="R75030a2cd1584f73"/>
-    <p:sldId xmlns:r="http://schemas.openxmlformats.org/officeDocument/2006/relationships" id="257" r:id="Redb16915fb4b4337"/>
-    <p:sldId xmlns:r="http://schemas.openxmlformats.org/officeDocument/2006/relationships" id="258" r:id="R50906e139a7e4a5d"/>
-    <p:sldId xmlns:r="http://schemas.openxmlformats.org/officeDocument/2006/relationships" id="259" r:id="R29993e625a5f4e0a"/>
-    <p:sldId xmlns:r="http://schemas.openxmlformats.org/officeDocument/2006/relationships" id="260" r:id="R8da3e5f23cf94ca3"/>
-    <p:sldId xmlns:r="http://schemas.openxmlformats.org/officeDocument/2006/relationships" id="261" r:id="R24e58f84bc8e4111"/>
-    <p:sldId xmlns:r="http://schemas.openxmlformats.org/officeDocument/2006/relationships" id="262" r:id="R2610f94704704043"/>
-    <p:sldId xmlns:r="http://schemas.openxmlformats.org/officeDocument/2006/relationships" id="263" r:id="R492ece78311d43b7"/>
-    <p:sldId xmlns:r="http://schemas.openxmlformats.org/officeDocument/2006/relationships" id="264" r:id="R59f6621ff73f4788"/>
-    <p:sldId xmlns:r="http://schemas.openxmlformats.org/officeDocument/2006/relationships" id="265" r:id="R30e7f05811c94035"/>
+    <p:sldId xmlns:r="http://schemas.openxmlformats.org/officeDocument/2006/relationships" id="256" r:id="R9d9b88f948fd4292"/>
+    <p:sldId xmlns:r="http://schemas.openxmlformats.org/officeDocument/2006/relationships" id="257" r:id="R61479e5c89224079"/>
+    <p:sldId xmlns:r="http://schemas.openxmlformats.org/officeDocument/2006/relationships" id="258" r:id="R92679fea4c864f93"/>
+    <p:sldId xmlns:r="http://schemas.openxmlformats.org/officeDocument/2006/relationships" id="259" r:id="Reec40fd15172426b"/>
+    <p:sldId xmlns:r="http://schemas.openxmlformats.org/officeDocument/2006/relationships" id="260" r:id="R3cb453b67e88469a"/>
+    <p:sldId xmlns:r="http://schemas.openxmlformats.org/officeDocument/2006/relationships" id="261" r:id="R0c6907448dbf4b29"/>
+    <p:sldId xmlns:r="http://schemas.openxmlformats.org/officeDocument/2006/relationships" id="262" r:id="Rd07363ae05914acb"/>
+    <p:sldId xmlns:r="http://schemas.openxmlformats.org/officeDocument/2006/relationships" id="263" r:id="R454c2b286a2845cc"/>
+    <p:sldId xmlns:r="http://schemas.openxmlformats.org/officeDocument/2006/relationships" id="264" r:id="Rfbe8e6e23e5e40b0"/>
+    <p:sldId xmlns:r="http://schemas.openxmlformats.org/officeDocument/2006/relationships" id="265" r:id="R954affbbae784ebd"/>
+    <p:sldId xmlns:r="http://schemas.openxmlformats.org/officeDocument/2006/relationships" id="266" r:id="Re90488b268db4033"/>
+    <p:sldId xmlns:r="http://schemas.openxmlformats.org/officeDocument/2006/relationships" id="267" r:id="R24b803ca3a034d26"/>
+    <p:sldId xmlns:r="http://schemas.openxmlformats.org/officeDocument/2006/relationships" id="268" r:id="R96795b869b4c42d6"/>
+    <p:sldId xmlns:r="http://schemas.openxmlformats.org/officeDocument/2006/relationships" id="269" r:id="R65b4b2d7a6db4fe1"/>
+    <p:sldId xmlns:r="http://schemas.openxmlformats.org/officeDocument/2006/relationships" id="270" r:id="R352edddf8dbe47b4"/>
+    <p:sldId xmlns:r="http://schemas.openxmlformats.org/officeDocument/2006/relationships" id="271" r:id="R4fe306465f4345c9"/>
   </p:sldIdLst>
   <p:sldSz cx="12192000" cy="6858000"/>
   <p:notesSz cx="6858000" cy="9144000"/>
@@ -521,6 +527,426 @@
           <a:lstStyle xmlns:a="http://schemas.openxmlformats.org/drawingml/2006/main"/>
           <a:p xmlns:a="http://schemas.openxmlformats.org/drawingml/2006/main">
             <a:r>
+              <a:t>Original STEP geometry from engineering archive. Model view renders source geometry in a presentation display color. Original dimensioned drawing title block credits Rigoberto Cortez Cadenas. No physical print is claimed.</a:t>
+            </a:r>
+          </a:p>
+        </p:txBody>
+      </p:sp>
+      <p:sp>
+        <p:nvSpPr>
+          <p:cNvPr id="4" name="Slide Number Placeholder 3"/>
+          <p:cNvSpPr>
+            <a:spLocks xmlns:a="http://schemas.openxmlformats.org/drawingml/2006/main" noGrp="1"/>
+          </p:cNvSpPr>
+          <p:nvPr>
+            <p:ph type="sldNum" idx="5"/>
+          </p:nvPr>
+        </p:nvSpPr>
+        <p:spPr/>
+        <p:txBody>
+          <a:bodyPr xmlns:a="http://schemas.openxmlformats.org/drawingml/2006/main"/>
+          <a:lstStyle xmlns:a="http://schemas.openxmlformats.org/drawingml/2006/main"/>
+          <a:p xmlns:a="http://schemas.openxmlformats.org/drawingml/2006/main"/>
+        </p:txBody>
+      </p:sp>
+    </p:spTree>
+  </p:cSld>
+  <p:clrMapOvr>
+    <a:masterClrMapping xmlns:a="http://schemas.openxmlformats.org/drawingml/2006/main"/>
+  </p:clrMapOvr>
+</p:notes>
+</file>
+
+<file path=ppt/notesSlides/notesSlide11.xml><?xml version="1.0" encoding="utf-8"?>
+<p:notes xmlns:p="http://schemas.openxmlformats.org/presentationml/2006/main">
+  <p:cSld>
+    <p:spTree>
+      <p:nvGrpSpPr>
+        <p:cNvPr id="1" name=""/>
+        <p:cNvGrpSpPr/>
+        <p:nvPr/>
+      </p:nvGrpSpPr>
+      <p:grpSpPr>
+        <a:xfrm xmlns:a="http://schemas.openxmlformats.org/drawingml/2006/main"/>
+      </p:grpSpPr>
+      <p:sp>
+        <p:nvSpPr>
+          <p:cNvPr id="2" name="Slide Image Placeholder 1"/>
+          <p:cNvSpPr>
+            <a:spLocks xmlns:a="http://schemas.openxmlformats.org/drawingml/2006/main" noGrp="1"/>
+          </p:cNvSpPr>
+          <p:nvPr>
+            <p:ph type="sldImg" idx="0"/>
+          </p:nvPr>
+        </p:nvSpPr>
+        <p:spPr/>
+      </p:sp>
+      <p:sp>
+        <p:nvSpPr>
+          <p:cNvPr id="3" name="Notes Placeholder 2"/>
+          <p:cNvSpPr>
+            <a:spLocks xmlns:a="http://schemas.openxmlformats.org/drawingml/2006/main" noGrp="1"/>
+          </p:cNvSpPr>
+          <p:nvPr>
+            <p:ph type="body" idx="1"/>
+          </p:nvPr>
+        </p:nvSpPr>
+        <p:spPr/>
+        <p:txBody>
+          <a:bodyPr xmlns:a="http://schemas.openxmlformats.org/drawingml/2006/main"/>
+          <a:lstStyle xmlns:a="http://schemas.openxmlformats.org/drawingml/2006/main"/>
+          <a:p xmlns:a="http://schemas.openxmlformats.org/drawingml/2006/main">
+            <a:r>
+              <a:t>Original STEP geometry from engineering archive. Model view renders source geometry in a presentation display color. Original dimensioned drawing title block credits Rigoberto Cortez Cadenas. No physical print is claimed.</a:t>
+            </a:r>
+          </a:p>
+        </p:txBody>
+      </p:sp>
+      <p:sp>
+        <p:nvSpPr>
+          <p:cNvPr id="4" name="Slide Number Placeholder 3"/>
+          <p:cNvSpPr>
+            <a:spLocks xmlns:a="http://schemas.openxmlformats.org/drawingml/2006/main" noGrp="1"/>
+          </p:cNvSpPr>
+          <p:nvPr>
+            <p:ph type="sldNum" idx="5"/>
+          </p:nvPr>
+        </p:nvSpPr>
+        <p:spPr/>
+        <p:txBody>
+          <a:bodyPr xmlns:a="http://schemas.openxmlformats.org/drawingml/2006/main"/>
+          <a:lstStyle xmlns:a="http://schemas.openxmlformats.org/drawingml/2006/main"/>
+          <a:p xmlns:a="http://schemas.openxmlformats.org/drawingml/2006/main"/>
+        </p:txBody>
+      </p:sp>
+    </p:spTree>
+  </p:cSld>
+  <p:clrMapOvr>
+    <a:masterClrMapping xmlns:a="http://schemas.openxmlformats.org/drawingml/2006/main"/>
+  </p:clrMapOvr>
+</p:notes>
+</file>
+
+<file path=ppt/notesSlides/notesSlide12.xml><?xml version="1.0" encoding="utf-8"?>
+<p:notes xmlns:p="http://schemas.openxmlformats.org/presentationml/2006/main">
+  <p:cSld>
+    <p:spTree>
+      <p:nvGrpSpPr>
+        <p:cNvPr id="1" name=""/>
+        <p:cNvGrpSpPr/>
+        <p:nvPr/>
+      </p:nvGrpSpPr>
+      <p:grpSpPr>
+        <a:xfrm xmlns:a="http://schemas.openxmlformats.org/drawingml/2006/main"/>
+      </p:grpSpPr>
+      <p:sp>
+        <p:nvSpPr>
+          <p:cNvPr id="2" name="Slide Image Placeholder 1"/>
+          <p:cNvSpPr>
+            <a:spLocks xmlns:a="http://schemas.openxmlformats.org/drawingml/2006/main" noGrp="1"/>
+          </p:cNvSpPr>
+          <p:nvPr>
+            <p:ph type="sldImg" idx="0"/>
+          </p:nvPr>
+        </p:nvSpPr>
+        <p:spPr/>
+      </p:sp>
+      <p:sp>
+        <p:nvSpPr>
+          <p:cNvPr id="3" name="Notes Placeholder 2"/>
+          <p:cNvSpPr>
+            <a:spLocks xmlns:a="http://schemas.openxmlformats.org/drawingml/2006/main" noGrp="1"/>
+          </p:cNvSpPr>
+          <p:nvPr>
+            <p:ph type="body" idx="1"/>
+          </p:nvPr>
+        </p:nvSpPr>
+        <p:spPr/>
+        <p:txBody>
+          <a:bodyPr xmlns:a="http://schemas.openxmlformats.org/drawingml/2006/main"/>
+          <a:lstStyle xmlns:a="http://schemas.openxmlformats.org/drawingml/2006/main"/>
+          <a:p xmlns:a="http://schemas.openxmlformats.org/drawingml/2006/main">
+            <a:r>
+              <a:t>Sources: Copy of 2.3.7 Container Design Documentation.docx, dated 4/22/25; Copy of 2.3.4.A CAMStrategyPracticePart1 .docx; Copy of 2.3.6 CAMStrategyPractice_.docx. No finished machined-part photo or verified run. STEP files in Chest Cool Assembly archive; authorship not independently established by filename.</a:t>
+            </a:r>
+          </a:p>
+        </p:txBody>
+      </p:sp>
+      <p:sp>
+        <p:nvSpPr>
+          <p:cNvPr id="4" name="Slide Number Placeholder 3"/>
+          <p:cNvSpPr>
+            <a:spLocks xmlns:a="http://schemas.openxmlformats.org/drawingml/2006/main" noGrp="1"/>
+          </p:cNvSpPr>
+          <p:nvPr>
+            <p:ph type="sldNum" idx="5"/>
+          </p:nvPr>
+        </p:nvSpPr>
+        <p:spPr/>
+        <p:txBody>
+          <a:bodyPr xmlns:a="http://schemas.openxmlformats.org/drawingml/2006/main"/>
+          <a:lstStyle xmlns:a="http://schemas.openxmlformats.org/drawingml/2006/main"/>
+          <a:p xmlns:a="http://schemas.openxmlformats.org/drawingml/2006/main"/>
+        </p:txBody>
+      </p:sp>
+    </p:spTree>
+  </p:cSld>
+  <p:clrMapOvr>
+    <a:masterClrMapping xmlns:a="http://schemas.openxmlformats.org/drawingml/2006/main"/>
+  </p:clrMapOvr>
+</p:notes>
+</file>
+
+<file path=ppt/notesSlides/notesSlide13.xml><?xml version="1.0" encoding="utf-8"?>
+<p:notes xmlns:p="http://schemas.openxmlformats.org/presentationml/2006/main">
+  <p:cSld>
+    <p:spTree>
+      <p:nvGrpSpPr>
+        <p:cNvPr id="1" name=""/>
+        <p:cNvGrpSpPr/>
+        <p:nvPr/>
+      </p:nvGrpSpPr>
+      <p:grpSpPr>
+        <a:xfrm xmlns:a="http://schemas.openxmlformats.org/drawingml/2006/main"/>
+      </p:grpSpPr>
+      <p:sp>
+        <p:nvSpPr>
+          <p:cNvPr id="2" name="Slide Image Placeholder 1"/>
+          <p:cNvSpPr>
+            <a:spLocks xmlns:a="http://schemas.openxmlformats.org/drawingml/2006/main" noGrp="1"/>
+          </p:cNvSpPr>
+          <p:nvPr>
+            <p:ph type="sldImg" idx="0"/>
+          </p:nvPr>
+        </p:nvSpPr>
+        <p:spPr/>
+      </p:sp>
+      <p:sp>
+        <p:nvSpPr>
+          <p:cNvPr id="3" name="Notes Placeholder 2"/>
+          <p:cNvSpPr>
+            <a:spLocks xmlns:a="http://schemas.openxmlformats.org/drawingml/2006/main" noGrp="1"/>
+          </p:cNvSpPr>
+          <p:nvPr>
+            <p:ph type="body" idx="1"/>
+          </p:nvPr>
+        </p:nvSpPr>
+        <p:spPr/>
+        <p:txBody>
+          <a:bodyPr xmlns:a="http://schemas.openxmlformats.org/drawingml/2006/main"/>
+          <a:lstStyle xmlns:a="http://schemas.openxmlformats.org/drawingml/2006/main"/>
+          <a:p xmlns:a="http://schemas.openxmlformats.org/drawingml/2006/main">
+            <a:r>
+              <a:t>Source: Copy of 2.3.7 Container Design Documentation.docx and CAM practice worksheets. Images preserve sketches and machining simulations. No completed machining run is claimed.</a:t>
+            </a:r>
+          </a:p>
+        </p:txBody>
+      </p:sp>
+      <p:sp>
+        <p:nvSpPr>
+          <p:cNvPr id="4" name="Slide Number Placeholder 3"/>
+          <p:cNvSpPr>
+            <a:spLocks xmlns:a="http://schemas.openxmlformats.org/drawingml/2006/main" noGrp="1"/>
+          </p:cNvSpPr>
+          <p:nvPr>
+            <p:ph type="sldNum" idx="5"/>
+          </p:nvPr>
+        </p:nvSpPr>
+        <p:spPr/>
+        <p:txBody>
+          <a:bodyPr xmlns:a="http://schemas.openxmlformats.org/drawingml/2006/main"/>
+          <a:lstStyle xmlns:a="http://schemas.openxmlformats.org/drawingml/2006/main"/>
+          <a:p xmlns:a="http://schemas.openxmlformats.org/drawingml/2006/main"/>
+        </p:txBody>
+      </p:sp>
+    </p:spTree>
+  </p:cSld>
+  <p:clrMapOvr>
+    <a:masterClrMapping xmlns:a="http://schemas.openxmlformats.org/drawingml/2006/main"/>
+  </p:clrMapOvr>
+</p:notes>
+</file>
+
+<file path=ppt/notesSlides/notesSlide14.xml><?xml version="1.0" encoding="utf-8"?>
+<p:notes xmlns:p="http://schemas.openxmlformats.org/presentationml/2006/main">
+  <p:cSld>
+    <p:spTree>
+      <p:nvGrpSpPr>
+        <p:cNvPr id="1" name=""/>
+        <p:cNvGrpSpPr/>
+        <p:nvPr/>
+      </p:nvGrpSpPr>
+      <p:grpSpPr>
+        <a:xfrm xmlns:a="http://schemas.openxmlformats.org/drawingml/2006/main"/>
+      </p:grpSpPr>
+      <p:sp>
+        <p:nvSpPr>
+          <p:cNvPr id="2" name="Slide Image Placeholder 1"/>
+          <p:cNvSpPr>
+            <a:spLocks xmlns:a="http://schemas.openxmlformats.org/drawingml/2006/main" noGrp="1"/>
+          </p:cNvSpPr>
+          <p:nvPr>
+            <p:ph type="sldImg" idx="0"/>
+          </p:nvPr>
+        </p:nvSpPr>
+        <p:spPr/>
+      </p:sp>
+      <p:sp>
+        <p:nvSpPr>
+          <p:cNvPr id="3" name="Notes Placeholder 2"/>
+          <p:cNvSpPr>
+            <a:spLocks xmlns:a="http://schemas.openxmlformats.org/drawingml/2006/main" noGrp="1"/>
+          </p:cNvSpPr>
+          <p:nvPr>
+            <p:ph type="body" idx="1"/>
+          </p:nvPr>
+        </p:nvSpPr>
+        <p:spPr/>
+        <p:txBody>
+          <a:bodyPr xmlns:a="http://schemas.openxmlformats.org/drawingml/2006/main"/>
+          <a:lstStyle xmlns:a="http://schemas.openxmlformats.org/drawingml/2006/main"/>
+          <a:p xmlns:a="http://schemas.openxmlformats.org/drawingml/2006/main">
+            <a:r>
+              <a:t>Source: building bridges reflection.docx, dated 12/19/24. Constraints: max 60 sticks, 24-inch span. Report says build fell approximately 4 inches short and gives no measured maximum load. This is separate from the balsa tower. Photograph from report.</a:t>
+            </a:r>
+          </a:p>
+        </p:txBody>
+      </p:sp>
+      <p:sp>
+        <p:nvSpPr>
+          <p:cNvPr id="4" name="Slide Number Placeholder 3"/>
+          <p:cNvSpPr>
+            <a:spLocks xmlns:a="http://schemas.openxmlformats.org/drawingml/2006/main" noGrp="1"/>
+          </p:cNvSpPr>
+          <p:nvPr>
+            <p:ph type="sldNum" idx="5"/>
+          </p:nvPr>
+        </p:nvSpPr>
+        <p:spPr/>
+        <p:txBody>
+          <a:bodyPr xmlns:a="http://schemas.openxmlformats.org/drawingml/2006/main"/>
+          <a:lstStyle xmlns:a="http://schemas.openxmlformats.org/drawingml/2006/main"/>
+          <a:p xmlns:a="http://schemas.openxmlformats.org/drawingml/2006/main"/>
+        </p:txBody>
+      </p:sp>
+    </p:spTree>
+  </p:cSld>
+  <p:clrMapOvr>
+    <a:masterClrMapping xmlns:a="http://schemas.openxmlformats.org/drawingml/2006/main"/>
+  </p:clrMapOvr>
+</p:notes>
+</file>
+
+<file path=ppt/notesSlides/notesSlide15.xml><?xml version="1.0" encoding="utf-8"?>
+<p:notes xmlns:p="http://schemas.openxmlformats.org/presentationml/2006/main">
+  <p:cSld>
+    <p:spTree>
+      <p:nvGrpSpPr>
+        <p:cNvPr id="1" name=""/>
+        <p:cNvGrpSpPr/>
+        <p:nvPr/>
+      </p:nvGrpSpPr>
+      <p:grpSpPr>
+        <a:xfrm xmlns:a="http://schemas.openxmlformats.org/drawingml/2006/main"/>
+      </p:grpSpPr>
+      <p:sp>
+        <p:nvSpPr>
+          <p:cNvPr id="2" name="Slide Image Placeholder 1"/>
+          <p:cNvSpPr>
+            <a:spLocks xmlns:a="http://schemas.openxmlformats.org/drawingml/2006/main" noGrp="1"/>
+          </p:cNvSpPr>
+          <p:nvPr>
+            <p:ph type="sldImg" idx="0"/>
+          </p:nvPr>
+        </p:nvSpPr>
+        <p:spPr/>
+      </p:sp>
+      <p:sp>
+        <p:nvSpPr>
+          <p:cNvPr id="3" name="Notes Placeholder 2"/>
+          <p:cNvSpPr>
+            <a:spLocks xmlns:a="http://schemas.openxmlformats.org/drawingml/2006/main" noGrp="1"/>
+          </p:cNvSpPr>
+          <p:nvPr>
+            <p:ph type="body" idx="1"/>
+          </p:nvPr>
+        </p:nvSpPr>
+        <p:spPr/>
+        <p:txBody>
+          <a:bodyPr xmlns:a="http://schemas.openxmlformats.org/drawingml/2006/main"/>
+          <a:lstStyle xmlns:a="http://schemas.openxmlformats.org/drawingml/2006/main"/>
+          <a:p xmlns:a="http://schemas.openxmlformats.org/drawingml/2006/main">
+            <a:r>
+              <a:t>Source: Chest Cool Assembly/emili folder/Assembly1cooler.stp. Views render the supplied assembly geometry. Rigoberto’s specific cooler geometry and role are not established by the archive. Team context only.</a:t>
+            </a:r>
+          </a:p>
+        </p:txBody>
+      </p:sp>
+      <p:sp>
+        <p:nvSpPr>
+          <p:cNvPr id="4" name="Slide Number Placeholder 3"/>
+          <p:cNvSpPr>
+            <a:spLocks xmlns:a="http://schemas.openxmlformats.org/drawingml/2006/main" noGrp="1"/>
+          </p:cNvSpPr>
+          <p:nvPr>
+            <p:ph type="sldNum" idx="5"/>
+          </p:nvPr>
+        </p:nvSpPr>
+        <p:spPr/>
+        <p:txBody>
+          <a:bodyPr xmlns:a="http://schemas.openxmlformats.org/drawingml/2006/main"/>
+          <a:lstStyle xmlns:a="http://schemas.openxmlformats.org/drawingml/2006/main"/>
+          <a:p xmlns:a="http://schemas.openxmlformats.org/drawingml/2006/main"/>
+        </p:txBody>
+      </p:sp>
+    </p:spTree>
+  </p:cSld>
+  <p:clrMapOvr>
+    <a:masterClrMapping xmlns:a="http://schemas.openxmlformats.org/drawingml/2006/main"/>
+  </p:clrMapOvr>
+</p:notes>
+</file>
+
+<file path=ppt/notesSlides/notesSlide16.xml><?xml version="1.0" encoding="utf-8"?>
+<p:notes xmlns:p="http://schemas.openxmlformats.org/presentationml/2006/main">
+  <p:cSld>
+    <p:spTree>
+      <p:nvGrpSpPr>
+        <p:cNvPr id="1" name=""/>
+        <p:cNvGrpSpPr/>
+        <p:nvPr/>
+      </p:nvGrpSpPr>
+      <p:grpSpPr>
+        <a:xfrm xmlns:a="http://schemas.openxmlformats.org/drawingml/2006/main"/>
+      </p:grpSpPr>
+      <p:sp>
+        <p:nvSpPr>
+          <p:cNvPr id="2" name="Slide Image Placeholder 1"/>
+          <p:cNvSpPr>
+            <a:spLocks xmlns:a="http://schemas.openxmlformats.org/drawingml/2006/main" noGrp="1"/>
+          </p:cNvSpPr>
+          <p:nvPr>
+            <p:ph type="sldImg" idx="0"/>
+          </p:nvPr>
+        </p:nvSpPr>
+        <p:spPr/>
+      </p:sp>
+      <p:sp>
+        <p:nvSpPr>
+          <p:cNvPr id="3" name="Notes Placeholder 2"/>
+          <p:cNvSpPr>
+            <a:spLocks xmlns:a="http://schemas.openxmlformats.org/drawingml/2006/main" noGrp="1"/>
+          </p:cNvSpPr>
+          <p:nvPr>
+            <p:ph type="body" idx="1"/>
+          </p:nvPr>
+        </p:nvSpPr>
+        <p:spPr/>
+        <p:txBody>
+          <a:bodyPr xmlns:a="http://schemas.openxmlformats.org/drawingml/2006/main"/>
+          <a:lstStyle xmlns:a="http://schemas.openxmlformats.org/drawingml/2006/main"/>
+          <a:p xmlns:a="http://schemas.openxmlformats.org/drawingml/2006/main">
+            <a:r>
               <a:t>Interests and current learning from user-provided context. Repository is private unless owner changes access. Contact email provided in user history.</a:t>
             </a:r>
           </a:p>
@@ -731,7 +1157,7 @@
           <a:lstStyle xmlns:a="http://schemas.openxmlformats.org/drawingml/2006/main"/>
           <a:p xmlns:a="http://schemas.openxmlformats.org/drawingml/2006/main">
             <a:r>
-              <a:t>Source: Speaker construction(1).pdf, sections 1–5 and 7–9. CAD image extracted from page 13. Dimensions from proposal. Partial enclosure CAD, not a physically built speaker. Proposed ESP32 and four ToF sensors.</a:t>
+              <a:t>Photos and sketch from Engineering_WrittenReport_Template.docx. Team project. Image evidence does not establish fully completed RobotC control software.</a:t>
             </a:r>
           </a:p>
         </p:txBody>
@@ -801,7 +1227,7 @@
           <a:lstStyle xmlns:a="http://schemas.openxmlformats.org/drawingml/2006/main"/>
           <a:p xmlns:a="http://schemas.openxmlformats.org/drawingml/2006/main">
             <a:r>
-              <a:t>Source: Speaker construction(1).pdf. Proposed 2.0-channel module does not establish four independent outputs. Next steps here are editorial synthesis of the proposal’s requirements and unresolved decisions, not completed implementation. No measured power or acoustic benefits. CAD image from page 18.</a:t>
+              <a:t>Source: Speaker construction(1).pdf, sections 1–5 and 7–9. CAD image extracted from page 13. Dimensions from proposal. Partial enclosure CAD, not a physically built speaker. Proposed ESP32 and four ToF sensors.</a:t>
             </a:r>
           </a:p>
         </p:txBody>
@@ -871,7 +1297,7 @@
           <a:lstStyle xmlns:a="http://schemas.openxmlformats.org/drawingml/2006/main"/>
           <a:p xmlns:a="http://schemas.openxmlformats.org/drawingml/2006/main">
             <a:r>
-              <a:t>Source: Group Chess Board Assembly archive. Knight, Steve pawn, and wolf bishop title blocks credit Rigoberto Cortez Cadenas. Other drawings credit Natalie Munoz, Stephanie Garcia Solis, and Emiliano Banuelos. Assembly is shared. STEP files from engineering archive; physical printing not established.</a:t>
+              <a:t>Source: Speaker construction(1).pdf. Proposed 2.0-channel module does not establish four independent outputs. Next steps here are editorial synthesis of the proposal’s requirements and unresolved decisions, not completed implementation. No measured power or acoustic benefits. CAD image from page 18.</a:t>
             </a:r>
           </a:p>
         </p:txBody>
@@ -941,7 +1367,7 @@
           <a:lstStyle xmlns:a="http://schemas.openxmlformats.org/drawingml/2006/main"/>
           <a:p xmlns:a="http://schemas.openxmlformats.org/drawingml/2006/main">
             <a:r>
-              <a:t>Sources: Copy of 2.3.7 Container Design Documentation.docx, dated 4/22/25; Copy of 2.3.4.A CAMStrategyPracticePart1 .docx; Copy of 2.3.6 CAMStrategyPractice_.docx. No finished machined-part photo or verified run. STEP files in Chest Cool Assembly archive; authorship not independently established by filename.</a:t>
+              <a:t>Original concept sketch extracted from page 4 of Speaker construction(1).pdf. This is an early concept. The final proposal specifies 4.5-inch height even though the early notebook dimensions differ.</a:t>
             </a:r>
           </a:p>
         </p:txBody>
@@ -1011,7 +1437,7 @@
           <a:lstStyle xmlns:a="http://schemas.openxmlformats.org/drawingml/2006/main"/>
           <a:p xmlns:a="http://schemas.openxmlformats.org/drawingml/2006/main">
             <a:r>
-              <a:t>Sources: Copy of G1.0_ Prototype Planning and Documentation (Assignment).docx and Copy of PR1 Project Proposal (Assignment).docx. Team planning and material exploration. Sensor candidates listed but no completed pressure-mapping system, calibration, or sensing data. Health and market claims not asserted.</a:t>
+              <a:t>Source: Group Chess Board Assembly archive. Knight, Steve pawn, and wolf bishop title blocks credit Rigoberto Cortez Cadenas. Other drawings credit Natalie Munoz, Stephanie Garcia Solis, and Emiliano Banuelos. Assembly is shared. STEP files from engineering archive; physical printing not established.</a:t>
             </a:r>
           </a:p>
         </p:txBody>
@@ -1081,7 +1507,7 @@
           <a:lstStyle xmlns:a="http://schemas.openxmlformats.org/drawingml/2006/main"/>
           <a:p xmlns:a="http://schemas.openxmlformats.org/drawingml/2006/main">
             <a:r>
-              <a:t>Source: building bridges reflection.docx, dated 12/19/24. Constraints: max 60 sticks, 24-inch span. Report says build fell approximately 4 inches short and gives no measured maximum load. This is separate from the balsa tower. Photograph from report.</a:t>
+              <a:t>Original STEP geometry from engineering archive. Model view renders source geometry in a presentation display color. Original dimensioned drawing title block credits Rigoberto Cortez Cadenas. No physical print is claimed.</a:t>
             </a:r>
           </a:p>
         </p:txBody>
@@ -1200,6 +1626,7 @@
                 <a:spcPts val="0"/>
               </a:spcAft>
               <a:buNone/>
+              <a:defRPr/>
             </a:lvl1pPr>
             <a:lvl2pPr marL="0" indent="0">
               <a:lnSpc>
@@ -1212,6 +1639,7 @@
                 <a:spcPts val="0"/>
               </a:spcAft>
               <a:buNone/>
+              <a:defRPr/>
             </a:lvl2pPr>
             <a:lvl3pPr marL="0" indent="0">
               <a:lnSpc>
@@ -1224,6 +1652,7 @@
                 <a:spcPts val="0"/>
               </a:spcAft>
               <a:buNone/>
+              <a:defRPr/>
             </a:lvl3pPr>
             <a:lvl4pPr marL="0" indent="0">
               <a:lnSpc>
@@ -1236,6 +1665,7 @@
                 <a:spcPts val="0"/>
               </a:spcAft>
               <a:buNone/>
+              <a:defRPr/>
             </a:lvl4pPr>
             <a:lvl5pPr marL="0" indent="0">
               <a:lnSpc>
@@ -1248,6 +1678,7 @@
                 <a:spcPts val="0"/>
               </a:spcAft>
               <a:buNone/>
+              <a:defRPr/>
             </a:lvl5pPr>
             <a:lvl6pPr marL="0" indent="0">
               <a:lnSpc>
@@ -1260,6 +1691,7 @@
                 <a:spcPts val="0"/>
               </a:spcAft>
               <a:buNone/>
+              <a:defRPr/>
             </a:lvl6pPr>
             <a:lvl7pPr marL="0" indent="0">
               <a:lnSpc>
@@ -1272,6 +1704,7 @@
                 <a:spcPts val="0"/>
               </a:spcAft>
               <a:buNone/>
+              <a:defRPr/>
             </a:lvl7pPr>
             <a:lvl8pPr marL="0" indent="0">
               <a:lnSpc>
@@ -1284,6 +1717,7 @@
                 <a:spcPts val="0"/>
               </a:spcAft>
               <a:buNone/>
+              <a:defRPr/>
             </a:lvl8pPr>
             <a:lvl9pPr marL="0" indent="0">
               <a:lnSpc>
@@ -1296,6 +1730,7 @@
                 <a:spcPts val="0"/>
               </a:spcAft>
               <a:buNone/>
+              <a:defRPr/>
             </a:lvl9pPr>
           </a:lstStyle>
           <a:p xmlns:a="http://schemas.openxmlformats.org/drawingml/2006/main"/>
@@ -1347,6 +1782,7 @@
                 <a:spcPts val="0"/>
               </a:spcAft>
               <a:buNone/>
+              <a:defRPr/>
             </a:lvl1pPr>
             <a:lvl2pPr marL="0" indent="0">
               <a:lnSpc>
@@ -1359,6 +1795,7 @@
                 <a:spcPts val="0"/>
               </a:spcAft>
               <a:buNone/>
+              <a:defRPr/>
             </a:lvl2pPr>
             <a:lvl3pPr marL="0" indent="0">
               <a:lnSpc>
@@ -1371,6 +1808,7 @@
                 <a:spcPts val="0"/>
               </a:spcAft>
               <a:buNone/>
+              <a:defRPr/>
             </a:lvl3pPr>
             <a:lvl4pPr marL="0" indent="0">
               <a:lnSpc>
@@ -1383,6 +1821,7 @@
                 <a:spcPts val="0"/>
               </a:spcAft>
               <a:buNone/>
+              <a:defRPr/>
             </a:lvl4pPr>
             <a:lvl5pPr marL="0" indent="0">
               <a:lnSpc>
@@ -1395,6 +1834,7 @@
                 <a:spcPts val="0"/>
               </a:spcAft>
               <a:buNone/>
+              <a:defRPr/>
             </a:lvl5pPr>
             <a:lvl6pPr marL="0" indent="0">
               <a:lnSpc>
@@ -1407,6 +1847,7 @@
                 <a:spcPts val="0"/>
               </a:spcAft>
               <a:buNone/>
+              <a:defRPr/>
             </a:lvl6pPr>
             <a:lvl7pPr marL="0" indent="0">
               <a:lnSpc>
@@ -1419,6 +1860,7 @@
                 <a:spcPts val="0"/>
               </a:spcAft>
               <a:buNone/>
+              <a:defRPr/>
             </a:lvl7pPr>
             <a:lvl8pPr marL="0" indent="0">
               <a:lnSpc>
@@ -1431,6 +1873,7 @@
                 <a:spcPts val="0"/>
               </a:spcAft>
               <a:buNone/>
+              <a:defRPr/>
             </a:lvl8pPr>
             <a:lvl9pPr marL="0" indent="0">
               <a:lnSpc>
@@ -1443,6 +1886,7 @@
                 <a:spcPts val="0"/>
               </a:spcAft>
               <a:buNone/>
+              <a:defRPr/>
             </a:lvl9pPr>
           </a:lstStyle>
           <a:p xmlns:a="http://schemas.openxmlformats.org/drawingml/2006/main"/>
@@ -1542,6 +1986,7 @@
                 <a:spcPts val="0"/>
               </a:spcAft>
               <a:buNone/>
+              <a:defRPr/>
             </a:lvl1pPr>
             <a:lvl2pPr marL="0" indent="0">
               <a:lnSpc>
@@ -1554,6 +1999,7 @@
                 <a:spcPts val="0"/>
               </a:spcAft>
               <a:buNone/>
+              <a:defRPr/>
             </a:lvl2pPr>
             <a:lvl3pPr marL="0" indent="0">
               <a:lnSpc>
@@ -1566,6 +2012,7 @@
                 <a:spcPts val="0"/>
               </a:spcAft>
               <a:buNone/>
+              <a:defRPr/>
             </a:lvl3pPr>
             <a:lvl4pPr marL="0" indent="0">
               <a:lnSpc>
@@ -1578,6 +2025,7 @@
                 <a:spcPts val="0"/>
               </a:spcAft>
               <a:buNone/>
+              <a:defRPr/>
             </a:lvl4pPr>
             <a:lvl5pPr marL="0" indent="0">
               <a:lnSpc>
@@ -1590,6 +2038,7 @@
                 <a:spcPts val="0"/>
               </a:spcAft>
               <a:buNone/>
+              <a:defRPr/>
             </a:lvl5pPr>
             <a:lvl6pPr marL="0" indent="0">
               <a:lnSpc>
@@ -1602,6 +2051,7 @@
                 <a:spcPts val="0"/>
               </a:spcAft>
               <a:buNone/>
+              <a:defRPr/>
             </a:lvl6pPr>
             <a:lvl7pPr marL="0" indent="0">
               <a:lnSpc>
@@ -1614,6 +2064,7 @@
                 <a:spcPts val="0"/>
               </a:spcAft>
               <a:buNone/>
+              <a:defRPr/>
             </a:lvl7pPr>
             <a:lvl8pPr marL="0" indent="0">
               <a:lnSpc>
@@ -1626,6 +2077,7 @@
                 <a:spcPts val="0"/>
               </a:spcAft>
               <a:buNone/>
+              <a:defRPr/>
             </a:lvl8pPr>
             <a:lvl9pPr marL="0" indent="0">
               <a:lnSpc>
@@ -1638,6 +2090,7 @@
                 <a:spcPts val="0"/>
               </a:spcAft>
               <a:buNone/>
+              <a:defRPr/>
             </a:lvl9pPr>
           </a:lstStyle>
           <a:p xmlns:a="http://schemas.openxmlformats.org/drawingml/2006/main"/>
@@ -1737,6 +2190,7 @@
                 <a:spcPts val="0"/>
               </a:spcAft>
               <a:buNone/>
+              <a:defRPr/>
             </a:lvl1pPr>
             <a:lvl2pPr marL="0" indent="0">
               <a:lnSpc>
@@ -1749,6 +2203,7 @@
                 <a:spcPts val="0"/>
               </a:spcAft>
               <a:buNone/>
+              <a:defRPr/>
             </a:lvl2pPr>
             <a:lvl3pPr marL="0" indent="0">
               <a:lnSpc>
@@ -1761,6 +2216,7 @@
                 <a:spcPts val="0"/>
               </a:spcAft>
               <a:buNone/>
+              <a:defRPr/>
             </a:lvl3pPr>
             <a:lvl4pPr marL="0" indent="0">
               <a:lnSpc>
@@ -1773,6 +2229,7 @@
                 <a:spcPts val="0"/>
               </a:spcAft>
               <a:buNone/>
+              <a:defRPr/>
             </a:lvl4pPr>
             <a:lvl5pPr marL="0" indent="0">
               <a:lnSpc>
@@ -1785,6 +2242,7 @@
                 <a:spcPts val="0"/>
               </a:spcAft>
               <a:buNone/>
+              <a:defRPr/>
             </a:lvl5pPr>
             <a:lvl6pPr marL="0" indent="0">
               <a:lnSpc>
@@ -1797,6 +2255,7 @@
                 <a:spcPts val="0"/>
               </a:spcAft>
               <a:buNone/>
+              <a:defRPr/>
             </a:lvl6pPr>
             <a:lvl7pPr marL="0" indent="0">
               <a:lnSpc>
@@ -1809,6 +2268,7 @@
                 <a:spcPts val="0"/>
               </a:spcAft>
               <a:buNone/>
+              <a:defRPr/>
             </a:lvl7pPr>
             <a:lvl8pPr marL="0" indent="0">
               <a:lnSpc>
@@ -1821,6 +2281,7 @@
                 <a:spcPts val="0"/>
               </a:spcAft>
               <a:buNone/>
+              <a:defRPr/>
             </a:lvl8pPr>
             <a:lvl9pPr marL="0" indent="0">
               <a:lnSpc>
@@ -1833,6 +2294,7 @@
                 <a:spcPts val="0"/>
               </a:spcAft>
               <a:buNone/>
+              <a:defRPr/>
             </a:lvl9pPr>
           </a:lstStyle>
           <a:p xmlns:a="http://schemas.openxmlformats.org/drawingml/2006/main"/>
@@ -1884,6 +2346,7 @@
                 <a:spcPts val="1200"/>
               </a:spcAft>
               <a:buChar char="•"/>
+              <a:defRPr/>
             </a:lvl1pPr>
             <a:lvl2pPr marL="533400" indent="-228600">
               <a:lnSpc>
@@ -1896,6 +2359,7 @@
                 <a:spcPts val="1200"/>
               </a:spcAft>
               <a:buChar char="•"/>
+              <a:defRPr/>
             </a:lvl2pPr>
             <a:lvl3pPr marL="838200" indent="-228600">
               <a:lnSpc>
@@ -1908,6 +2372,7 @@
                 <a:spcPts val="1200"/>
               </a:spcAft>
               <a:buChar char="•"/>
+              <a:defRPr/>
             </a:lvl3pPr>
             <a:lvl4pPr marL="1143000" indent="-228600">
               <a:lnSpc>
@@ -1920,6 +2385,7 @@
                 <a:spcPts val="1200"/>
               </a:spcAft>
               <a:buChar char="•"/>
+              <a:defRPr/>
             </a:lvl4pPr>
             <a:lvl5pPr marL="1447800" indent="-228600">
               <a:lnSpc>
@@ -1932,6 +2398,7 @@
                 <a:spcPts val="1200"/>
               </a:spcAft>
               <a:buChar char="•"/>
+              <a:defRPr/>
             </a:lvl5pPr>
             <a:lvl6pPr marL="1752600" indent="-228600">
               <a:lnSpc>
@@ -1944,6 +2411,7 @@
                 <a:spcPts val="1200"/>
               </a:spcAft>
               <a:buChar char="•"/>
+              <a:defRPr/>
             </a:lvl6pPr>
             <a:lvl7pPr marL="2057400" indent="-228600">
               <a:lnSpc>
@@ -1956,6 +2424,7 @@
                 <a:spcPts val="1200"/>
               </a:spcAft>
               <a:buChar char="•"/>
+              <a:defRPr/>
             </a:lvl7pPr>
             <a:lvl8pPr marL="2362200" indent="-228600">
               <a:lnSpc>
@@ -1968,6 +2437,7 @@
                 <a:spcPts val="1200"/>
               </a:spcAft>
               <a:buChar char="•"/>
+              <a:defRPr/>
             </a:lvl8pPr>
             <a:lvl9pPr marL="2667000" indent="-228600">
               <a:lnSpc>
@@ -1980,6 +2450,7 @@
                 <a:spcPts val="1200"/>
               </a:spcAft>
               <a:buChar char="•"/>
+              <a:defRPr/>
             </a:lvl9pPr>
           </a:lstStyle>
           <a:p xmlns:a="http://schemas.openxmlformats.org/drawingml/2006/main"/>
@@ -2079,6 +2550,7 @@
                 <a:spcPts val="0"/>
               </a:spcAft>
               <a:buNone/>
+              <a:defRPr/>
             </a:lvl1pPr>
             <a:lvl2pPr marL="0" indent="0">
               <a:lnSpc>
@@ -2091,6 +2563,7 @@
                 <a:spcPts val="0"/>
               </a:spcAft>
               <a:buNone/>
+              <a:defRPr/>
             </a:lvl2pPr>
             <a:lvl3pPr marL="0" indent="0">
               <a:lnSpc>
@@ -2103,6 +2576,7 @@
                 <a:spcPts val="0"/>
               </a:spcAft>
               <a:buNone/>
+              <a:defRPr/>
             </a:lvl3pPr>
             <a:lvl4pPr marL="0" indent="0">
               <a:lnSpc>
@@ -2115,6 +2589,7 @@
                 <a:spcPts val="0"/>
               </a:spcAft>
               <a:buNone/>
+              <a:defRPr/>
             </a:lvl4pPr>
             <a:lvl5pPr marL="0" indent="0">
               <a:lnSpc>
@@ -2127,6 +2602,7 @@
                 <a:spcPts val="0"/>
               </a:spcAft>
               <a:buNone/>
+              <a:defRPr/>
             </a:lvl5pPr>
             <a:lvl6pPr marL="0" indent="0">
               <a:lnSpc>
@@ -2139,6 +2615,7 @@
                 <a:spcPts val="0"/>
               </a:spcAft>
               <a:buNone/>
+              <a:defRPr/>
             </a:lvl6pPr>
             <a:lvl7pPr marL="0" indent="0">
               <a:lnSpc>
@@ -2151,6 +2628,7 @@
                 <a:spcPts val="0"/>
               </a:spcAft>
               <a:buNone/>
+              <a:defRPr/>
             </a:lvl7pPr>
             <a:lvl8pPr marL="0" indent="0">
               <a:lnSpc>
@@ -2163,6 +2641,7 @@
                 <a:spcPts val="0"/>
               </a:spcAft>
               <a:buNone/>
+              <a:defRPr/>
             </a:lvl8pPr>
             <a:lvl9pPr marL="0" indent="0">
               <a:lnSpc>
@@ -2175,6 +2654,7 @@
                 <a:spcPts val="0"/>
               </a:spcAft>
               <a:buNone/>
+              <a:defRPr/>
             </a:lvl9pPr>
           </a:lstStyle>
           <a:p xmlns:a="http://schemas.openxmlformats.org/drawingml/2006/main"/>
@@ -2226,6 +2706,7 @@
                 <a:spcPts val="1200"/>
               </a:spcAft>
               <a:buChar char="•"/>
+              <a:defRPr/>
             </a:lvl1pPr>
             <a:lvl2pPr marL="533400" indent="-228600">
               <a:lnSpc>
@@ -2238,6 +2719,7 @@
                 <a:spcPts val="1200"/>
               </a:spcAft>
               <a:buChar char="•"/>
+              <a:defRPr/>
             </a:lvl2pPr>
             <a:lvl3pPr marL="838200" indent="-228600">
               <a:lnSpc>
@@ -2250,6 +2732,7 @@
                 <a:spcPts val="1200"/>
               </a:spcAft>
               <a:buChar char="•"/>
+              <a:defRPr/>
             </a:lvl3pPr>
             <a:lvl4pPr marL="1143000" indent="-228600">
               <a:lnSpc>
@@ -2262,6 +2745,7 @@
                 <a:spcPts val="1200"/>
               </a:spcAft>
               <a:buChar char="•"/>
+              <a:defRPr/>
             </a:lvl4pPr>
             <a:lvl5pPr marL="1447800" indent="-228600">
               <a:lnSpc>
@@ -2274,6 +2758,7 @@
                 <a:spcPts val="1200"/>
               </a:spcAft>
               <a:buChar char="•"/>
+              <a:defRPr/>
             </a:lvl5pPr>
             <a:lvl6pPr marL="1752600" indent="-228600">
               <a:lnSpc>
@@ -2286,6 +2771,7 @@
                 <a:spcPts val="1200"/>
               </a:spcAft>
               <a:buChar char="•"/>
+              <a:defRPr/>
             </a:lvl6pPr>
             <a:lvl7pPr marL="2057400" indent="-228600">
               <a:lnSpc>
@@ -2298,6 +2784,7 @@
                 <a:spcPts val="1200"/>
               </a:spcAft>
               <a:buChar char="•"/>
+              <a:defRPr/>
             </a:lvl7pPr>
             <a:lvl8pPr marL="2362200" indent="-228600">
               <a:lnSpc>
@@ -2310,6 +2797,7 @@
                 <a:spcPts val="1200"/>
               </a:spcAft>
               <a:buChar char="•"/>
+              <a:defRPr/>
             </a:lvl8pPr>
             <a:lvl9pPr marL="2667000" indent="-228600">
               <a:lnSpc>
@@ -2322,6 +2810,7 @@
                 <a:spcPts val="1200"/>
               </a:spcAft>
               <a:buChar char="•"/>
+              <a:defRPr/>
             </a:lvl9pPr>
           </a:lstStyle>
           <a:p xmlns:a="http://schemas.openxmlformats.org/drawingml/2006/main"/>
@@ -2373,6 +2862,7 @@
                 <a:spcPts val="1200"/>
               </a:spcAft>
               <a:buChar char="•"/>
+              <a:defRPr/>
             </a:lvl1pPr>
             <a:lvl2pPr marL="533400" indent="-228600">
               <a:lnSpc>
@@ -2385,6 +2875,7 @@
                 <a:spcPts val="1200"/>
               </a:spcAft>
               <a:buChar char="•"/>
+              <a:defRPr/>
             </a:lvl2pPr>
             <a:lvl3pPr marL="838200" indent="-228600">
               <a:lnSpc>
@@ -2397,6 +2888,7 @@
                 <a:spcPts val="1200"/>
               </a:spcAft>
               <a:buChar char="•"/>
+              <a:defRPr/>
             </a:lvl3pPr>
             <a:lvl4pPr marL="1143000" indent="-228600">
               <a:lnSpc>
@@ -2409,6 +2901,7 @@
                 <a:spcPts val="1200"/>
               </a:spcAft>
               <a:buChar char="•"/>
+              <a:defRPr/>
             </a:lvl4pPr>
             <a:lvl5pPr marL="1447800" indent="-228600">
               <a:lnSpc>
@@ -2421,6 +2914,7 @@
                 <a:spcPts val="1200"/>
               </a:spcAft>
               <a:buChar char="•"/>
+              <a:defRPr/>
             </a:lvl5pPr>
             <a:lvl6pPr marL="1752600" indent="-228600">
               <a:lnSpc>
@@ -2433,6 +2927,7 @@
                 <a:spcPts val="1200"/>
               </a:spcAft>
               <a:buChar char="•"/>
+              <a:defRPr/>
             </a:lvl6pPr>
             <a:lvl7pPr marL="2057400" indent="-228600">
               <a:lnSpc>
@@ -2445,6 +2940,7 @@
                 <a:spcPts val="1200"/>
               </a:spcAft>
               <a:buChar char="•"/>
+              <a:defRPr/>
             </a:lvl7pPr>
             <a:lvl8pPr marL="2362200" indent="-228600">
               <a:lnSpc>
@@ -2457,6 +2953,7 @@
                 <a:spcPts val="1200"/>
               </a:spcAft>
               <a:buChar char="•"/>
+              <a:defRPr/>
             </a:lvl8pPr>
             <a:lvl9pPr marL="2667000" indent="-228600">
               <a:lnSpc>
@@ -2469,6 +2966,7 @@
                 <a:spcPts val="1200"/>
               </a:spcAft>
               <a:buChar char="•"/>
+              <a:defRPr/>
             </a:lvl9pPr>
           </a:lstStyle>
           <a:p xmlns:a="http://schemas.openxmlformats.org/drawingml/2006/main"/>
@@ -2568,6 +3066,7 @@
                 <a:spcPts val="0"/>
               </a:spcAft>
               <a:buNone/>
+              <a:defRPr/>
             </a:lvl1pPr>
             <a:lvl2pPr marL="0" indent="0">
               <a:lnSpc>
@@ -2580,6 +3079,7 @@
                 <a:spcPts val="0"/>
               </a:spcAft>
               <a:buNone/>
+              <a:defRPr/>
             </a:lvl2pPr>
             <a:lvl3pPr marL="0" indent="0">
               <a:lnSpc>
@@ -2592,6 +3092,7 @@
                 <a:spcPts val="0"/>
               </a:spcAft>
               <a:buNone/>
+              <a:defRPr/>
             </a:lvl3pPr>
             <a:lvl4pPr marL="0" indent="0">
               <a:lnSpc>
@@ -2604,6 +3105,7 @@
                 <a:spcPts val="0"/>
               </a:spcAft>
               <a:buNone/>
+              <a:defRPr/>
             </a:lvl4pPr>
             <a:lvl5pPr marL="0" indent="0">
               <a:lnSpc>
@@ -2616,6 +3118,7 @@
                 <a:spcPts val="0"/>
               </a:spcAft>
               <a:buNone/>
+              <a:defRPr/>
             </a:lvl5pPr>
             <a:lvl6pPr marL="0" indent="0">
               <a:lnSpc>
@@ -2628,6 +3131,7 @@
                 <a:spcPts val="0"/>
               </a:spcAft>
               <a:buNone/>
+              <a:defRPr/>
             </a:lvl6pPr>
             <a:lvl7pPr marL="0" indent="0">
               <a:lnSpc>
@@ -2640,6 +3144,7 @@
                 <a:spcPts val="0"/>
               </a:spcAft>
               <a:buNone/>
+              <a:defRPr/>
             </a:lvl7pPr>
             <a:lvl8pPr marL="0" indent="0">
               <a:lnSpc>
@@ -2652,6 +3157,7 @@
                 <a:spcPts val="0"/>
               </a:spcAft>
               <a:buNone/>
+              <a:defRPr/>
             </a:lvl8pPr>
             <a:lvl9pPr marL="0" indent="0">
               <a:lnSpc>
@@ -2664,6 +3170,7 @@
                 <a:spcPts val="0"/>
               </a:spcAft>
               <a:buNone/>
+              <a:defRPr/>
             </a:lvl9pPr>
           </a:lstStyle>
           <a:p xmlns:a="http://schemas.openxmlformats.org/drawingml/2006/main"/>
@@ -2715,6 +3222,7 @@
                 <a:spcPts val="1200"/>
               </a:spcAft>
               <a:buChar char="•"/>
+              <a:defRPr/>
             </a:lvl1pPr>
             <a:lvl2pPr marL="533400" indent="-228600">
               <a:lnSpc>
@@ -2727,6 +3235,7 @@
                 <a:spcPts val="1200"/>
               </a:spcAft>
               <a:buChar char="•"/>
+              <a:defRPr/>
             </a:lvl2pPr>
             <a:lvl3pPr marL="838200" indent="-228600">
               <a:lnSpc>
@@ -2739,6 +3248,7 @@
                 <a:spcPts val="1200"/>
               </a:spcAft>
               <a:buChar char="•"/>
+              <a:defRPr/>
             </a:lvl3pPr>
             <a:lvl4pPr marL="1143000" indent="-228600">
               <a:lnSpc>
@@ -2751,6 +3261,7 @@
                 <a:spcPts val="1200"/>
               </a:spcAft>
               <a:buChar char="•"/>
+              <a:defRPr/>
             </a:lvl4pPr>
             <a:lvl5pPr marL="1447800" indent="-228600">
               <a:lnSpc>
@@ -2763,6 +3274,7 @@
                 <a:spcPts val="1200"/>
               </a:spcAft>
               <a:buChar char="•"/>
+              <a:defRPr/>
             </a:lvl5pPr>
             <a:lvl6pPr marL="1752600" indent="-228600">
               <a:lnSpc>
@@ -2775,6 +3287,7 @@
                 <a:spcPts val="1200"/>
               </a:spcAft>
               <a:buChar char="•"/>
+              <a:defRPr/>
             </a:lvl6pPr>
             <a:lvl7pPr marL="2057400" indent="-228600">
               <a:lnSpc>
@@ -2787,6 +3300,7 @@
                 <a:spcPts val="1200"/>
               </a:spcAft>
               <a:buChar char="•"/>
+              <a:defRPr/>
             </a:lvl7pPr>
             <a:lvl8pPr marL="2362200" indent="-228600">
               <a:lnSpc>
@@ -2799,6 +3313,7 @@
                 <a:spcPts val="1200"/>
               </a:spcAft>
               <a:buChar char="•"/>
+              <a:defRPr/>
             </a:lvl8pPr>
             <a:lvl9pPr marL="2667000" indent="-228600">
               <a:lnSpc>
@@ -2811,6 +3326,7 @@
                 <a:spcPts val="1200"/>
               </a:spcAft>
               <a:buChar char="•"/>
+              <a:defRPr/>
             </a:lvl9pPr>
           </a:lstStyle>
           <a:p xmlns:a="http://schemas.openxmlformats.org/drawingml/2006/main"/>
@@ -2859,12 +3375,12 @@
   </p:cSld>
   <p:clrMap bg1="lt1" tx1="dk1" bg2="lt2" tx2="dk2" accent1="accent1" accent2="accent2" accent3="accent3" accent4="accent4" accent5="accent5" accent6="accent6" hlink="hlink" folHlink="folHlink"/>
   <p:sldLayoutIdLst>
-    <p:sldLayoutId xmlns:r="http://schemas.openxmlformats.org/officeDocument/2006/relationships" id="2147483649" r:id="Ref398a1d42194a8f"/>
-    <p:sldLayoutId xmlns:r="http://schemas.openxmlformats.org/officeDocument/2006/relationships" id="2147483650" r:id="R91cdce54269341e5"/>
-    <p:sldLayoutId xmlns:r="http://schemas.openxmlformats.org/officeDocument/2006/relationships" id="2147483651" r:id="R8bd05386b096427e"/>
-    <p:sldLayoutId xmlns:r="http://schemas.openxmlformats.org/officeDocument/2006/relationships" id="2147483652" r:id="Rb8a0c5eead0547b9"/>
-    <p:sldLayoutId xmlns:r="http://schemas.openxmlformats.org/officeDocument/2006/relationships" id="2147483653" r:id="R2453324e3c04473b"/>
-    <p:sldLayoutId xmlns:r="http://schemas.openxmlformats.org/officeDocument/2006/relationships" id="2147483654" r:id="Ra4df0e6c48b347f1"/>
+    <p:sldLayoutId xmlns:r="http://schemas.openxmlformats.org/officeDocument/2006/relationships" id="2147483649" r:id="R2337f1e115cd4804"/>
+    <p:sldLayoutId xmlns:r="http://schemas.openxmlformats.org/officeDocument/2006/relationships" id="2147483650" r:id="R11b89cc4da9a4cff"/>
+    <p:sldLayoutId xmlns:r="http://schemas.openxmlformats.org/officeDocument/2006/relationships" id="2147483651" r:id="Ra58d912e833d45a3"/>
+    <p:sldLayoutId xmlns:r="http://schemas.openxmlformats.org/officeDocument/2006/relationships" id="2147483652" r:id="R5717e280a4964fec"/>
+    <p:sldLayoutId xmlns:r="http://schemas.openxmlformats.org/officeDocument/2006/relationships" id="2147483653" r:id="R8060662127f5467c"/>
+    <p:sldLayoutId xmlns:r="http://schemas.openxmlformats.org/officeDocument/2006/relationships" id="2147483654" r:id="R19b9a89b17644f28"/>
   </p:sldLayoutIdLst>
   <p:txStyles>
     <p:titleStyle>
@@ -3444,6 +3960,7 @@
           <a:lstStyle xmlns:a="http://schemas.openxmlformats.org/drawingml/2006/main"/>
           <a:p xmlns:a="http://schemas.openxmlformats.org/drawingml/2006/main">
             <a:pPr>
+              <a:buNone/>
               <a:defRPr sz="5850" b="1">
                 <a:solidFill>
                   <a:srgbClr val="FFFFFF"/>
@@ -3467,6 +3984,7 @@
           </a:p>
           <a:p xmlns:a="http://schemas.openxmlformats.org/drawingml/2006/main">
             <a:pPr>
+              <a:buNone/>
               <a:defRPr sz="5850" b="1">
                 <a:solidFill>
                   <a:srgbClr val="FFFFFF"/>
@@ -3524,6 +4042,7 @@
           <a:lstStyle xmlns:a="http://schemas.openxmlformats.org/drawingml/2006/main"/>
           <a:p xmlns:a="http://schemas.openxmlformats.org/drawingml/2006/main">
             <a:pPr>
+              <a:buNone/>
               <a:defRPr sz="1725" b="0">
                 <a:solidFill>
                   <a:srgbClr val="7BC8C3"/>
@@ -3581,6 +4100,7 @@
           <a:lstStyle xmlns:a="http://schemas.openxmlformats.org/drawingml/2006/main"/>
           <a:p xmlns:a="http://schemas.openxmlformats.org/drawingml/2006/main">
             <a:pPr>
+              <a:buNone/>
               <a:defRPr sz="2250" b="0">
                 <a:solidFill>
                   <a:srgbClr val="DEE7EA"/>
@@ -3604,6 +4124,7 @@
           </a:p>
           <a:p xmlns:a="http://schemas.openxmlformats.org/drawingml/2006/main">
             <a:pPr>
+              <a:buNone/>
               <a:defRPr sz="2250" b="0">
                 <a:solidFill>
                   <a:srgbClr val="DEE7EA"/>
@@ -3661,6 +4182,7 @@
           <a:lstStyle xmlns:a="http://schemas.openxmlformats.org/drawingml/2006/main"/>
           <a:p xmlns:a="http://schemas.openxmlformats.org/drawingml/2006/main">
             <a:pPr>
+              <a:buNone/>
               <a:defRPr sz="2025" b="0">
                 <a:solidFill>
                   <a:srgbClr val="B9C9D0"/>
@@ -3695,6 +4217,2328 @@
 </file>
 
 <file path=ppt/slides/slide10.xml><?xml version="1.0" encoding="utf-8"?>
+<p:sld xmlns:p="http://schemas.openxmlformats.org/presentationml/2006/main">
+  <p:cSld>
+    <p:bg>
+      <p:bgPr>
+        <a:solidFill xmlns:a="http://schemas.openxmlformats.org/drawingml/2006/main">
+          <a:srgbClr val="F6F8F7"/>
+        </a:solidFill>
+      </p:bgPr>
+    </p:bg>
+    <p:spTree>
+      <p:nvGrpSpPr>
+        <p:cNvPr id="1" name=""/>
+        <p:cNvGrpSpPr/>
+        <p:nvPr/>
+      </p:nvGrpSpPr>
+      <p:grpSpPr>
+        <a:xfrm xmlns:a="http://schemas.openxmlformats.org/drawingml/2006/main"/>
+      </p:grpSpPr>
+      <p:sp>
+        <p:nvSpPr>
+          <p:cNvPr id="7" name="">
+            <a:extLst xmlns:a="http://schemas.openxmlformats.org/drawingml/2006/main">
+              <a:ext uri="{FF2B5EF4-FFF2-40B4-BE49-F238E27FC236}">
+                <a16:creationId xmlns:a16="http://schemas.microsoft.com/office/drawing/2014/main" id="{A2E5C8A1-1B8D-4D36-8F8C-836AFED28CED}"/>
+              </a:ext>
+            </a:extLst>
+          </p:cNvPr>
+          <p:cNvSpPr>
+            <a:spLocks xmlns:a="http://schemas.openxmlformats.org/drawingml/2006/main" noGrp="1"/>
+          </p:cNvSpPr>
+          <p:nvPr/>
+        </p:nvSpPr>
+        <p:spPr>
+          <a:xfrm xmlns:a="http://schemas.openxmlformats.org/drawingml/2006/main">
+            <a:off x="609600" y="428625"/>
+            <a:ext cx="10972800" cy="762000"/>
+          </a:xfrm>
+          <a:prstGeom xmlns:a="http://schemas.openxmlformats.org/drawingml/2006/main" prst="rect">
+            <a:avLst/>
+          </a:prstGeom>
+          <a:noFill xmlns:a="http://schemas.openxmlformats.org/drawingml/2006/main"/>
+          <a:ln xmlns:a="http://schemas.openxmlformats.org/drawingml/2006/main" w="0">
+            <a:noFill/>
+          </a:ln>
+        </p:spPr>
+        <p:txBody>
+          <a:bodyPr xmlns:a="http://schemas.openxmlformats.org/drawingml/2006/main">
+            <a:noAutofit/>
+          </a:bodyPr>
+          <a:lstStyle xmlns:a="http://schemas.openxmlformats.org/drawingml/2006/main"/>
+          <a:p xmlns:a="http://schemas.openxmlformats.org/drawingml/2006/main">
+            <a:pPr>
+              <a:defRPr sz="3450" b="1">
+                <a:solidFill>
+                  <a:srgbClr val="102637"/>
+                </a:solidFill>
+                <a:latin typeface="DejaVu Sans"/>
+                <a:ea typeface="DejaVu Sans"/>
+                <a:cs typeface="DejaVu Sans"/>
+              </a:defRPr>
+            </a:pPr>
+            <a:r>
+              <a:rPr sz="3450" b="1">
+                <a:solidFill>
+                  <a:srgbClr val="102637"/>
+                </a:solidFill>
+                <a:latin typeface="DejaVu Sans"/>
+                <a:ea typeface="DejaVu Sans"/>
+                <a:cs typeface="DejaVu Sans"/>
+              </a:rPr>
+              <a:t>Steve piece</a:t>
+            </a:r>
+          </a:p>
+        </p:txBody>
+      </p:sp>
+      <p:sp>
+        <p:nvSpPr>
+          <p:cNvPr id="2" name="">
+            <a:extLst xmlns:a="http://schemas.openxmlformats.org/drawingml/2006/main">
+              <a:ext uri="{FF2B5EF4-FFF2-40B4-BE49-F238E27FC236}">
+                <a16:creationId xmlns:a16="http://schemas.microsoft.com/office/drawing/2014/main" id="{09F4CF91-2A3D-4A2B-B1AF-E3458815AE19}"/>
+              </a:ext>
+            </a:extLst>
+          </p:cNvPr>
+          <p:cNvSpPr>
+            <a:spLocks xmlns:a="http://schemas.openxmlformats.org/drawingml/2006/main" noGrp="1"/>
+          </p:cNvSpPr>
+          <p:nvPr/>
+        </p:nvSpPr>
+        <p:spPr>
+          <a:xfrm xmlns:a="http://schemas.openxmlformats.org/drawingml/2006/main">
+            <a:off x="609600" y="1190625"/>
+            <a:ext cx="10972800" cy="400050"/>
+          </a:xfrm>
+          <a:prstGeom xmlns:a="http://schemas.openxmlformats.org/drawingml/2006/main" prst="rect">
+            <a:avLst/>
+          </a:prstGeom>
+          <a:noFill xmlns:a="http://schemas.openxmlformats.org/drawingml/2006/main"/>
+          <a:ln xmlns:a="http://schemas.openxmlformats.org/drawingml/2006/main" w="0">
+            <a:noFill/>
+          </a:ln>
+        </p:spPr>
+        <p:txBody>
+          <a:bodyPr xmlns:a="http://schemas.openxmlformats.org/drawingml/2006/main">
+            <a:noAutofit/>
+          </a:bodyPr>
+          <a:lstStyle xmlns:a="http://schemas.openxmlformats.org/drawingml/2006/main"/>
+          <a:p xmlns:a="http://schemas.openxmlformats.org/drawingml/2006/main">
+            <a:pPr>
+              <a:defRPr sz="1650" b="0">
+                <a:solidFill>
+                  <a:srgbClr val="147F80"/>
+                </a:solidFill>
+                <a:latin typeface="DejaVu Sans"/>
+                <a:ea typeface="DejaVu Sans"/>
+                <a:cs typeface="DejaVu Sans"/>
+              </a:defRPr>
+            </a:pPr>
+            <a:r>
+              <a:rPr sz="1650" b="0">
+                <a:solidFill>
+                  <a:srgbClr val="147F80"/>
+                </a:solidFill>
+                <a:latin typeface="DejaVu Sans"/>
+                <a:ea typeface="DejaVu Sans"/>
+                <a:cs typeface="DejaVu Sans"/>
+              </a:rPr>
+              <a:t>My Minecraft chess design</a:t>
+            </a:r>
+          </a:p>
+        </p:txBody>
+      </p:sp>
+      <p:pic>
+        <p:nvPicPr>
+          <p:cNvPr id="9" name=""/>
+          <p:cNvPicPr>
+            <a:picLocks xmlns:a="http://schemas.openxmlformats.org/drawingml/2006/main" noChangeAspect="1"/>
+          </p:cNvPicPr>
+          <p:nvPr/>
+        </p:nvPicPr>
+        <p:blipFill>
+          <a:blip xmlns:r="http://schemas.openxmlformats.org/officeDocument/2006/relationships" xmlns:a="http://schemas.openxmlformats.org/drawingml/2006/main" r:embed="Rd0405e2ed87c4e23"/>
+          <a:stretch xmlns:a="http://schemas.openxmlformats.org/drawingml/2006/main"/>
+        </p:blipFill>
+        <p:spPr>
+          <a:xfrm xmlns:a="http://schemas.openxmlformats.org/drawingml/2006/main">
+            <a:off x="609600" y="2218892"/>
+            <a:ext cx="4238625" cy="3467966"/>
+          </a:xfrm>
+          <a:prstGeom xmlns:a="http://schemas.openxmlformats.org/drawingml/2006/main" prst="rect">
+            <a:avLst/>
+          </a:prstGeom>
+        </p:spPr>
+      </p:pic>
+      <p:pic>
+        <p:nvPicPr>
+          <p:cNvPr id="10" name=""/>
+          <p:cNvPicPr>
+            <a:picLocks xmlns:a="http://schemas.openxmlformats.org/drawingml/2006/main" noChangeAspect="1"/>
+          </p:cNvPicPr>
+          <p:nvPr/>
+        </p:nvPicPr>
+        <p:blipFill>
+          <a:blip xmlns:r="http://schemas.openxmlformats.org/officeDocument/2006/relationships" xmlns:a="http://schemas.openxmlformats.org/drawingml/2006/main" r:embed="R26955462ee9d4cb6"/>
+          <a:stretch xmlns:a="http://schemas.openxmlformats.org/drawingml/2006/main"/>
+        </p:blipFill>
+        <p:spPr>
+          <a:xfrm xmlns:a="http://schemas.openxmlformats.org/drawingml/2006/main">
+            <a:off x="5257800" y="1920929"/>
+            <a:ext cx="6324600" cy="4063892"/>
+          </a:xfrm>
+          <a:prstGeom xmlns:a="http://schemas.openxmlformats.org/drawingml/2006/main" prst="rect">
+            <a:avLst/>
+          </a:prstGeom>
+        </p:spPr>
+      </p:pic>
+      <p:sp>
+        <p:nvSpPr>
+          <p:cNvPr id="5" name="">
+            <a:extLst xmlns:a="http://schemas.openxmlformats.org/drawingml/2006/main">
+              <a:ext uri="{FF2B5EF4-FFF2-40B4-BE49-F238E27FC236}">
+                <a16:creationId xmlns:a16="http://schemas.microsoft.com/office/drawing/2014/main" id="{442316FD-83B9-4B39-9989-3FA76D1F6A7E}"/>
+              </a:ext>
+            </a:extLst>
+          </p:cNvPr>
+          <p:cNvSpPr>
+            <a:spLocks xmlns:a="http://schemas.openxmlformats.org/drawingml/2006/main" noGrp="1"/>
+          </p:cNvSpPr>
+          <p:nvPr/>
+        </p:nvSpPr>
+        <p:spPr>
+          <a:xfrm xmlns:a="http://schemas.openxmlformats.org/drawingml/2006/main">
+            <a:off x="609600" y="6257925"/>
+            <a:ext cx="4238625" cy="314325"/>
+          </a:xfrm>
+          <a:prstGeom xmlns:a="http://schemas.openxmlformats.org/drawingml/2006/main" prst="rect">
+            <a:avLst/>
+          </a:prstGeom>
+          <a:noFill xmlns:a="http://schemas.openxmlformats.org/drawingml/2006/main"/>
+          <a:ln xmlns:a="http://schemas.openxmlformats.org/drawingml/2006/main" w="0">
+            <a:noFill/>
+          </a:ln>
+        </p:spPr>
+        <p:txBody>
+          <a:bodyPr xmlns:a="http://schemas.openxmlformats.org/drawingml/2006/main">
+            <a:noAutofit/>
+          </a:bodyPr>
+          <a:lstStyle xmlns:a="http://schemas.openxmlformats.org/drawingml/2006/main"/>
+          <a:p xmlns:a="http://schemas.openxmlformats.org/drawingml/2006/main">
+            <a:pPr>
+              <a:defRPr sz="1500" b="0">
+                <a:solidFill>
+                  <a:srgbClr val="4C626E"/>
+                </a:solidFill>
+                <a:latin typeface="DejaVu Sans"/>
+                <a:ea typeface="DejaVu Sans"/>
+                <a:cs typeface="DejaVu Sans"/>
+              </a:defRPr>
+            </a:pPr>
+            <a:r>
+              <a:rPr sz="1500" b="0">
+                <a:solidFill>
+                  <a:srgbClr val="4C626E"/>
+                </a:solidFill>
+                <a:latin typeface="DejaVu Sans"/>
+                <a:ea typeface="DejaVu Sans"/>
+                <a:cs typeface="DejaVu Sans"/>
+              </a:rPr>
+              <a:t>CAD geometry</a:t>
+            </a:r>
+          </a:p>
+        </p:txBody>
+      </p:sp>
+      <p:sp>
+        <p:nvSpPr>
+          <p:cNvPr id="6" name="">
+            <a:extLst xmlns:a="http://schemas.openxmlformats.org/drawingml/2006/main">
+              <a:ext uri="{FF2B5EF4-FFF2-40B4-BE49-F238E27FC236}">
+                <a16:creationId xmlns:a16="http://schemas.microsoft.com/office/drawing/2014/main" id="{6179A565-0C5C-4563-94E4-655C46CB76AB}"/>
+              </a:ext>
+            </a:extLst>
+          </p:cNvPr>
+          <p:cNvSpPr>
+            <a:spLocks xmlns:a="http://schemas.openxmlformats.org/drawingml/2006/main" noGrp="1"/>
+          </p:cNvSpPr>
+          <p:nvPr/>
+        </p:nvSpPr>
+        <p:spPr>
+          <a:xfrm xmlns:a="http://schemas.openxmlformats.org/drawingml/2006/main">
+            <a:off x="5257800" y="6257925"/>
+            <a:ext cx="6324600" cy="314325"/>
+          </a:xfrm>
+          <a:prstGeom xmlns:a="http://schemas.openxmlformats.org/drawingml/2006/main" prst="rect">
+            <a:avLst/>
+          </a:prstGeom>
+          <a:noFill xmlns:a="http://schemas.openxmlformats.org/drawingml/2006/main"/>
+          <a:ln xmlns:a="http://schemas.openxmlformats.org/drawingml/2006/main" w="0">
+            <a:noFill/>
+          </a:ln>
+        </p:spPr>
+        <p:txBody>
+          <a:bodyPr xmlns:a="http://schemas.openxmlformats.org/drawingml/2006/main">
+            <a:noAutofit/>
+          </a:bodyPr>
+          <a:lstStyle xmlns:a="http://schemas.openxmlformats.org/drawingml/2006/main"/>
+          <a:p xmlns:a="http://schemas.openxmlformats.org/drawingml/2006/main">
+            <a:pPr>
+              <a:defRPr sz="1500" b="0">
+                <a:solidFill>
+                  <a:srgbClr val="4C626E"/>
+                </a:solidFill>
+                <a:latin typeface="DejaVu Sans"/>
+                <a:ea typeface="DejaVu Sans"/>
+                <a:cs typeface="DejaVu Sans"/>
+              </a:defRPr>
+            </a:pPr>
+            <a:r>
+              <a:rPr sz="1500" b="0">
+                <a:solidFill>
+                  <a:srgbClr val="4C626E"/>
+                </a:solidFill>
+                <a:latin typeface="DejaVu Sans"/>
+                <a:ea typeface="DejaVu Sans"/>
+                <a:cs typeface="DejaVu Sans"/>
+              </a:rPr>
+              <a:t>Original engineering drawing</a:t>
+            </a:r>
+          </a:p>
+        </p:txBody>
+      </p:sp>
+    </p:spTree>
+    <p:extLst>
+      <p:ext uri="{BB962C8B-B14F-4D97-AF65-F5344CB8AC3E}">
+        <p14:creationId xmlns:p14="http://schemas.microsoft.com/office/powerpoint/2010/main" val="2104199589"/>
+      </p:ext>
+    </p:extLst>
+  </p:cSld>
+</p:sld>
+</file>
+
+<file path=ppt/slides/slide11.xml><?xml version="1.0" encoding="utf-8"?>
+<p:sld xmlns:p="http://schemas.openxmlformats.org/presentationml/2006/main">
+  <p:cSld>
+    <p:bg>
+      <p:bgPr>
+        <a:solidFill xmlns:a="http://schemas.openxmlformats.org/drawingml/2006/main">
+          <a:srgbClr val="F6F8F7"/>
+        </a:solidFill>
+      </p:bgPr>
+    </p:bg>
+    <p:spTree>
+      <p:nvGrpSpPr>
+        <p:cNvPr id="1" name=""/>
+        <p:cNvGrpSpPr/>
+        <p:nvPr/>
+      </p:nvGrpSpPr>
+      <p:grpSpPr>
+        <a:xfrm xmlns:a="http://schemas.openxmlformats.org/drawingml/2006/main"/>
+      </p:grpSpPr>
+      <p:sp>
+        <p:nvSpPr>
+          <p:cNvPr id="7" name="">
+            <a:extLst xmlns:a="http://schemas.openxmlformats.org/drawingml/2006/main">
+              <a:ext uri="{FF2B5EF4-FFF2-40B4-BE49-F238E27FC236}">
+                <a16:creationId xmlns:a16="http://schemas.microsoft.com/office/drawing/2014/main" id="{6F427927-01E5-46F5-8D5F-9D74B68B0A57}"/>
+              </a:ext>
+            </a:extLst>
+          </p:cNvPr>
+          <p:cNvSpPr>
+            <a:spLocks xmlns:a="http://schemas.openxmlformats.org/drawingml/2006/main" noGrp="1"/>
+          </p:cNvSpPr>
+          <p:nvPr/>
+        </p:nvSpPr>
+        <p:spPr>
+          <a:xfrm xmlns:a="http://schemas.openxmlformats.org/drawingml/2006/main">
+            <a:off x="609600" y="428625"/>
+            <a:ext cx="10972800" cy="762000"/>
+          </a:xfrm>
+          <a:prstGeom xmlns:a="http://schemas.openxmlformats.org/drawingml/2006/main" prst="rect">
+            <a:avLst/>
+          </a:prstGeom>
+          <a:noFill xmlns:a="http://schemas.openxmlformats.org/drawingml/2006/main"/>
+          <a:ln xmlns:a="http://schemas.openxmlformats.org/drawingml/2006/main" w="0">
+            <a:noFill/>
+          </a:ln>
+        </p:spPr>
+        <p:txBody>
+          <a:bodyPr xmlns:a="http://schemas.openxmlformats.org/drawingml/2006/main">
+            <a:noAutofit/>
+          </a:bodyPr>
+          <a:lstStyle xmlns:a="http://schemas.openxmlformats.org/drawingml/2006/main"/>
+          <a:p xmlns:a="http://schemas.openxmlformats.org/drawingml/2006/main">
+            <a:pPr>
+              <a:defRPr sz="3450" b="1">
+                <a:solidFill>
+                  <a:srgbClr val="102637"/>
+                </a:solidFill>
+                <a:latin typeface="DejaVu Sans"/>
+                <a:ea typeface="DejaVu Sans"/>
+                <a:cs typeface="DejaVu Sans"/>
+              </a:defRPr>
+            </a:pPr>
+            <a:r>
+              <a:rPr sz="3450" b="1">
+                <a:solidFill>
+                  <a:srgbClr val="102637"/>
+                </a:solidFill>
+                <a:latin typeface="DejaVu Sans"/>
+                <a:ea typeface="DejaVu Sans"/>
+                <a:cs typeface="DejaVu Sans"/>
+              </a:rPr>
+              <a:t>Wolf bishop</a:t>
+            </a:r>
+          </a:p>
+        </p:txBody>
+      </p:sp>
+      <p:sp>
+        <p:nvSpPr>
+          <p:cNvPr id="2" name="">
+            <a:extLst xmlns:a="http://schemas.openxmlformats.org/drawingml/2006/main">
+              <a:ext uri="{FF2B5EF4-FFF2-40B4-BE49-F238E27FC236}">
+                <a16:creationId xmlns:a16="http://schemas.microsoft.com/office/drawing/2014/main" id="{5119E9D5-3927-4D99-BD06-3AFE78B84C4B}"/>
+              </a:ext>
+            </a:extLst>
+          </p:cNvPr>
+          <p:cNvSpPr>
+            <a:spLocks xmlns:a="http://schemas.openxmlformats.org/drawingml/2006/main" noGrp="1"/>
+          </p:cNvSpPr>
+          <p:nvPr/>
+        </p:nvSpPr>
+        <p:spPr>
+          <a:xfrm xmlns:a="http://schemas.openxmlformats.org/drawingml/2006/main">
+            <a:off x="609600" y="1190625"/>
+            <a:ext cx="10972800" cy="400050"/>
+          </a:xfrm>
+          <a:prstGeom xmlns:a="http://schemas.openxmlformats.org/drawingml/2006/main" prst="rect">
+            <a:avLst/>
+          </a:prstGeom>
+          <a:noFill xmlns:a="http://schemas.openxmlformats.org/drawingml/2006/main"/>
+          <a:ln xmlns:a="http://schemas.openxmlformats.org/drawingml/2006/main" w="0">
+            <a:noFill/>
+          </a:ln>
+        </p:spPr>
+        <p:txBody>
+          <a:bodyPr xmlns:a="http://schemas.openxmlformats.org/drawingml/2006/main">
+            <a:noAutofit/>
+          </a:bodyPr>
+          <a:lstStyle xmlns:a="http://schemas.openxmlformats.org/drawingml/2006/main"/>
+          <a:p xmlns:a="http://schemas.openxmlformats.org/drawingml/2006/main">
+            <a:pPr>
+              <a:defRPr sz="1650" b="0">
+                <a:solidFill>
+                  <a:srgbClr val="147F80"/>
+                </a:solidFill>
+                <a:latin typeface="DejaVu Sans"/>
+                <a:ea typeface="DejaVu Sans"/>
+                <a:cs typeface="DejaVu Sans"/>
+              </a:defRPr>
+            </a:pPr>
+            <a:r>
+              <a:rPr sz="1650" b="0">
+                <a:solidFill>
+                  <a:srgbClr val="147F80"/>
+                </a:solidFill>
+                <a:latin typeface="DejaVu Sans"/>
+                <a:ea typeface="DejaVu Sans"/>
+                <a:cs typeface="DejaVu Sans"/>
+              </a:rPr>
+              <a:t>My Minecraft chess design</a:t>
+            </a:r>
+          </a:p>
+        </p:txBody>
+      </p:sp>
+      <p:pic>
+        <p:nvPicPr>
+          <p:cNvPr id="9" name=""/>
+          <p:cNvPicPr>
+            <a:picLocks xmlns:a="http://schemas.openxmlformats.org/drawingml/2006/main" noChangeAspect="1"/>
+          </p:cNvPicPr>
+          <p:nvPr/>
+        </p:nvPicPr>
+        <p:blipFill>
+          <a:blip xmlns:r="http://schemas.openxmlformats.org/officeDocument/2006/relationships" xmlns:a="http://schemas.openxmlformats.org/drawingml/2006/main" r:embed="R22b30f77c8d748e6"/>
+          <a:stretch xmlns:a="http://schemas.openxmlformats.org/drawingml/2006/main"/>
+        </p:blipFill>
+        <p:spPr>
+          <a:xfrm xmlns:a="http://schemas.openxmlformats.org/drawingml/2006/main">
+            <a:off x="609600" y="2218892"/>
+            <a:ext cx="4238625" cy="3467966"/>
+          </a:xfrm>
+          <a:prstGeom xmlns:a="http://schemas.openxmlformats.org/drawingml/2006/main" prst="rect">
+            <a:avLst/>
+          </a:prstGeom>
+        </p:spPr>
+      </p:pic>
+      <p:pic>
+        <p:nvPicPr>
+          <p:cNvPr id="10" name=""/>
+          <p:cNvPicPr>
+            <a:picLocks xmlns:a="http://schemas.openxmlformats.org/drawingml/2006/main" noChangeAspect="1"/>
+          </p:cNvPicPr>
+          <p:nvPr/>
+        </p:nvPicPr>
+        <p:blipFill>
+          <a:blip xmlns:r="http://schemas.openxmlformats.org/officeDocument/2006/relationships" xmlns:a="http://schemas.openxmlformats.org/drawingml/2006/main" r:embed="Rd2fb701229d148e1"/>
+          <a:stretch xmlns:a="http://schemas.openxmlformats.org/drawingml/2006/main"/>
+        </p:blipFill>
+        <p:spPr>
+          <a:xfrm xmlns:a="http://schemas.openxmlformats.org/drawingml/2006/main">
+            <a:off x="5257800" y="1918673"/>
+            <a:ext cx="6324600" cy="4068403"/>
+          </a:xfrm>
+          <a:prstGeom xmlns:a="http://schemas.openxmlformats.org/drawingml/2006/main" prst="rect">
+            <a:avLst/>
+          </a:prstGeom>
+        </p:spPr>
+      </p:pic>
+      <p:sp>
+        <p:nvSpPr>
+          <p:cNvPr id="5" name="">
+            <a:extLst xmlns:a="http://schemas.openxmlformats.org/drawingml/2006/main">
+              <a:ext uri="{FF2B5EF4-FFF2-40B4-BE49-F238E27FC236}">
+                <a16:creationId xmlns:a16="http://schemas.microsoft.com/office/drawing/2014/main" id="{51BB6035-93B4-4372-B666-5D549BC51CDE}"/>
+              </a:ext>
+            </a:extLst>
+          </p:cNvPr>
+          <p:cNvSpPr>
+            <a:spLocks xmlns:a="http://schemas.openxmlformats.org/drawingml/2006/main" noGrp="1"/>
+          </p:cNvSpPr>
+          <p:nvPr/>
+        </p:nvSpPr>
+        <p:spPr>
+          <a:xfrm xmlns:a="http://schemas.openxmlformats.org/drawingml/2006/main">
+            <a:off x="609600" y="6257925"/>
+            <a:ext cx="4238625" cy="314325"/>
+          </a:xfrm>
+          <a:prstGeom xmlns:a="http://schemas.openxmlformats.org/drawingml/2006/main" prst="rect">
+            <a:avLst/>
+          </a:prstGeom>
+          <a:noFill xmlns:a="http://schemas.openxmlformats.org/drawingml/2006/main"/>
+          <a:ln xmlns:a="http://schemas.openxmlformats.org/drawingml/2006/main" w="0">
+            <a:noFill/>
+          </a:ln>
+        </p:spPr>
+        <p:txBody>
+          <a:bodyPr xmlns:a="http://schemas.openxmlformats.org/drawingml/2006/main">
+            <a:noAutofit/>
+          </a:bodyPr>
+          <a:lstStyle xmlns:a="http://schemas.openxmlformats.org/drawingml/2006/main"/>
+          <a:p xmlns:a="http://schemas.openxmlformats.org/drawingml/2006/main">
+            <a:pPr>
+              <a:defRPr sz="1500" b="0">
+                <a:solidFill>
+                  <a:srgbClr val="4C626E"/>
+                </a:solidFill>
+                <a:latin typeface="DejaVu Sans"/>
+                <a:ea typeface="DejaVu Sans"/>
+                <a:cs typeface="DejaVu Sans"/>
+              </a:defRPr>
+            </a:pPr>
+            <a:r>
+              <a:rPr sz="1500" b="0">
+                <a:solidFill>
+                  <a:srgbClr val="4C626E"/>
+                </a:solidFill>
+                <a:latin typeface="DejaVu Sans"/>
+                <a:ea typeface="DejaVu Sans"/>
+                <a:cs typeface="DejaVu Sans"/>
+              </a:rPr>
+              <a:t>CAD geometry</a:t>
+            </a:r>
+          </a:p>
+        </p:txBody>
+      </p:sp>
+      <p:sp>
+        <p:nvSpPr>
+          <p:cNvPr id="6" name="">
+            <a:extLst xmlns:a="http://schemas.openxmlformats.org/drawingml/2006/main">
+              <a:ext uri="{FF2B5EF4-FFF2-40B4-BE49-F238E27FC236}">
+                <a16:creationId xmlns:a16="http://schemas.microsoft.com/office/drawing/2014/main" id="{1583A7CC-AFEA-4D75-A5B0-FAFA33F16801}"/>
+              </a:ext>
+            </a:extLst>
+          </p:cNvPr>
+          <p:cNvSpPr>
+            <a:spLocks xmlns:a="http://schemas.openxmlformats.org/drawingml/2006/main" noGrp="1"/>
+          </p:cNvSpPr>
+          <p:nvPr/>
+        </p:nvSpPr>
+        <p:spPr>
+          <a:xfrm xmlns:a="http://schemas.openxmlformats.org/drawingml/2006/main">
+            <a:off x="5257800" y="6257925"/>
+            <a:ext cx="6324600" cy="314325"/>
+          </a:xfrm>
+          <a:prstGeom xmlns:a="http://schemas.openxmlformats.org/drawingml/2006/main" prst="rect">
+            <a:avLst/>
+          </a:prstGeom>
+          <a:noFill xmlns:a="http://schemas.openxmlformats.org/drawingml/2006/main"/>
+          <a:ln xmlns:a="http://schemas.openxmlformats.org/drawingml/2006/main" w="0">
+            <a:noFill/>
+          </a:ln>
+        </p:spPr>
+        <p:txBody>
+          <a:bodyPr xmlns:a="http://schemas.openxmlformats.org/drawingml/2006/main">
+            <a:noAutofit/>
+          </a:bodyPr>
+          <a:lstStyle xmlns:a="http://schemas.openxmlformats.org/drawingml/2006/main"/>
+          <a:p xmlns:a="http://schemas.openxmlformats.org/drawingml/2006/main">
+            <a:pPr>
+              <a:defRPr sz="1500" b="0">
+                <a:solidFill>
+                  <a:srgbClr val="4C626E"/>
+                </a:solidFill>
+                <a:latin typeface="DejaVu Sans"/>
+                <a:ea typeface="DejaVu Sans"/>
+                <a:cs typeface="DejaVu Sans"/>
+              </a:defRPr>
+            </a:pPr>
+            <a:r>
+              <a:rPr sz="1500" b="0">
+                <a:solidFill>
+                  <a:srgbClr val="4C626E"/>
+                </a:solidFill>
+                <a:latin typeface="DejaVu Sans"/>
+                <a:ea typeface="DejaVu Sans"/>
+                <a:cs typeface="DejaVu Sans"/>
+              </a:rPr>
+              <a:t>Original engineering drawing</a:t>
+            </a:r>
+          </a:p>
+        </p:txBody>
+      </p:sp>
+    </p:spTree>
+    <p:extLst>
+      <p:ext uri="{BB962C8B-B14F-4D97-AF65-F5344CB8AC3E}">
+        <p14:creationId xmlns:p14="http://schemas.microsoft.com/office/powerpoint/2010/main" val="297469664"/>
+      </p:ext>
+    </p:extLst>
+  </p:cSld>
+</p:sld>
+</file>
+
+<file path=ppt/slides/slide12.xml><?xml version="1.0" encoding="utf-8"?>
+<p:sld xmlns:p="http://schemas.openxmlformats.org/presentationml/2006/main">
+  <p:cSld>
+    <p:bg>
+      <p:bgPr>
+        <a:solidFill xmlns:a="http://schemas.openxmlformats.org/drawingml/2006/main">
+          <a:srgbClr val="F6F8F7"/>
+        </a:solidFill>
+      </p:bgPr>
+    </p:bg>
+    <p:spTree>
+      <p:nvGrpSpPr>
+        <p:cNvPr id="1" name=""/>
+        <p:cNvGrpSpPr/>
+        <p:nvPr/>
+      </p:nvGrpSpPr>
+      <p:grpSpPr>
+        <a:xfrm xmlns:a="http://schemas.openxmlformats.org/drawingml/2006/main"/>
+      </p:grpSpPr>
+      <p:sp>
+        <p:nvSpPr>
+          <p:cNvPr id="11" name="Star container and CAM studies">
+            <a:extLst xmlns:a="http://schemas.openxmlformats.org/drawingml/2006/main">
+              <a:ext uri="{FF2B5EF4-FFF2-40B4-BE49-F238E27FC236}">
+                <a16:creationId xmlns:a16="http://schemas.microsoft.com/office/drawing/2014/main" id="{A2E6142B-E373-47AC-8BD2-29DE5415F7A3}"/>
+              </a:ext>
+            </a:extLst>
+          </p:cNvPr>
+          <p:cNvSpPr>
+            <a:spLocks xmlns:a="http://schemas.openxmlformats.org/drawingml/2006/main" noGrp="1"/>
+          </p:cNvSpPr>
+          <p:nvPr/>
+        </p:nvSpPr>
+        <p:spPr>
+          <a:xfrm xmlns:a="http://schemas.openxmlformats.org/drawingml/2006/main">
+            <a:off x="609600" y="428625"/>
+            <a:ext cx="10972800" cy="762000"/>
+          </a:xfrm>
+          <a:prstGeom xmlns:a="http://schemas.openxmlformats.org/drawingml/2006/main" prst="rect">
+            <a:avLst/>
+          </a:prstGeom>
+          <a:noFill xmlns:a="http://schemas.openxmlformats.org/drawingml/2006/main"/>
+          <a:ln xmlns:a="http://schemas.openxmlformats.org/drawingml/2006/main" w="0">
+            <a:noFill/>
+          </a:ln>
+        </p:spPr>
+        <p:txBody>
+          <a:bodyPr xmlns:a="http://schemas.openxmlformats.org/drawingml/2006/main">
+            <a:noAutofit/>
+          </a:bodyPr>
+          <a:lstStyle xmlns:a="http://schemas.openxmlformats.org/drawingml/2006/main"/>
+          <a:p xmlns:a="http://schemas.openxmlformats.org/drawingml/2006/main">
+            <a:pPr>
+              <a:buNone/>
+              <a:defRPr sz="3450" b="1">
+                <a:solidFill>
+                  <a:srgbClr val="102637"/>
+                </a:solidFill>
+                <a:latin typeface="DejaVu Sans"/>
+                <a:ea typeface="DejaVu Sans"/>
+                <a:cs typeface="DejaVu Sans"/>
+              </a:defRPr>
+            </a:pPr>
+            <a:r>
+              <a:rPr sz="3450" b="1">
+                <a:solidFill>
+                  <a:srgbClr val="102637"/>
+                </a:solidFill>
+                <a:latin typeface="DejaVu Sans"/>
+                <a:ea typeface="DejaVu Sans"/>
+                <a:cs typeface="DejaVu Sans"/>
+              </a:rPr>
+              <a:t>Star container and CAM studies</a:t>
+            </a:r>
+          </a:p>
+        </p:txBody>
+      </p:sp>
+      <p:sp>
+        <p:nvSpPr>
+          <p:cNvPr id="2" name="PLTW 2025 · CAD models and toolpath simulatio">
+            <a:extLst xmlns:a="http://schemas.openxmlformats.org/drawingml/2006/main">
+              <a:ext uri="{FF2B5EF4-FFF2-40B4-BE49-F238E27FC236}">
+                <a16:creationId xmlns:a16="http://schemas.microsoft.com/office/drawing/2014/main" id="{89AFF6FB-F171-4464-802A-426E48E1FA6D}"/>
+              </a:ext>
+            </a:extLst>
+          </p:cNvPr>
+          <p:cNvSpPr>
+            <a:spLocks xmlns:a="http://schemas.openxmlformats.org/drawingml/2006/main" noGrp="1"/>
+          </p:cNvSpPr>
+          <p:nvPr/>
+        </p:nvSpPr>
+        <p:spPr>
+          <a:xfrm xmlns:a="http://schemas.openxmlformats.org/drawingml/2006/main">
+            <a:off x="609600" y="1190625"/>
+            <a:ext cx="10972800" cy="400050"/>
+          </a:xfrm>
+          <a:prstGeom xmlns:a="http://schemas.openxmlformats.org/drawingml/2006/main" prst="rect">
+            <a:avLst/>
+          </a:prstGeom>
+          <a:noFill xmlns:a="http://schemas.openxmlformats.org/drawingml/2006/main"/>
+          <a:ln xmlns:a="http://schemas.openxmlformats.org/drawingml/2006/main" w="0">
+            <a:noFill/>
+          </a:ln>
+        </p:spPr>
+        <p:txBody>
+          <a:bodyPr xmlns:a="http://schemas.openxmlformats.org/drawingml/2006/main">
+            <a:noAutofit/>
+          </a:bodyPr>
+          <a:lstStyle xmlns:a="http://schemas.openxmlformats.org/drawingml/2006/main"/>
+          <a:p xmlns:a="http://schemas.openxmlformats.org/drawingml/2006/main">
+            <a:pPr>
+              <a:buNone/>
+              <a:defRPr sz="1650" b="0">
+                <a:solidFill>
+                  <a:srgbClr val="147F80"/>
+                </a:solidFill>
+                <a:latin typeface="DejaVu Sans"/>
+                <a:ea typeface="DejaVu Sans"/>
+                <a:cs typeface="DejaVu Sans"/>
+              </a:defRPr>
+            </a:pPr>
+            <a:r>
+              <a:rPr sz="1650" b="0">
+                <a:solidFill>
+                  <a:srgbClr val="147F80"/>
+                </a:solidFill>
+                <a:latin typeface="DejaVu Sans"/>
+                <a:ea typeface="DejaVu Sans"/>
+                <a:cs typeface="DejaVu Sans"/>
+              </a:rPr>
+              <a:t>PLTW 2025 · CAD models and toolpath simulations</a:t>
+            </a:r>
+          </a:p>
+        </p:txBody>
+      </p:sp>
+      <p:sp>
+        <p:nvSpPr>
+          <p:cNvPr id="3" name="Part geometry">
+            <a:extLst xmlns:a="http://schemas.openxmlformats.org/drawingml/2006/main">
+              <a:ext uri="{FF2B5EF4-FFF2-40B4-BE49-F238E27FC236}">
+                <a16:creationId xmlns:a16="http://schemas.microsoft.com/office/drawing/2014/main" id="{60A96118-A2A6-4F12-95C0-B8F30A80F5FA}"/>
+              </a:ext>
+            </a:extLst>
+          </p:cNvPr>
+          <p:cNvSpPr>
+            <a:spLocks xmlns:a="http://schemas.openxmlformats.org/drawingml/2006/main" noGrp="1"/>
+          </p:cNvSpPr>
+          <p:nvPr/>
+        </p:nvSpPr>
+        <p:spPr>
+          <a:xfrm xmlns:a="http://schemas.openxmlformats.org/drawingml/2006/main">
+            <a:off x="609600" y="1847850"/>
+            <a:ext cx="4324350" cy="361950"/>
+          </a:xfrm>
+          <a:prstGeom xmlns:a="http://schemas.openxmlformats.org/drawingml/2006/main" prst="rect">
+            <a:avLst/>
+          </a:prstGeom>
+          <a:noFill xmlns:a="http://schemas.openxmlformats.org/drawingml/2006/main"/>
+          <a:ln xmlns:a="http://schemas.openxmlformats.org/drawingml/2006/main" w="0">
+            <a:noFill/>
+          </a:ln>
+        </p:spPr>
+        <p:txBody>
+          <a:bodyPr xmlns:a="http://schemas.openxmlformats.org/drawingml/2006/main">
+            <a:noAutofit/>
+          </a:bodyPr>
+          <a:lstStyle xmlns:a="http://schemas.openxmlformats.org/drawingml/2006/main"/>
+          <a:p xmlns:a="http://schemas.openxmlformats.org/drawingml/2006/main">
+            <a:pPr>
+              <a:buNone/>
+              <a:defRPr sz="1950" b="1">
+                <a:solidFill>
+                  <a:srgbClr val="102637"/>
+                </a:solidFill>
+                <a:latin typeface="DejaVu Sans"/>
+                <a:ea typeface="DejaVu Sans"/>
+                <a:cs typeface="DejaVu Sans"/>
+              </a:defRPr>
+            </a:pPr>
+            <a:r>
+              <a:rPr sz="1950" b="1">
+                <a:solidFill>
+                  <a:srgbClr val="102637"/>
+                </a:solidFill>
+                <a:latin typeface="DejaVu Sans"/>
+                <a:ea typeface="DejaVu Sans"/>
+                <a:cs typeface="DejaVu Sans"/>
+              </a:rPr>
+              <a:t>Part geometry</a:t>
+            </a:r>
+          </a:p>
+        </p:txBody>
+      </p:sp>
+      <p:sp>
+        <p:nvSpPr>
+          <p:cNvPr id="4" name="A star-shaped base and fitted lid. Sketches e">
+            <a:extLst xmlns:a="http://schemas.openxmlformats.org/drawingml/2006/main">
+              <a:ext uri="{FF2B5EF4-FFF2-40B4-BE49-F238E27FC236}">
+                <a16:creationId xmlns:a16="http://schemas.microsoft.com/office/drawing/2014/main" id="{A15FFCC3-8D26-4FDA-9DBC-C62BD5FBCF1A}"/>
+              </a:ext>
+            </a:extLst>
+          </p:cNvPr>
+          <p:cNvSpPr>
+            <a:spLocks xmlns:a="http://schemas.openxmlformats.org/drawingml/2006/main" noGrp="1"/>
+          </p:cNvSpPr>
+          <p:nvPr/>
+        </p:nvSpPr>
+        <p:spPr>
+          <a:xfrm xmlns:a="http://schemas.openxmlformats.org/drawingml/2006/main">
+            <a:off x="609600" y="2257425"/>
+            <a:ext cx="4324350" cy="1143000"/>
+          </a:xfrm>
+          <a:prstGeom xmlns:a="http://schemas.openxmlformats.org/drawingml/2006/main" prst="rect">
+            <a:avLst/>
+          </a:prstGeom>
+          <a:noFill xmlns:a="http://schemas.openxmlformats.org/drawingml/2006/main"/>
+          <a:ln xmlns:a="http://schemas.openxmlformats.org/drawingml/2006/main" w="0">
+            <a:noFill/>
+          </a:ln>
+        </p:spPr>
+        <p:txBody>
+          <a:bodyPr xmlns:a="http://schemas.openxmlformats.org/drawingml/2006/main">
+            <a:noAutofit/>
+          </a:bodyPr>
+          <a:lstStyle xmlns:a="http://schemas.openxmlformats.org/drawingml/2006/main"/>
+          <a:p xmlns:a="http://schemas.openxmlformats.org/drawingml/2006/main">
+            <a:pPr>
+              <a:buNone/>
+              <a:defRPr sz="1800" b="0">
+                <a:solidFill>
+                  <a:srgbClr val="4C626E"/>
+                </a:solidFill>
+                <a:latin typeface="DejaVu Sans"/>
+                <a:ea typeface="DejaVu Sans"/>
+                <a:cs typeface="DejaVu Sans"/>
+              </a:defRPr>
+            </a:pPr>
+            <a:r>
+              <a:rPr sz="1800" b="0">
+                <a:solidFill>
+                  <a:srgbClr val="4C626E"/>
+                </a:solidFill>
+                <a:latin typeface="DejaVu Sans"/>
+                <a:ea typeface="DejaVu Sans"/>
+                <a:cs typeface="DejaVu Sans"/>
+              </a:rPr>
+              <a:t>A star-shaped base and fitted lid. Sketches examine the fit between the opening and the lid.</a:t>
+            </a:r>
+          </a:p>
+        </p:txBody>
+      </p:sp>
+      <p:sp>
+        <p:nvSpPr>
+          <p:cNvPr id="5" name="CAM work">
+            <a:extLst xmlns:a="http://schemas.openxmlformats.org/drawingml/2006/main">
+              <a:ext uri="{FF2B5EF4-FFF2-40B4-BE49-F238E27FC236}">
+                <a16:creationId xmlns:a16="http://schemas.microsoft.com/office/drawing/2014/main" id="{3DCBB31C-D1F9-489A-A594-0CBF32FD1FA8}"/>
+              </a:ext>
+            </a:extLst>
+          </p:cNvPr>
+          <p:cNvSpPr>
+            <a:spLocks xmlns:a="http://schemas.openxmlformats.org/drawingml/2006/main" noGrp="1"/>
+          </p:cNvSpPr>
+          <p:nvPr/>
+        </p:nvSpPr>
+        <p:spPr>
+          <a:xfrm xmlns:a="http://schemas.openxmlformats.org/drawingml/2006/main">
+            <a:off x="609600" y="3371850"/>
+            <a:ext cx="4324350" cy="361950"/>
+          </a:xfrm>
+          <a:prstGeom xmlns:a="http://schemas.openxmlformats.org/drawingml/2006/main" prst="rect">
+            <a:avLst/>
+          </a:prstGeom>
+          <a:noFill xmlns:a="http://schemas.openxmlformats.org/drawingml/2006/main"/>
+          <a:ln xmlns:a="http://schemas.openxmlformats.org/drawingml/2006/main" w="0">
+            <a:noFill/>
+          </a:ln>
+        </p:spPr>
+        <p:txBody>
+          <a:bodyPr xmlns:a="http://schemas.openxmlformats.org/drawingml/2006/main">
+            <a:noAutofit/>
+          </a:bodyPr>
+          <a:lstStyle xmlns:a="http://schemas.openxmlformats.org/drawingml/2006/main"/>
+          <a:p xmlns:a="http://schemas.openxmlformats.org/drawingml/2006/main">
+            <a:pPr>
+              <a:buNone/>
+              <a:defRPr sz="1950" b="1">
+                <a:solidFill>
+                  <a:srgbClr val="102637"/>
+                </a:solidFill>
+                <a:latin typeface="DejaVu Sans"/>
+                <a:ea typeface="DejaVu Sans"/>
+                <a:cs typeface="DejaVu Sans"/>
+              </a:defRPr>
+            </a:pPr>
+            <a:r>
+              <a:rPr sz="1950" b="1">
+                <a:solidFill>
+                  <a:srgbClr val="102637"/>
+                </a:solidFill>
+                <a:latin typeface="DejaVu Sans"/>
+                <a:ea typeface="DejaVu Sans"/>
+                <a:cs typeface="DejaVu Sans"/>
+              </a:rPr>
+              <a:t>CAM work</a:t>
+            </a:r>
+          </a:p>
+        </p:txBody>
+      </p:sp>
+      <p:sp>
+        <p:nvSpPr>
+          <p:cNvPr id="6" name="2D pockets and contours, with related studies">
+            <a:extLst xmlns:a="http://schemas.openxmlformats.org/drawingml/2006/main">
+              <a:ext uri="{FF2B5EF4-FFF2-40B4-BE49-F238E27FC236}">
+                <a16:creationId xmlns:a16="http://schemas.microsoft.com/office/drawing/2014/main" id="{847B5AC5-3E8A-44F3-BA51-DD38265D42A9}"/>
+              </a:ext>
+            </a:extLst>
+          </p:cNvPr>
+          <p:cNvSpPr>
+            <a:spLocks xmlns:a="http://schemas.openxmlformats.org/drawingml/2006/main" noGrp="1"/>
+          </p:cNvSpPr>
+          <p:nvPr/>
+        </p:nvSpPr>
+        <p:spPr>
+          <a:xfrm xmlns:a="http://schemas.openxmlformats.org/drawingml/2006/main">
+            <a:off x="609600" y="3781425"/>
+            <a:ext cx="4324350" cy="1143000"/>
+          </a:xfrm>
+          <a:prstGeom xmlns:a="http://schemas.openxmlformats.org/drawingml/2006/main" prst="rect">
+            <a:avLst/>
+          </a:prstGeom>
+          <a:noFill xmlns:a="http://schemas.openxmlformats.org/drawingml/2006/main"/>
+          <a:ln xmlns:a="http://schemas.openxmlformats.org/drawingml/2006/main" w="0">
+            <a:noFill/>
+          </a:ln>
+        </p:spPr>
+        <p:txBody>
+          <a:bodyPr xmlns:a="http://schemas.openxmlformats.org/drawingml/2006/main">
+            <a:noAutofit/>
+          </a:bodyPr>
+          <a:lstStyle xmlns:a="http://schemas.openxmlformats.org/drawingml/2006/main"/>
+          <a:p xmlns:a="http://schemas.openxmlformats.org/drawingml/2006/main">
+            <a:pPr>
+              <a:buNone/>
+              <a:defRPr sz="1800" b="0">
+                <a:solidFill>
+                  <a:srgbClr val="4C626E"/>
+                </a:solidFill>
+                <a:latin typeface="DejaVu Sans"/>
+                <a:ea typeface="DejaVu Sans"/>
+                <a:cs typeface="DejaVu Sans"/>
+              </a:defRPr>
+            </a:pPr>
+            <a:r>
+              <a:rPr sz="1800" b="0">
+                <a:solidFill>
+                  <a:srgbClr val="4C626E"/>
+                </a:solidFill>
+                <a:latin typeface="DejaVu Sans"/>
+                <a:ea typeface="DejaVu Sans"/>
+                <a:cs typeface="DejaVu Sans"/>
+              </a:rPr>
+              <a:t>2D pockets and contours, with related studies in facing, slotting, drilling, and surface machining.</a:t>
+            </a:r>
+          </a:p>
+        </p:txBody>
+      </p:sp>
+      <p:sp>
+        <p:nvSpPr>
+          <p:cNvPr id="7" name="Lesson">
+            <a:extLst xmlns:a="http://schemas.openxmlformats.org/drawingml/2006/main">
+              <a:ext uri="{FF2B5EF4-FFF2-40B4-BE49-F238E27FC236}">
+                <a16:creationId xmlns:a16="http://schemas.microsoft.com/office/drawing/2014/main" id="{AD758B77-91F7-4CED-8671-2DC864E59C86}"/>
+              </a:ext>
+            </a:extLst>
+          </p:cNvPr>
+          <p:cNvSpPr>
+            <a:spLocks xmlns:a="http://schemas.openxmlformats.org/drawingml/2006/main" noGrp="1"/>
+          </p:cNvSpPr>
+          <p:nvPr/>
+        </p:nvSpPr>
+        <p:spPr>
+          <a:xfrm xmlns:a="http://schemas.openxmlformats.org/drawingml/2006/main">
+            <a:off x="609600" y="4895850"/>
+            <a:ext cx="4324350" cy="361950"/>
+          </a:xfrm>
+          <a:prstGeom xmlns:a="http://schemas.openxmlformats.org/drawingml/2006/main" prst="rect">
+            <a:avLst/>
+          </a:prstGeom>
+          <a:noFill xmlns:a="http://schemas.openxmlformats.org/drawingml/2006/main"/>
+          <a:ln xmlns:a="http://schemas.openxmlformats.org/drawingml/2006/main" w="0">
+            <a:noFill/>
+          </a:ln>
+        </p:spPr>
+        <p:txBody>
+          <a:bodyPr xmlns:a="http://schemas.openxmlformats.org/drawingml/2006/main">
+            <a:noAutofit/>
+          </a:bodyPr>
+          <a:lstStyle xmlns:a="http://schemas.openxmlformats.org/drawingml/2006/main"/>
+          <a:p xmlns:a="http://schemas.openxmlformats.org/drawingml/2006/main">
+            <a:pPr>
+              <a:buNone/>
+              <a:defRPr sz="1950" b="1">
+                <a:solidFill>
+                  <a:srgbClr val="102637"/>
+                </a:solidFill>
+                <a:latin typeface="DejaVu Sans"/>
+                <a:ea typeface="DejaVu Sans"/>
+                <a:cs typeface="DejaVu Sans"/>
+              </a:defRPr>
+            </a:pPr>
+            <a:r>
+              <a:rPr sz="1950" b="1">
+                <a:solidFill>
+                  <a:srgbClr val="102637"/>
+                </a:solidFill>
+                <a:latin typeface="DejaVu Sans"/>
+                <a:ea typeface="DejaVu Sans"/>
+                <a:cs typeface="DejaVu Sans"/>
+              </a:rPr>
+              <a:t>Lesson</a:t>
+            </a:r>
+          </a:p>
+        </p:txBody>
+      </p:sp>
+      <p:sp>
+        <p:nvSpPr>
+          <p:cNvPr id="8" name="Plan tool access while modeling. Reduce unnec">
+            <a:extLst xmlns:a="http://schemas.openxmlformats.org/drawingml/2006/main">
+              <a:ext uri="{FF2B5EF4-FFF2-40B4-BE49-F238E27FC236}">
+                <a16:creationId xmlns:a16="http://schemas.microsoft.com/office/drawing/2014/main" id="{F7F615CD-6F4D-42AA-9437-81B2064B76EE}"/>
+              </a:ext>
+            </a:extLst>
+          </p:cNvPr>
+          <p:cNvSpPr>
+            <a:spLocks xmlns:a="http://schemas.openxmlformats.org/drawingml/2006/main" noGrp="1"/>
+          </p:cNvSpPr>
+          <p:nvPr/>
+        </p:nvSpPr>
+        <p:spPr>
+          <a:xfrm xmlns:a="http://schemas.openxmlformats.org/drawingml/2006/main">
+            <a:off x="609600" y="5305425"/>
+            <a:ext cx="4324350" cy="1143000"/>
+          </a:xfrm>
+          <a:prstGeom xmlns:a="http://schemas.openxmlformats.org/drawingml/2006/main" prst="rect">
+            <a:avLst/>
+          </a:prstGeom>
+          <a:noFill xmlns:a="http://schemas.openxmlformats.org/drawingml/2006/main"/>
+          <a:ln xmlns:a="http://schemas.openxmlformats.org/drawingml/2006/main" w="0">
+            <a:noFill/>
+          </a:ln>
+        </p:spPr>
+        <p:txBody>
+          <a:bodyPr xmlns:a="http://schemas.openxmlformats.org/drawingml/2006/main">
+            <a:noAutofit/>
+          </a:bodyPr>
+          <a:lstStyle xmlns:a="http://schemas.openxmlformats.org/drawingml/2006/main"/>
+          <a:p xmlns:a="http://schemas.openxmlformats.org/drawingml/2006/main">
+            <a:pPr>
+              <a:buNone/>
+              <a:defRPr sz="1800" b="0">
+                <a:solidFill>
+                  <a:srgbClr val="4C626E"/>
+                </a:solidFill>
+                <a:latin typeface="DejaVu Sans"/>
+                <a:ea typeface="DejaVu Sans"/>
+                <a:cs typeface="DejaVu Sans"/>
+              </a:defRPr>
+            </a:pPr>
+            <a:r>
+              <a:rPr sz="1800" b="0">
+                <a:solidFill>
+                  <a:srgbClr val="4C626E"/>
+                </a:solidFill>
+                <a:latin typeface="DejaVu Sans"/>
+                <a:ea typeface="DejaVu Sans"/>
+                <a:cs typeface="DejaVu Sans"/>
+              </a:rPr>
+              <a:t>Plan tool access while modeling. Reduce unnecessary tool travel.</a:t>
+            </a:r>
+          </a:p>
+        </p:txBody>
+      </p:sp>
+      <p:pic>
+        <p:nvPicPr>
+          <p:cNvPr id="22" name=""/>
+          <p:cNvPicPr>
+            <a:picLocks xmlns:a="http://schemas.openxmlformats.org/drawingml/2006/main" noChangeAspect="1"/>
+          </p:cNvPicPr>
+          <p:nvPr/>
+        </p:nvPicPr>
+        <p:blipFill>
+          <a:blip xmlns:r="http://schemas.openxmlformats.org/officeDocument/2006/relationships" xmlns:a="http://schemas.openxmlformats.org/drawingml/2006/main" r:embed="Rd6f7cdf832e941b6"/>
+          <a:stretch xmlns:a="http://schemas.openxmlformats.org/drawingml/2006/main"/>
+        </p:blipFill>
+        <p:spPr>
+          <a:xfrm xmlns:a="http://schemas.openxmlformats.org/drawingml/2006/main">
+            <a:off x="6826619" y="1809750"/>
+            <a:ext cx="3110762" cy="2619375"/>
+          </a:xfrm>
+          <a:prstGeom xmlns:a="http://schemas.openxmlformats.org/drawingml/2006/main" prst="rect">
+            <a:avLst/>
+          </a:prstGeom>
+        </p:spPr>
+      </p:pic>
+      <p:pic>
+        <p:nvPicPr>
+          <p:cNvPr id="23" name=""/>
+          <p:cNvPicPr>
+            <a:picLocks xmlns:a="http://schemas.openxmlformats.org/drawingml/2006/main" noChangeAspect="1"/>
+          </p:cNvPicPr>
+          <p:nvPr/>
+        </p:nvPicPr>
+        <p:blipFill>
+          <a:blip xmlns:r="http://schemas.openxmlformats.org/officeDocument/2006/relationships" xmlns:a="http://schemas.openxmlformats.org/drawingml/2006/main" r:embed="R2e5e9e24bea5439a"/>
+          <a:stretch xmlns:a="http://schemas.openxmlformats.org/drawingml/2006/main"/>
+        </p:blipFill>
+        <p:spPr>
+          <a:xfrm xmlns:a="http://schemas.openxmlformats.org/drawingml/2006/main">
+            <a:off x="6896060" y="4457700"/>
+            <a:ext cx="2971881" cy="1790700"/>
+          </a:xfrm>
+          <a:prstGeom xmlns:a="http://schemas.openxmlformats.org/drawingml/2006/main" prst="rect">
+            <a:avLst/>
+          </a:prstGeom>
+        </p:spPr>
+      </p:pic>
+    </p:spTree>
+    <p:extLst>
+      <p:ext uri="{BB962C8B-B14F-4D97-AF65-F5344CB8AC3E}">
+        <p14:creationId xmlns:p14="http://schemas.microsoft.com/office/powerpoint/2010/main" val="603630751"/>
+      </p:ext>
+    </p:extLst>
+  </p:cSld>
+</p:sld>
+</file>
+
+<file path=ppt/slides/slide13.xml><?xml version="1.0" encoding="utf-8"?>
+<p:sld xmlns:p="http://schemas.openxmlformats.org/presentationml/2006/main">
+  <p:cSld>
+    <p:bg>
+      <p:bgPr>
+        <a:solidFill xmlns:a="http://schemas.openxmlformats.org/drawingml/2006/main">
+          <a:srgbClr val="F6F8F7"/>
+        </a:solidFill>
+      </p:bgPr>
+    </p:bg>
+    <p:spTree>
+      <p:nvGrpSpPr>
+        <p:cNvPr id="1" name=""/>
+        <p:cNvGrpSpPr/>
+        <p:nvPr/>
+      </p:nvGrpSpPr>
+      <p:grpSpPr>
+        <a:xfrm xmlns:a="http://schemas.openxmlformats.org/drawingml/2006/main"/>
+      </p:grpSpPr>
+      <p:sp>
+        <p:nvSpPr>
+          <p:cNvPr id="9" name="">
+            <a:extLst xmlns:a="http://schemas.openxmlformats.org/drawingml/2006/main">
+              <a:ext uri="{FF2B5EF4-FFF2-40B4-BE49-F238E27FC236}">
+                <a16:creationId xmlns:a16="http://schemas.microsoft.com/office/drawing/2014/main" id="{08E456C3-B1CC-403C-8B6E-49B7D47F2875}"/>
+              </a:ext>
+            </a:extLst>
+          </p:cNvPr>
+          <p:cNvSpPr>
+            <a:spLocks xmlns:a="http://schemas.openxmlformats.org/drawingml/2006/main" noGrp="1"/>
+          </p:cNvSpPr>
+          <p:nvPr/>
+        </p:nvSpPr>
+        <p:spPr>
+          <a:xfrm xmlns:a="http://schemas.openxmlformats.org/drawingml/2006/main">
+            <a:off x="609600" y="428625"/>
+            <a:ext cx="10972800" cy="762000"/>
+          </a:xfrm>
+          <a:prstGeom xmlns:a="http://schemas.openxmlformats.org/drawingml/2006/main" prst="rect">
+            <a:avLst/>
+          </a:prstGeom>
+          <a:noFill xmlns:a="http://schemas.openxmlformats.org/drawingml/2006/main"/>
+          <a:ln xmlns:a="http://schemas.openxmlformats.org/drawingml/2006/main" w="0">
+            <a:noFill/>
+          </a:ln>
+        </p:spPr>
+        <p:txBody>
+          <a:bodyPr xmlns:a="http://schemas.openxmlformats.org/drawingml/2006/main">
+            <a:noAutofit/>
+          </a:bodyPr>
+          <a:lstStyle xmlns:a="http://schemas.openxmlformats.org/drawingml/2006/main"/>
+          <a:p xmlns:a="http://schemas.openxmlformats.org/drawingml/2006/main">
+            <a:pPr>
+              <a:defRPr sz="3450" b="1">
+                <a:solidFill>
+                  <a:srgbClr val="102637"/>
+                </a:solidFill>
+                <a:latin typeface="DejaVu Sans"/>
+                <a:ea typeface="DejaVu Sans"/>
+                <a:cs typeface="DejaVu Sans"/>
+              </a:defRPr>
+            </a:pPr>
+            <a:r>
+              <a:rPr sz="3450" b="1">
+                <a:solidFill>
+                  <a:srgbClr val="102637"/>
+                </a:solidFill>
+                <a:latin typeface="DejaVu Sans"/>
+                <a:ea typeface="DejaVu Sans"/>
+                <a:cs typeface="DejaVu Sans"/>
+              </a:rPr>
+              <a:t>Container sketches and CAM evidence</a:t>
+            </a:r>
+          </a:p>
+        </p:txBody>
+      </p:sp>
+      <p:sp>
+        <p:nvSpPr>
+          <p:cNvPr id="2" name="">
+            <a:extLst xmlns:a="http://schemas.openxmlformats.org/drawingml/2006/main">
+              <a:ext uri="{FF2B5EF4-FFF2-40B4-BE49-F238E27FC236}">
+                <a16:creationId xmlns:a16="http://schemas.microsoft.com/office/drawing/2014/main" id="{01E1F185-78B2-448E-A388-AF6871832833}"/>
+              </a:ext>
+            </a:extLst>
+          </p:cNvPr>
+          <p:cNvSpPr>
+            <a:spLocks xmlns:a="http://schemas.openxmlformats.org/drawingml/2006/main" noGrp="1"/>
+          </p:cNvSpPr>
+          <p:nvPr/>
+        </p:nvSpPr>
+        <p:spPr>
+          <a:xfrm xmlns:a="http://schemas.openxmlformats.org/drawingml/2006/main">
+            <a:off x="609600" y="1190625"/>
+            <a:ext cx="10972800" cy="400050"/>
+          </a:xfrm>
+          <a:prstGeom xmlns:a="http://schemas.openxmlformats.org/drawingml/2006/main" prst="rect">
+            <a:avLst/>
+          </a:prstGeom>
+          <a:noFill xmlns:a="http://schemas.openxmlformats.org/drawingml/2006/main"/>
+          <a:ln xmlns:a="http://schemas.openxmlformats.org/drawingml/2006/main" w="0">
+            <a:noFill/>
+          </a:ln>
+        </p:spPr>
+        <p:txBody>
+          <a:bodyPr xmlns:a="http://schemas.openxmlformats.org/drawingml/2006/main">
+            <a:noAutofit/>
+          </a:bodyPr>
+          <a:lstStyle xmlns:a="http://schemas.openxmlformats.org/drawingml/2006/main"/>
+          <a:p xmlns:a="http://schemas.openxmlformats.org/drawingml/2006/main">
+            <a:pPr>
+              <a:defRPr sz="1650" b="0">
+                <a:solidFill>
+                  <a:srgbClr val="147F80"/>
+                </a:solidFill>
+                <a:latin typeface="DejaVu Sans"/>
+                <a:ea typeface="DejaVu Sans"/>
+                <a:cs typeface="DejaVu Sans"/>
+              </a:defRPr>
+            </a:pPr>
+            <a:r>
+              <a:rPr sz="1650" b="0">
+                <a:solidFill>
+                  <a:srgbClr val="147F80"/>
+                </a:solidFill>
+                <a:latin typeface="DejaVu Sans"/>
+                <a:ea typeface="DejaVu Sans"/>
+                <a:cs typeface="DejaVu Sans"/>
+              </a:rPr>
+              <a:t>Original design record and machining simulations</a:t>
+            </a:r>
+          </a:p>
+        </p:txBody>
+      </p:sp>
+      <p:pic>
+        <p:nvPicPr>
+          <p:cNvPr id="11" name=""/>
+          <p:cNvPicPr>
+            <a:picLocks xmlns:a="http://schemas.openxmlformats.org/drawingml/2006/main" noChangeAspect="1"/>
+          </p:cNvPicPr>
+          <p:nvPr/>
+        </p:nvPicPr>
+        <p:blipFill>
+          <a:blip xmlns:r="http://schemas.openxmlformats.org/officeDocument/2006/relationships" xmlns:a="http://schemas.openxmlformats.org/drawingml/2006/main" r:embed="R3847c7294e534029"/>
+          <a:stretch xmlns:a="http://schemas.openxmlformats.org/drawingml/2006/main"/>
+        </p:blipFill>
+        <p:spPr>
+          <a:xfrm xmlns:a="http://schemas.openxmlformats.org/drawingml/2006/main">
+            <a:off x="609600" y="2741301"/>
+            <a:ext cx="3429000" cy="1975474"/>
+          </a:xfrm>
+          <a:prstGeom xmlns:a="http://schemas.openxmlformats.org/drawingml/2006/main" prst="rect">
+            <a:avLst/>
+          </a:prstGeom>
+        </p:spPr>
+      </p:pic>
+      <p:sp>
+        <p:nvSpPr>
+          <p:cNvPr id="4" name="">
+            <a:extLst xmlns:a="http://schemas.openxmlformats.org/drawingml/2006/main">
+              <a:ext uri="{FF2B5EF4-FFF2-40B4-BE49-F238E27FC236}">
+                <a16:creationId xmlns:a16="http://schemas.microsoft.com/office/drawing/2014/main" id="{6C179DC8-1DC9-4F7B-A354-60E393F7B51D}"/>
+              </a:ext>
+            </a:extLst>
+          </p:cNvPr>
+          <p:cNvSpPr>
+            <a:spLocks xmlns:a="http://schemas.openxmlformats.org/drawingml/2006/main" noGrp="1"/>
+          </p:cNvSpPr>
+          <p:nvPr/>
+        </p:nvSpPr>
+        <p:spPr>
+          <a:xfrm xmlns:a="http://schemas.openxmlformats.org/drawingml/2006/main">
+            <a:off x="609600" y="5629275"/>
+            <a:ext cx="3429000" cy="381000"/>
+          </a:xfrm>
+          <a:prstGeom xmlns:a="http://schemas.openxmlformats.org/drawingml/2006/main" prst="rect">
+            <a:avLst/>
+          </a:prstGeom>
+          <a:noFill xmlns:a="http://schemas.openxmlformats.org/drawingml/2006/main"/>
+          <a:ln xmlns:a="http://schemas.openxmlformats.org/drawingml/2006/main" w="0">
+            <a:noFill/>
+          </a:ln>
+        </p:spPr>
+        <p:txBody>
+          <a:bodyPr xmlns:a="http://schemas.openxmlformats.org/drawingml/2006/main">
+            <a:noAutofit/>
+          </a:bodyPr>
+          <a:lstStyle xmlns:a="http://schemas.openxmlformats.org/drawingml/2006/main"/>
+          <a:p xmlns:a="http://schemas.openxmlformats.org/drawingml/2006/main">
+            <a:pPr>
+              <a:defRPr sz="1650" b="0">
+                <a:solidFill>
+                  <a:srgbClr val="4C626E"/>
+                </a:solidFill>
+                <a:latin typeface="DejaVu Sans"/>
+                <a:ea typeface="DejaVu Sans"/>
+                <a:cs typeface="DejaVu Sans"/>
+              </a:defRPr>
+            </a:pPr>
+            <a:r>
+              <a:rPr sz="1650" b="0">
+                <a:solidFill>
+                  <a:srgbClr val="4C626E"/>
+                </a:solidFill>
+                <a:latin typeface="DejaVu Sans"/>
+                <a:ea typeface="DejaVu Sans"/>
+                <a:cs typeface="DejaVu Sans"/>
+              </a:rPr>
+              <a:t>Lid fit sketch</a:t>
+            </a:r>
+          </a:p>
+        </p:txBody>
+      </p:sp>
+      <p:pic>
+        <p:nvPicPr>
+          <p:cNvPr id="13" name=""/>
+          <p:cNvPicPr>
+            <a:picLocks xmlns:a="http://schemas.openxmlformats.org/drawingml/2006/main" noChangeAspect="1"/>
+          </p:cNvPicPr>
+          <p:nvPr/>
+        </p:nvPicPr>
+        <p:blipFill>
+          <a:blip xmlns:r="http://schemas.openxmlformats.org/officeDocument/2006/relationships" xmlns:a="http://schemas.openxmlformats.org/drawingml/2006/main" r:embed="R2d41a916fd2b4afd"/>
+          <a:stretch xmlns:a="http://schemas.openxmlformats.org/drawingml/2006/main"/>
+        </p:blipFill>
+        <p:spPr>
+          <a:xfrm xmlns:a="http://schemas.openxmlformats.org/drawingml/2006/main">
+            <a:off x="4343400" y="2365919"/>
+            <a:ext cx="3429000" cy="2726237"/>
+          </a:xfrm>
+          <a:prstGeom xmlns:a="http://schemas.openxmlformats.org/drawingml/2006/main" prst="rect">
+            <a:avLst/>
+          </a:prstGeom>
+        </p:spPr>
+      </p:pic>
+      <p:sp>
+        <p:nvSpPr>
+          <p:cNvPr id="6" name="">
+            <a:extLst xmlns:a="http://schemas.openxmlformats.org/drawingml/2006/main">
+              <a:ext uri="{FF2B5EF4-FFF2-40B4-BE49-F238E27FC236}">
+                <a16:creationId xmlns:a16="http://schemas.microsoft.com/office/drawing/2014/main" id="{DCABA0CC-CDAF-4270-B7A6-7392FE19FA6B}"/>
+              </a:ext>
+            </a:extLst>
+          </p:cNvPr>
+          <p:cNvSpPr>
+            <a:spLocks xmlns:a="http://schemas.openxmlformats.org/drawingml/2006/main" noGrp="1"/>
+          </p:cNvSpPr>
+          <p:nvPr/>
+        </p:nvSpPr>
+        <p:spPr>
+          <a:xfrm xmlns:a="http://schemas.openxmlformats.org/drawingml/2006/main">
+            <a:off x="4343400" y="5629275"/>
+            <a:ext cx="3429000" cy="381000"/>
+          </a:xfrm>
+          <a:prstGeom xmlns:a="http://schemas.openxmlformats.org/drawingml/2006/main" prst="rect">
+            <a:avLst/>
+          </a:prstGeom>
+          <a:noFill xmlns:a="http://schemas.openxmlformats.org/drawingml/2006/main"/>
+          <a:ln xmlns:a="http://schemas.openxmlformats.org/drawingml/2006/main" w="0">
+            <a:noFill/>
+          </a:ln>
+        </p:spPr>
+        <p:txBody>
+          <a:bodyPr xmlns:a="http://schemas.openxmlformats.org/drawingml/2006/main">
+            <a:noAutofit/>
+          </a:bodyPr>
+          <a:lstStyle xmlns:a="http://schemas.openxmlformats.org/drawingml/2006/main"/>
+          <a:p xmlns:a="http://schemas.openxmlformats.org/drawingml/2006/main">
+            <a:pPr>
+              <a:defRPr sz="1650" b="0">
+                <a:solidFill>
+                  <a:srgbClr val="4C626E"/>
+                </a:solidFill>
+                <a:latin typeface="DejaVu Sans"/>
+                <a:ea typeface="DejaVu Sans"/>
+                <a:cs typeface="DejaVu Sans"/>
+              </a:defRPr>
+            </a:pPr>
+            <a:r>
+              <a:rPr sz="1650" b="0">
+                <a:solidFill>
+                  <a:srgbClr val="4C626E"/>
+                </a:solidFill>
+                <a:latin typeface="DejaVu Sans"/>
+                <a:ea typeface="DejaVu Sans"/>
+                <a:cs typeface="DejaVu Sans"/>
+              </a:rPr>
+              <a:t>Dimensioned top view</a:t>
+            </a:r>
+          </a:p>
+        </p:txBody>
+      </p:sp>
+      <p:pic>
+        <p:nvPicPr>
+          <p:cNvPr id="15" name=""/>
+          <p:cNvPicPr>
+            <a:picLocks xmlns:a="http://schemas.openxmlformats.org/drawingml/2006/main" noChangeAspect="1"/>
+          </p:cNvPicPr>
+          <p:nvPr/>
+        </p:nvPicPr>
+        <p:blipFill>
+          <a:blip xmlns:r="http://schemas.openxmlformats.org/officeDocument/2006/relationships" xmlns:a="http://schemas.openxmlformats.org/drawingml/2006/main" r:embed="R5fe15fdf2e754397"/>
+          <a:stretch xmlns:a="http://schemas.openxmlformats.org/drawingml/2006/main"/>
+        </p:blipFill>
+        <p:spPr>
+          <a:xfrm xmlns:a="http://schemas.openxmlformats.org/drawingml/2006/main">
+            <a:off x="8077200" y="2562470"/>
+            <a:ext cx="3429000" cy="2333134"/>
+          </a:xfrm>
+          <a:prstGeom xmlns:a="http://schemas.openxmlformats.org/drawingml/2006/main" prst="rect">
+            <a:avLst/>
+          </a:prstGeom>
+        </p:spPr>
+      </p:pic>
+      <p:sp>
+        <p:nvSpPr>
+          <p:cNvPr id="8" name="">
+            <a:extLst xmlns:a="http://schemas.openxmlformats.org/drawingml/2006/main">
+              <a:ext uri="{FF2B5EF4-FFF2-40B4-BE49-F238E27FC236}">
+                <a16:creationId xmlns:a16="http://schemas.microsoft.com/office/drawing/2014/main" id="{B58B4F7E-67A3-47F9-A311-67F3A1302972}"/>
+              </a:ext>
+            </a:extLst>
+          </p:cNvPr>
+          <p:cNvSpPr>
+            <a:spLocks xmlns:a="http://schemas.openxmlformats.org/drawingml/2006/main" noGrp="1"/>
+          </p:cNvSpPr>
+          <p:nvPr/>
+        </p:nvSpPr>
+        <p:spPr>
+          <a:xfrm xmlns:a="http://schemas.openxmlformats.org/drawingml/2006/main">
+            <a:off x="8077200" y="5629275"/>
+            <a:ext cx="3429000" cy="381000"/>
+          </a:xfrm>
+          <a:prstGeom xmlns:a="http://schemas.openxmlformats.org/drawingml/2006/main" prst="rect">
+            <a:avLst/>
+          </a:prstGeom>
+          <a:noFill xmlns:a="http://schemas.openxmlformats.org/drawingml/2006/main"/>
+          <a:ln xmlns:a="http://schemas.openxmlformats.org/drawingml/2006/main" w="0">
+            <a:noFill/>
+          </a:ln>
+        </p:spPr>
+        <p:txBody>
+          <a:bodyPr xmlns:a="http://schemas.openxmlformats.org/drawingml/2006/main">
+            <a:noAutofit/>
+          </a:bodyPr>
+          <a:lstStyle xmlns:a="http://schemas.openxmlformats.org/drawingml/2006/main"/>
+          <a:p xmlns:a="http://schemas.openxmlformats.org/drawingml/2006/main">
+            <a:pPr>
+              <a:defRPr sz="1650" b="0">
+                <a:solidFill>
+                  <a:srgbClr val="4C626E"/>
+                </a:solidFill>
+                <a:latin typeface="DejaVu Sans"/>
+                <a:ea typeface="DejaVu Sans"/>
+                <a:cs typeface="DejaVu Sans"/>
+              </a:defRPr>
+            </a:pPr>
+            <a:r>
+              <a:rPr sz="1650" b="0">
+                <a:solidFill>
+                  <a:srgbClr val="4C626E"/>
+                </a:solidFill>
+                <a:latin typeface="DejaVu Sans"/>
+                <a:ea typeface="DejaVu Sans"/>
+                <a:cs typeface="DejaVu Sans"/>
+              </a:rPr>
+              <a:t>Lid toolpath</a:t>
+            </a:r>
+          </a:p>
+        </p:txBody>
+      </p:sp>
+    </p:spTree>
+    <p:extLst>
+      <p:ext uri="{BB962C8B-B14F-4D97-AF65-F5344CB8AC3E}">
+        <p14:creationId xmlns:p14="http://schemas.microsoft.com/office/powerpoint/2010/main" val="1179675732"/>
+      </p:ext>
+    </p:extLst>
+  </p:cSld>
+</p:sld>
+</file>
+
+<file path=ppt/slides/slide14.xml><?xml version="1.0" encoding="utf-8"?>
+<p:sld xmlns:p="http://schemas.openxmlformats.org/presentationml/2006/main">
+  <p:cSld>
+    <p:bg>
+      <p:bgPr>
+        <a:solidFill xmlns:a="http://schemas.openxmlformats.org/drawingml/2006/main">
+          <a:srgbClr val="F6F8F7"/>
+        </a:solidFill>
+      </p:bgPr>
+    </p:bg>
+    <p:spTree>
+      <p:nvGrpSpPr>
+        <p:cNvPr id="1" name=""/>
+        <p:cNvGrpSpPr/>
+        <p:nvPr/>
+      </p:nvGrpSpPr>
+      <p:grpSpPr>
+        <a:xfrm xmlns:a="http://schemas.openxmlformats.org/drawingml/2006/main"/>
+      </p:grpSpPr>
+      <p:sp>
+        <p:nvSpPr>
+          <p:cNvPr id="10" name="Bridge build and design reflection">
+            <a:extLst xmlns:a="http://schemas.openxmlformats.org/drawingml/2006/main">
+              <a:ext uri="{FF2B5EF4-FFF2-40B4-BE49-F238E27FC236}">
+                <a16:creationId xmlns:a16="http://schemas.microsoft.com/office/drawing/2014/main" id="{0DB09621-2BDE-426F-B728-BA1385B66ADE}"/>
+              </a:ext>
+            </a:extLst>
+          </p:cNvPr>
+          <p:cNvSpPr>
+            <a:spLocks xmlns:a="http://schemas.openxmlformats.org/drawingml/2006/main" noGrp="1"/>
+          </p:cNvSpPr>
+          <p:nvPr/>
+        </p:nvSpPr>
+        <p:spPr>
+          <a:xfrm xmlns:a="http://schemas.openxmlformats.org/drawingml/2006/main">
+            <a:off x="609600" y="428625"/>
+            <a:ext cx="10972800" cy="762000"/>
+          </a:xfrm>
+          <a:prstGeom xmlns:a="http://schemas.openxmlformats.org/drawingml/2006/main" prst="rect">
+            <a:avLst/>
+          </a:prstGeom>
+          <a:noFill xmlns:a="http://schemas.openxmlformats.org/drawingml/2006/main"/>
+          <a:ln xmlns:a="http://schemas.openxmlformats.org/drawingml/2006/main" w="0">
+            <a:noFill/>
+          </a:ln>
+        </p:spPr>
+        <p:txBody>
+          <a:bodyPr xmlns:a="http://schemas.openxmlformats.org/drawingml/2006/main">
+            <a:noAutofit/>
+          </a:bodyPr>
+          <a:lstStyle xmlns:a="http://schemas.openxmlformats.org/drawingml/2006/main"/>
+          <a:p xmlns:a="http://schemas.openxmlformats.org/drawingml/2006/main">
+            <a:pPr>
+              <a:buNone/>
+              <a:defRPr sz="3450" b="1">
+                <a:solidFill>
+                  <a:srgbClr val="102637"/>
+                </a:solidFill>
+                <a:latin typeface="DejaVu Sans"/>
+                <a:ea typeface="DejaVu Sans"/>
+                <a:cs typeface="DejaVu Sans"/>
+              </a:defRPr>
+            </a:pPr>
+            <a:r>
+              <a:rPr sz="3450" b="1">
+                <a:solidFill>
+                  <a:srgbClr val="102637"/>
+                </a:solidFill>
+                <a:latin typeface="DejaVu Sans"/>
+                <a:ea typeface="DejaVu Sans"/>
+                <a:cs typeface="DejaVu Sans"/>
+              </a:rPr>
+              <a:t>Bridge build and design reflection</a:t>
+            </a:r>
+          </a:p>
+        </p:txBody>
+      </p:sp>
+      <p:sp>
+        <p:nvSpPr>
+          <p:cNvPr id="2" name="PLTW 2024 · Individual physical build">
+            <a:extLst xmlns:a="http://schemas.openxmlformats.org/drawingml/2006/main">
+              <a:ext uri="{FF2B5EF4-FFF2-40B4-BE49-F238E27FC236}">
+                <a16:creationId xmlns:a16="http://schemas.microsoft.com/office/drawing/2014/main" id="{F9011DF8-B4C0-47A8-BCC8-8E598CF22853}"/>
+              </a:ext>
+            </a:extLst>
+          </p:cNvPr>
+          <p:cNvSpPr>
+            <a:spLocks xmlns:a="http://schemas.openxmlformats.org/drawingml/2006/main" noGrp="1"/>
+          </p:cNvSpPr>
+          <p:nvPr/>
+        </p:nvSpPr>
+        <p:spPr>
+          <a:xfrm xmlns:a="http://schemas.openxmlformats.org/drawingml/2006/main">
+            <a:off x="609600" y="1190625"/>
+            <a:ext cx="10972800" cy="400050"/>
+          </a:xfrm>
+          <a:prstGeom xmlns:a="http://schemas.openxmlformats.org/drawingml/2006/main" prst="rect">
+            <a:avLst/>
+          </a:prstGeom>
+          <a:noFill xmlns:a="http://schemas.openxmlformats.org/drawingml/2006/main"/>
+          <a:ln xmlns:a="http://schemas.openxmlformats.org/drawingml/2006/main" w="0">
+            <a:noFill/>
+          </a:ln>
+        </p:spPr>
+        <p:txBody>
+          <a:bodyPr xmlns:a="http://schemas.openxmlformats.org/drawingml/2006/main">
+            <a:noAutofit/>
+          </a:bodyPr>
+          <a:lstStyle xmlns:a="http://schemas.openxmlformats.org/drawingml/2006/main"/>
+          <a:p xmlns:a="http://schemas.openxmlformats.org/drawingml/2006/main">
+            <a:pPr>
+              <a:buNone/>
+              <a:defRPr sz="1650" b="0">
+                <a:solidFill>
+                  <a:srgbClr val="147F80"/>
+                </a:solidFill>
+                <a:latin typeface="DejaVu Sans"/>
+                <a:ea typeface="DejaVu Sans"/>
+                <a:cs typeface="DejaVu Sans"/>
+              </a:defRPr>
+            </a:pPr>
+            <a:r>
+              <a:rPr sz="1650" b="0">
+                <a:solidFill>
+                  <a:srgbClr val="147F80"/>
+                </a:solidFill>
+                <a:latin typeface="DejaVu Sans"/>
+                <a:ea typeface="DejaVu Sans"/>
+                <a:cs typeface="DejaVu Sans"/>
+              </a:rPr>
+              <a:t>PLTW 2024 · Individual physical build</a:t>
+            </a:r>
+          </a:p>
+        </p:txBody>
+      </p:sp>
+      <p:sp>
+        <p:nvSpPr>
+          <p:cNvPr id="3" name="Constraints">
+            <a:extLst xmlns:a="http://schemas.openxmlformats.org/drawingml/2006/main">
+              <a:ext uri="{FF2B5EF4-FFF2-40B4-BE49-F238E27FC236}">
+                <a16:creationId xmlns:a16="http://schemas.microsoft.com/office/drawing/2014/main" id="{4CE220DB-3F22-4BCC-86B2-8B9689A6AFC6}"/>
+              </a:ext>
+            </a:extLst>
+          </p:cNvPr>
+          <p:cNvSpPr>
+            <a:spLocks xmlns:a="http://schemas.openxmlformats.org/drawingml/2006/main" noGrp="1"/>
+          </p:cNvSpPr>
+          <p:nvPr/>
+        </p:nvSpPr>
+        <p:spPr>
+          <a:xfrm xmlns:a="http://schemas.openxmlformats.org/drawingml/2006/main">
+            <a:off x="609600" y="1847850"/>
+            <a:ext cx="4371975" cy="361950"/>
+          </a:xfrm>
+          <a:prstGeom xmlns:a="http://schemas.openxmlformats.org/drawingml/2006/main" prst="rect">
+            <a:avLst/>
+          </a:prstGeom>
+          <a:noFill xmlns:a="http://schemas.openxmlformats.org/drawingml/2006/main"/>
+          <a:ln xmlns:a="http://schemas.openxmlformats.org/drawingml/2006/main" w="0">
+            <a:noFill/>
+          </a:ln>
+        </p:spPr>
+        <p:txBody>
+          <a:bodyPr xmlns:a="http://schemas.openxmlformats.org/drawingml/2006/main">
+            <a:noAutofit/>
+          </a:bodyPr>
+          <a:lstStyle xmlns:a="http://schemas.openxmlformats.org/drawingml/2006/main"/>
+          <a:p xmlns:a="http://schemas.openxmlformats.org/drawingml/2006/main">
+            <a:pPr>
+              <a:buNone/>
+              <a:defRPr sz="1950" b="1">
+                <a:solidFill>
+                  <a:srgbClr val="102637"/>
+                </a:solidFill>
+                <a:latin typeface="DejaVu Sans"/>
+                <a:ea typeface="DejaVu Sans"/>
+                <a:cs typeface="DejaVu Sans"/>
+              </a:defRPr>
+            </a:pPr>
+            <a:r>
+              <a:rPr sz="1950" b="1">
+                <a:solidFill>
+                  <a:srgbClr val="102637"/>
+                </a:solidFill>
+                <a:latin typeface="DejaVu Sans"/>
+                <a:ea typeface="DejaVu Sans"/>
+                <a:cs typeface="DejaVu Sans"/>
+              </a:rPr>
+              <a:t>Constraints</a:t>
+            </a:r>
+          </a:p>
+        </p:txBody>
+      </p:sp>
+      <p:sp>
+        <p:nvSpPr>
+          <p:cNvPr id="4" name="At most 60 popsicle sticks and a required 24-">
+            <a:extLst xmlns:a="http://schemas.openxmlformats.org/drawingml/2006/main">
+              <a:ext uri="{FF2B5EF4-FFF2-40B4-BE49-F238E27FC236}">
+                <a16:creationId xmlns:a16="http://schemas.microsoft.com/office/drawing/2014/main" id="{CEE308BB-A341-4E83-AAE0-9543275C060A}"/>
+              </a:ext>
+            </a:extLst>
+          </p:cNvPr>
+          <p:cNvSpPr>
+            <a:spLocks xmlns:a="http://schemas.openxmlformats.org/drawingml/2006/main" noGrp="1"/>
+          </p:cNvSpPr>
+          <p:nvPr/>
+        </p:nvSpPr>
+        <p:spPr>
+          <a:xfrm xmlns:a="http://schemas.openxmlformats.org/drawingml/2006/main">
+            <a:off x="609600" y="2257425"/>
+            <a:ext cx="4371975" cy="1143000"/>
+          </a:xfrm>
+          <a:prstGeom xmlns:a="http://schemas.openxmlformats.org/drawingml/2006/main" prst="rect">
+            <a:avLst/>
+          </a:prstGeom>
+          <a:noFill xmlns:a="http://schemas.openxmlformats.org/drawingml/2006/main"/>
+          <a:ln xmlns:a="http://schemas.openxmlformats.org/drawingml/2006/main" w="0">
+            <a:noFill/>
+          </a:ln>
+        </p:spPr>
+        <p:txBody>
+          <a:bodyPr xmlns:a="http://schemas.openxmlformats.org/drawingml/2006/main">
+            <a:noAutofit/>
+          </a:bodyPr>
+          <a:lstStyle xmlns:a="http://schemas.openxmlformats.org/drawingml/2006/main"/>
+          <a:p xmlns:a="http://schemas.openxmlformats.org/drawingml/2006/main">
+            <a:pPr>
+              <a:buNone/>
+              <a:defRPr sz="1800" b="0">
+                <a:solidFill>
+                  <a:srgbClr val="4C626E"/>
+                </a:solidFill>
+                <a:latin typeface="DejaVu Sans"/>
+                <a:ea typeface="DejaVu Sans"/>
+                <a:cs typeface="DejaVu Sans"/>
+              </a:defRPr>
+            </a:pPr>
+            <a:r>
+              <a:rPr sz="1800" b="0">
+                <a:solidFill>
+                  <a:srgbClr val="4C626E"/>
+                </a:solidFill>
+                <a:latin typeface="DejaVu Sans"/>
+                <a:ea typeface="DejaVu Sans"/>
+                <a:cs typeface="DejaVu Sans"/>
+              </a:rPr>
+              <a:t>At most 60 popsicle sticks and a required 24-inch span.</a:t>
+            </a:r>
+          </a:p>
+        </p:txBody>
+      </p:sp>
+      <p:sp>
+        <p:nvSpPr>
+          <p:cNvPr id="5" name="Outcome">
+            <a:extLst xmlns:a="http://schemas.openxmlformats.org/drawingml/2006/main">
+              <a:ext uri="{FF2B5EF4-FFF2-40B4-BE49-F238E27FC236}">
+                <a16:creationId xmlns:a16="http://schemas.microsoft.com/office/drawing/2014/main" id="{4DE6399F-274F-4ACD-B471-5D7E42E6A364}"/>
+              </a:ext>
+            </a:extLst>
+          </p:cNvPr>
+          <p:cNvSpPr>
+            <a:spLocks xmlns:a="http://schemas.openxmlformats.org/drawingml/2006/main" noGrp="1"/>
+          </p:cNvSpPr>
+          <p:nvPr/>
+        </p:nvSpPr>
+        <p:spPr>
+          <a:xfrm xmlns:a="http://schemas.openxmlformats.org/drawingml/2006/main">
+            <a:off x="609600" y="3371850"/>
+            <a:ext cx="4371975" cy="361950"/>
+          </a:xfrm>
+          <a:prstGeom xmlns:a="http://schemas.openxmlformats.org/drawingml/2006/main" prst="rect">
+            <a:avLst/>
+          </a:prstGeom>
+          <a:noFill xmlns:a="http://schemas.openxmlformats.org/drawingml/2006/main"/>
+          <a:ln xmlns:a="http://schemas.openxmlformats.org/drawingml/2006/main" w="0">
+            <a:noFill/>
+          </a:ln>
+        </p:spPr>
+        <p:txBody>
+          <a:bodyPr xmlns:a="http://schemas.openxmlformats.org/drawingml/2006/main">
+            <a:noAutofit/>
+          </a:bodyPr>
+          <a:lstStyle xmlns:a="http://schemas.openxmlformats.org/drawingml/2006/main"/>
+          <a:p xmlns:a="http://schemas.openxmlformats.org/drawingml/2006/main">
+            <a:pPr>
+              <a:buNone/>
+              <a:defRPr sz="1950" b="1">
+                <a:solidFill>
+                  <a:srgbClr val="102637"/>
+                </a:solidFill>
+                <a:latin typeface="DejaVu Sans"/>
+                <a:ea typeface="DejaVu Sans"/>
+                <a:cs typeface="DejaVu Sans"/>
+              </a:defRPr>
+            </a:pPr>
+            <a:r>
+              <a:rPr sz="1950" b="1">
+                <a:solidFill>
+                  <a:srgbClr val="102637"/>
+                </a:solidFill>
+                <a:latin typeface="DejaVu Sans"/>
+                <a:ea typeface="DejaVu Sans"/>
+                <a:cs typeface="DejaVu Sans"/>
+              </a:rPr>
+              <a:t>Outcome</a:t>
+            </a:r>
+          </a:p>
+        </p:txBody>
+      </p:sp>
+      <p:sp>
+        <p:nvSpPr>
+          <p:cNvPr id="6" name="The bridge carried a load but fell about four">
+            <a:extLst xmlns:a="http://schemas.openxmlformats.org/drawingml/2006/main">
+              <a:ext uri="{FF2B5EF4-FFF2-40B4-BE49-F238E27FC236}">
+                <a16:creationId xmlns:a16="http://schemas.microsoft.com/office/drawing/2014/main" id="{3C29DEFD-9DC3-41D2-8869-DD63B521FB4A}"/>
+              </a:ext>
+            </a:extLst>
+          </p:cNvPr>
+          <p:cNvSpPr>
+            <a:spLocks xmlns:a="http://schemas.openxmlformats.org/drawingml/2006/main" noGrp="1"/>
+          </p:cNvSpPr>
+          <p:nvPr/>
+        </p:nvSpPr>
+        <p:spPr>
+          <a:xfrm xmlns:a="http://schemas.openxmlformats.org/drawingml/2006/main">
+            <a:off x="609600" y="3781425"/>
+            <a:ext cx="4371975" cy="1143000"/>
+          </a:xfrm>
+          <a:prstGeom xmlns:a="http://schemas.openxmlformats.org/drawingml/2006/main" prst="rect">
+            <a:avLst/>
+          </a:prstGeom>
+          <a:noFill xmlns:a="http://schemas.openxmlformats.org/drawingml/2006/main"/>
+          <a:ln xmlns:a="http://schemas.openxmlformats.org/drawingml/2006/main" w="0">
+            <a:noFill/>
+          </a:ln>
+        </p:spPr>
+        <p:txBody>
+          <a:bodyPr xmlns:a="http://schemas.openxmlformats.org/drawingml/2006/main">
+            <a:noAutofit/>
+          </a:bodyPr>
+          <a:lstStyle xmlns:a="http://schemas.openxmlformats.org/drawingml/2006/main"/>
+          <a:p xmlns:a="http://schemas.openxmlformats.org/drawingml/2006/main">
+            <a:pPr>
+              <a:buNone/>
+              <a:defRPr sz="1800" b="0">
+                <a:solidFill>
+                  <a:srgbClr val="4C626E"/>
+                </a:solidFill>
+                <a:latin typeface="DejaVu Sans"/>
+                <a:ea typeface="DejaVu Sans"/>
+                <a:cs typeface="DejaVu Sans"/>
+              </a:defRPr>
+            </a:pPr>
+            <a:r>
+              <a:rPr sz="1800" b="0">
+                <a:solidFill>
+                  <a:srgbClr val="4C626E"/>
+                </a:solidFill>
+                <a:latin typeface="DejaVu Sans"/>
+                <a:ea typeface="DejaVu Sans"/>
+                <a:cs typeface="DejaVu Sans"/>
+              </a:rPr>
+              <a:t>The bridge carried a load but fell about four inches short of the required span.</a:t>
+            </a:r>
+          </a:p>
+        </p:txBody>
+      </p:sp>
+      <p:sp>
+        <p:nvSpPr>
+          <p:cNvPr id="7" name="Lesson">
+            <a:extLst xmlns:a="http://schemas.openxmlformats.org/drawingml/2006/main">
+              <a:ext uri="{FF2B5EF4-FFF2-40B4-BE49-F238E27FC236}">
+                <a16:creationId xmlns:a16="http://schemas.microsoft.com/office/drawing/2014/main" id="{2B83B824-1898-49FD-A103-F42B000523FF}"/>
+              </a:ext>
+            </a:extLst>
+          </p:cNvPr>
+          <p:cNvSpPr>
+            <a:spLocks xmlns:a="http://schemas.openxmlformats.org/drawingml/2006/main" noGrp="1"/>
+          </p:cNvSpPr>
+          <p:nvPr/>
+        </p:nvSpPr>
+        <p:spPr>
+          <a:xfrm xmlns:a="http://schemas.openxmlformats.org/drawingml/2006/main">
+            <a:off x="609600" y="4895850"/>
+            <a:ext cx="4371975" cy="361950"/>
+          </a:xfrm>
+          <a:prstGeom xmlns:a="http://schemas.openxmlformats.org/drawingml/2006/main" prst="rect">
+            <a:avLst/>
+          </a:prstGeom>
+          <a:noFill xmlns:a="http://schemas.openxmlformats.org/drawingml/2006/main"/>
+          <a:ln xmlns:a="http://schemas.openxmlformats.org/drawingml/2006/main" w="0">
+            <a:noFill/>
+          </a:ln>
+        </p:spPr>
+        <p:txBody>
+          <a:bodyPr xmlns:a="http://schemas.openxmlformats.org/drawingml/2006/main">
+            <a:noAutofit/>
+          </a:bodyPr>
+          <a:lstStyle xmlns:a="http://schemas.openxmlformats.org/drawingml/2006/main"/>
+          <a:p xmlns:a="http://schemas.openxmlformats.org/drawingml/2006/main">
+            <a:pPr>
+              <a:buNone/>
+              <a:defRPr sz="1950" b="1">
+                <a:solidFill>
+                  <a:srgbClr val="102637"/>
+                </a:solidFill>
+                <a:latin typeface="DejaVu Sans"/>
+                <a:ea typeface="DejaVu Sans"/>
+                <a:cs typeface="DejaVu Sans"/>
+              </a:defRPr>
+            </a:pPr>
+            <a:r>
+              <a:rPr sz="1950" b="1">
+                <a:solidFill>
+                  <a:srgbClr val="102637"/>
+                </a:solidFill>
+                <a:latin typeface="DejaVu Sans"/>
+                <a:ea typeface="DejaVu Sans"/>
+                <a:cs typeface="DejaVu Sans"/>
+              </a:rPr>
+              <a:t>Lesson</a:t>
+            </a:r>
+          </a:p>
+        </p:txBody>
+      </p:sp>
+      <p:sp>
+        <p:nvSpPr>
+          <p:cNvPr id="8" name="Verify dimensions before bracing. A stronger ">
+            <a:extLst xmlns:a="http://schemas.openxmlformats.org/drawingml/2006/main">
+              <a:ext uri="{FF2B5EF4-FFF2-40B4-BE49-F238E27FC236}">
+                <a16:creationId xmlns:a16="http://schemas.microsoft.com/office/drawing/2014/main" id="{87B61969-7280-4E47-AA0D-0F5866E3A927}"/>
+              </a:ext>
+            </a:extLst>
+          </p:cNvPr>
+          <p:cNvSpPr>
+            <a:spLocks xmlns:a="http://schemas.openxmlformats.org/drawingml/2006/main" noGrp="1"/>
+          </p:cNvSpPr>
+          <p:nvPr/>
+        </p:nvSpPr>
+        <p:spPr>
+          <a:xfrm xmlns:a="http://schemas.openxmlformats.org/drawingml/2006/main">
+            <a:off x="609600" y="5305425"/>
+            <a:ext cx="4371975" cy="1143000"/>
+          </a:xfrm>
+          <a:prstGeom xmlns:a="http://schemas.openxmlformats.org/drawingml/2006/main" prst="rect">
+            <a:avLst/>
+          </a:prstGeom>
+          <a:noFill xmlns:a="http://schemas.openxmlformats.org/drawingml/2006/main"/>
+          <a:ln xmlns:a="http://schemas.openxmlformats.org/drawingml/2006/main" w="0">
+            <a:noFill/>
+          </a:ln>
+        </p:spPr>
+        <p:txBody>
+          <a:bodyPr xmlns:a="http://schemas.openxmlformats.org/drawingml/2006/main">
+            <a:noAutofit/>
+          </a:bodyPr>
+          <a:lstStyle xmlns:a="http://schemas.openxmlformats.org/drawingml/2006/main"/>
+          <a:p xmlns:a="http://schemas.openxmlformats.org/drawingml/2006/main">
+            <a:pPr>
+              <a:buNone/>
+              <a:defRPr sz="1800" b="0">
+                <a:solidFill>
+                  <a:srgbClr val="4C626E"/>
+                </a:solidFill>
+                <a:latin typeface="DejaVu Sans"/>
+                <a:ea typeface="DejaVu Sans"/>
+                <a:cs typeface="DejaVu Sans"/>
+              </a:defRPr>
+            </a:pPr>
+            <a:r>
+              <a:rPr sz="1800" b="0">
+                <a:solidFill>
+                  <a:srgbClr val="4C626E"/>
+                </a:solidFill>
+                <a:latin typeface="DejaVu Sans"/>
+                <a:ea typeface="DejaVu Sans"/>
+                <a:cs typeface="DejaVu Sans"/>
+              </a:rPr>
+              <a:t>Verify dimensions before bracing. A stronger structure still has to meet its original requirements.</a:t>
+            </a:r>
+          </a:p>
+        </p:txBody>
+      </p:sp>
+      <p:pic>
+        <p:nvPicPr>
+          <p:cNvPr id="22" name=""/>
+          <p:cNvPicPr>
+            <a:picLocks xmlns:a="http://schemas.openxmlformats.org/drawingml/2006/main" noChangeAspect="1"/>
+          </p:cNvPicPr>
+          <p:nvPr/>
+        </p:nvPicPr>
+        <p:blipFill>
+          <a:blip xmlns:r="http://schemas.openxmlformats.org/officeDocument/2006/relationships" xmlns:a="http://schemas.openxmlformats.org/drawingml/2006/main" r:embed="Rc671d587ed84423a"/>
+          <a:stretch xmlns:a="http://schemas.openxmlformats.org/drawingml/2006/main"/>
+        </p:blipFill>
+        <p:spPr>
+          <a:xfrm xmlns:a="http://schemas.openxmlformats.org/drawingml/2006/main">
+            <a:off x="5334000" y="1800225"/>
+            <a:ext cx="6248400" cy="2876550"/>
+          </a:xfrm>
+          <a:prstGeom xmlns:a="http://schemas.openxmlformats.org/drawingml/2006/main" prst="rect">
+            <a:avLst/>
+          </a:prstGeom>
+        </p:spPr>
+      </p:pic>
+      <p:pic>
+        <p:nvPicPr>
+          <p:cNvPr id="23" name=""/>
+          <p:cNvPicPr>
+            <a:picLocks xmlns:a="http://schemas.openxmlformats.org/drawingml/2006/main" noChangeAspect="1"/>
+          </p:cNvPicPr>
+          <p:nvPr/>
+        </p:nvPicPr>
+        <p:blipFill>
+          <a:blip xmlns:r="http://schemas.openxmlformats.org/officeDocument/2006/relationships" xmlns:a="http://schemas.openxmlformats.org/drawingml/2006/main" r:embed="Rd2eae93ce1f74191"/>
+          <a:stretch xmlns:a="http://schemas.openxmlformats.org/drawingml/2006/main"/>
+        </p:blipFill>
+        <p:spPr>
+          <a:xfrm xmlns:a="http://schemas.openxmlformats.org/drawingml/2006/main">
+            <a:off x="5892800" y="4857750"/>
+            <a:ext cx="1968500" cy="1476375"/>
+          </a:xfrm>
+          <a:prstGeom xmlns:a="http://schemas.openxmlformats.org/drawingml/2006/main" prst="rect">
+            <a:avLst/>
+          </a:prstGeom>
+        </p:spPr>
+      </p:pic>
+      <p:pic>
+        <p:nvPicPr>
+          <p:cNvPr id="24" name=""/>
+          <p:cNvPicPr>
+            <a:picLocks xmlns:a="http://schemas.openxmlformats.org/drawingml/2006/main" noChangeAspect="1"/>
+          </p:cNvPicPr>
+          <p:nvPr/>
+        </p:nvPicPr>
+        <p:blipFill>
+          <a:blip xmlns:r="http://schemas.openxmlformats.org/officeDocument/2006/relationships" xmlns:a="http://schemas.openxmlformats.org/drawingml/2006/main" r:embed="Rb5412668accd4da8"/>
+          <a:stretch xmlns:a="http://schemas.openxmlformats.org/drawingml/2006/main"/>
+        </p:blipFill>
+        <p:spPr>
+          <a:xfrm xmlns:a="http://schemas.openxmlformats.org/drawingml/2006/main">
+            <a:off x="9571434" y="4857750"/>
+            <a:ext cx="1107281" cy="1476375"/>
+          </a:xfrm>
+          <a:prstGeom xmlns:a="http://schemas.openxmlformats.org/drawingml/2006/main" prst="rect">
+            <a:avLst/>
+          </a:prstGeom>
+        </p:spPr>
+      </p:pic>
+    </p:spTree>
+    <p:extLst>
+      <p:ext uri="{BB962C8B-B14F-4D97-AF65-F5344CB8AC3E}">
+        <p14:creationId xmlns:p14="http://schemas.microsoft.com/office/powerpoint/2010/main" val="1426738055"/>
+      </p:ext>
+    </p:extLst>
+  </p:cSld>
+</p:sld>
+</file>
+
+<file path=ppt/slides/slide15.xml><?xml version="1.0" encoding="utf-8"?>
+<p:sld xmlns:p="http://schemas.openxmlformats.org/presentationml/2006/main">
+  <p:cSld>
+    <p:bg>
+      <p:bgPr>
+        <a:solidFill xmlns:a="http://schemas.openxmlformats.org/drawingml/2006/main">
+          <a:srgbClr val="F6F8F7"/>
+        </a:solidFill>
+      </p:bgPr>
+    </p:bg>
+    <p:spTree>
+      <p:nvGrpSpPr>
+        <p:cNvPr id="1" name=""/>
+        <p:cNvGrpSpPr/>
+        <p:nvPr/>
+      </p:nvGrpSpPr>
+      <p:grpSpPr>
+        <a:xfrm xmlns:a="http://schemas.openxmlformats.org/drawingml/2006/main"/>
+      </p:grpSpPr>
+      <p:sp>
+        <p:nvSpPr>
+          <p:cNvPr id="6" name="">
+            <a:extLst xmlns:a="http://schemas.openxmlformats.org/drawingml/2006/main">
+              <a:ext uri="{FF2B5EF4-FFF2-40B4-BE49-F238E27FC236}">
+                <a16:creationId xmlns:a16="http://schemas.microsoft.com/office/drawing/2014/main" id="{BF00DDF2-2028-440E-BD28-786CB83D4092}"/>
+              </a:ext>
+            </a:extLst>
+          </p:cNvPr>
+          <p:cNvSpPr>
+            <a:spLocks xmlns:a="http://schemas.openxmlformats.org/drawingml/2006/main" noGrp="1"/>
+          </p:cNvSpPr>
+          <p:nvPr/>
+        </p:nvSpPr>
+        <p:spPr>
+          <a:xfrm xmlns:a="http://schemas.openxmlformats.org/drawingml/2006/main">
+            <a:off x="609600" y="428625"/>
+            <a:ext cx="10972800" cy="762000"/>
+          </a:xfrm>
+          <a:prstGeom xmlns:a="http://schemas.openxmlformats.org/drawingml/2006/main" prst="rect">
+            <a:avLst/>
+          </a:prstGeom>
+          <a:noFill xmlns:a="http://schemas.openxmlformats.org/drawingml/2006/main"/>
+          <a:ln xmlns:a="http://schemas.openxmlformats.org/drawingml/2006/main" w="0">
+            <a:noFill/>
+          </a:ln>
+        </p:spPr>
+        <p:txBody>
+          <a:bodyPr xmlns:a="http://schemas.openxmlformats.org/drawingml/2006/main">
+            <a:noAutofit/>
+          </a:bodyPr>
+          <a:lstStyle xmlns:a="http://schemas.openxmlformats.org/drawingml/2006/main"/>
+          <a:p xmlns:a="http://schemas.openxmlformats.org/drawingml/2006/main">
+            <a:pPr>
+              <a:defRPr sz="3450" b="1">
+                <a:solidFill>
+                  <a:srgbClr val="102637"/>
+                </a:solidFill>
+                <a:latin typeface="DejaVu Sans"/>
+                <a:ea typeface="DejaVu Sans"/>
+                <a:cs typeface="DejaVu Sans"/>
+              </a:defRPr>
+            </a:pPr>
+            <a:r>
+              <a:rPr sz="3450" b="1">
+                <a:solidFill>
+                  <a:srgbClr val="102637"/>
+                </a:solidFill>
+                <a:latin typeface="DejaVu Sans"/>
+                <a:ea typeface="DejaVu Sans"/>
+                <a:cs typeface="DejaVu Sans"/>
+              </a:rPr>
+              <a:t>Chest cooler team CAD archive</a:t>
+            </a:r>
+          </a:p>
+        </p:txBody>
+      </p:sp>
+      <p:sp>
+        <p:nvSpPr>
+          <p:cNvPr id="2" name="">
+            <a:extLst xmlns:a="http://schemas.openxmlformats.org/drawingml/2006/main">
+              <a:ext uri="{FF2B5EF4-FFF2-40B4-BE49-F238E27FC236}">
+                <a16:creationId xmlns:a16="http://schemas.microsoft.com/office/drawing/2014/main" id="{16699492-5719-42A6-B432-0843A077D4D4}"/>
+              </a:ext>
+            </a:extLst>
+          </p:cNvPr>
+          <p:cNvSpPr>
+            <a:spLocks xmlns:a="http://schemas.openxmlformats.org/drawingml/2006/main" noGrp="1"/>
+          </p:cNvSpPr>
+          <p:nvPr/>
+        </p:nvSpPr>
+        <p:spPr>
+          <a:xfrm xmlns:a="http://schemas.openxmlformats.org/drawingml/2006/main">
+            <a:off x="609600" y="1190625"/>
+            <a:ext cx="10972800" cy="400050"/>
+          </a:xfrm>
+          <a:prstGeom xmlns:a="http://schemas.openxmlformats.org/drawingml/2006/main" prst="rect">
+            <a:avLst/>
+          </a:prstGeom>
+          <a:noFill xmlns:a="http://schemas.openxmlformats.org/drawingml/2006/main"/>
+          <a:ln xmlns:a="http://schemas.openxmlformats.org/drawingml/2006/main" w="0">
+            <a:noFill/>
+          </a:ln>
+        </p:spPr>
+        <p:txBody>
+          <a:bodyPr xmlns:a="http://schemas.openxmlformats.org/drawingml/2006/main">
+            <a:noAutofit/>
+          </a:bodyPr>
+          <a:lstStyle xmlns:a="http://schemas.openxmlformats.org/drawingml/2006/main"/>
+          <a:p xmlns:a="http://schemas.openxmlformats.org/drawingml/2006/main">
+            <a:pPr>
+              <a:defRPr sz="1650" b="0">
+                <a:solidFill>
+                  <a:srgbClr val="147F80"/>
+                </a:solidFill>
+                <a:latin typeface="DejaVu Sans"/>
+                <a:ea typeface="DejaVu Sans"/>
+                <a:cs typeface="DejaVu Sans"/>
+              </a:defRPr>
+            </a:pPr>
+            <a:r>
+              <a:rPr sz="1650" b="0">
+                <a:solidFill>
+                  <a:srgbClr val="147F80"/>
+                </a:solidFill>
+                <a:latin typeface="DejaVu Sans"/>
+                <a:ea typeface="DejaVu Sans"/>
+                <a:cs typeface="DejaVu Sans"/>
+              </a:rPr>
+              <a:t>Shared assembly context</a:t>
+            </a:r>
+          </a:p>
+        </p:txBody>
+      </p:sp>
+      <p:pic>
+        <p:nvPicPr>
+          <p:cNvPr id="8" name=""/>
+          <p:cNvPicPr>
+            <a:picLocks xmlns:a="http://schemas.openxmlformats.org/drawingml/2006/main" noChangeAspect="1"/>
+          </p:cNvPicPr>
+          <p:nvPr/>
+        </p:nvPicPr>
+        <p:blipFill>
+          <a:blip xmlns:r="http://schemas.openxmlformats.org/officeDocument/2006/relationships" xmlns:a="http://schemas.openxmlformats.org/drawingml/2006/main" r:embed="R58ad1145a7cd4008"/>
+          <a:stretch xmlns:a="http://schemas.openxmlformats.org/drawingml/2006/main"/>
+        </p:blipFill>
+        <p:spPr>
+          <a:xfrm xmlns:a="http://schemas.openxmlformats.org/drawingml/2006/main">
+            <a:off x="751417" y="1838325"/>
+            <a:ext cx="4936067" cy="4038600"/>
+          </a:xfrm>
+          <a:prstGeom xmlns:a="http://schemas.openxmlformats.org/drawingml/2006/main" prst="rect">
+            <a:avLst/>
+          </a:prstGeom>
+        </p:spPr>
+      </p:pic>
+      <p:pic>
+        <p:nvPicPr>
+          <p:cNvPr id="9" name=""/>
+          <p:cNvPicPr>
+            <a:picLocks xmlns:a="http://schemas.openxmlformats.org/drawingml/2006/main" noChangeAspect="1"/>
+          </p:cNvPicPr>
+          <p:nvPr/>
+        </p:nvPicPr>
+        <p:blipFill>
+          <a:blip xmlns:r="http://schemas.openxmlformats.org/officeDocument/2006/relationships" xmlns:a="http://schemas.openxmlformats.org/drawingml/2006/main" r:embed="R9f953133eebe4d2c"/>
+          <a:stretch xmlns:a="http://schemas.openxmlformats.org/drawingml/2006/main"/>
+        </p:blipFill>
+        <p:spPr>
+          <a:xfrm xmlns:a="http://schemas.openxmlformats.org/drawingml/2006/main">
+            <a:off x="6504517" y="1838325"/>
+            <a:ext cx="4936067" cy="4038600"/>
+          </a:xfrm>
+          <a:prstGeom xmlns:a="http://schemas.openxmlformats.org/drawingml/2006/main" prst="rect">
+            <a:avLst/>
+          </a:prstGeom>
+        </p:spPr>
+      </p:pic>
+      <p:sp>
+        <p:nvSpPr>
+          <p:cNvPr id="5" name="">
+            <a:extLst xmlns:a="http://schemas.openxmlformats.org/drawingml/2006/main">
+              <a:ext uri="{FF2B5EF4-FFF2-40B4-BE49-F238E27FC236}">
+                <a16:creationId xmlns:a16="http://schemas.microsoft.com/office/drawing/2014/main" id="{46DC0E15-FE7D-4D10-8FD1-E6652EF12BC1}"/>
+              </a:ext>
+            </a:extLst>
+          </p:cNvPr>
+          <p:cNvSpPr>
+            <a:spLocks xmlns:a="http://schemas.openxmlformats.org/drawingml/2006/main" noGrp="1"/>
+          </p:cNvSpPr>
+          <p:nvPr/>
+        </p:nvSpPr>
+        <p:spPr>
+          <a:xfrm xmlns:a="http://schemas.openxmlformats.org/drawingml/2006/main">
+            <a:off x="609600" y="6153150"/>
+            <a:ext cx="10972800" cy="419100"/>
+          </a:xfrm>
+          <a:prstGeom xmlns:a="http://schemas.openxmlformats.org/drawingml/2006/main" prst="rect">
+            <a:avLst/>
+          </a:prstGeom>
+          <a:noFill xmlns:a="http://schemas.openxmlformats.org/drawingml/2006/main"/>
+          <a:ln xmlns:a="http://schemas.openxmlformats.org/drawingml/2006/main" w="0">
+            <a:noFill/>
+          </a:ln>
+        </p:spPr>
+        <p:txBody>
+          <a:bodyPr xmlns:a="http://schemas.openxmlformats.org/drawingml/2006/main">
+            <a:noAutofit/>
+          </a:bodyPr>
+          <a:lstStyle xmlns:a="http://schemas.openxmlformats.org/drawingml/2006/main"/>
+          <a:p xmlns:a="http://schemas.openxmlformats.org/drawingml/2006/main">
+            <a:pPr>
+              <a:defRPr sz="1650" b="0">
+                <a:solidFill>
+                  <a:srgbClr val="4C626E"/>
+                </a:solidFill>
+                <a:latin typeface="DejaVu Sans"/>
+                <a:ea typeface="DejaVu Sans"/>
+                <a:cs typeface="DejaVu Sans"/>
+              </a:defRPr>
+            </a:pPr>
+            <a:r>
+              <a:rPr sz="1650" b="0">
+                <a:solidFill>
+                  <a:srgbClr val="4C626E"/>
+                </a:solidFill>
+                <a:latin typeface="DejaVu Sans"/>
+                <a:ea typeface="DejaVu Sans"/>
+                <a:cs typeface="DejaVu Sans"/>
+              </a:rPr>
+              <a:t>Team assembly geometry. My specific contribution still needs documentation.</a:t>
+            </a:r>
+          </a:p>
+        </p:txBody>
+      </p:sp>
+    </p:spTree>
+    <p:extLst>
+      <p:ext uri="{BB962C8B-B14F-4D97-AF65-F5344CB8AC3E}">
+        <p14:creationId xmlns:p14="http://schemas.microsoft.com/office/powerpoint/2010/main" val="265649072"/>
+      </p:ext>
+    </p:extLst>
+  </p:cSld>
+</p:sld>
+</file>
+
+<file path=ppt/slides/slide16.xml><?xml version="1.0" encoding="utf-8"?>
 <p:sld xmlns:p="http://schemas.openxmlformats.org/presentationml/2006/main">
   <p:cSld>
     <p:bg>
@@ -3747,6 +6591,7 @@
           <a:lstStyle xmlns:a="http://schemas.openxmlformats.org/drawingml/2006/main"/>
           <a:p xmlns:a="http://schemas.openxmlformats.org/drawingml/2006/main">
             <a:pPr>
+              <a:buNone/>
               <a:defRPr sz="3900" b="1">
                 <a:solidFill>
                   <a:srgbClr val="FFFFFF"/>
@@ -3804,6 +6649,7 @@
           <a:lstStyle xmlns:a="http://schemas.openxmlformats.org/drawingml/2006/main"/>
           <a:p xmlns:a="http://schemas.openxmlformats.org/drawingml/2006/main">
             <a:pPr>
+              <a:buNone/>
               <a:defRPr sz="2850" b="0">
                 <a:solidFill>
                   <a:srgbClr val="DEE7EA"/>
@@ -3827,6 +6673,7 @@
           </a:p>
           <a:p xmlns:a="http://schemas.openxmlformats.org/drawingml/2006/main">
             <a:pPr>
+              <a:buNone/>
               <a:defRPr sz="2850" b="0">
                 <a:solidFill>
                   <a:srgbClr val="DEE7EA"/>
@@ -3884,6 +6731,7 @@
           <a:lstStyle xmlns:a="http://schemas.openxmlformats.org/drawingml/2006/main"/>
           <a:p xmlns:a="http://schemas.openxmlformats.org/drawingml/2006/main">
             <a:pPr>
+              <a:buNone/>
               <a:defRPr sz="2100" b="0">
                 <a:solidFill>
                   <a:srgbClr val="B9C9D0"/>
@@ -3907,6 +6755,7 @@
           </a:p>
           <a:p xmlns:a="http://schemas.openxmlformats.org/drawingml/2006/main">
             <a:pPr>
+              <a:buNone/>
               <a:defRPr sz="2100" b="0">
                 <a:solidFill>
                   <a:srgbClr val="B9C9D0"/>
@@ -3930,6 +6779,7 @@
           </a:p>
           <a:p xmlns:a="http://schemas.openxmlformats.org/drawingml/2006/main">
             <a:pPr>
+              <a:buNone/>
               <a:defRPr sz="2100" b="0">
                 <a:solidFill>
                   <a:srgbClr val="B9C9D0"/>
@@ -3987,6 +6837,7 @@
           <a:lstStyle xmlns:a="http://schemas.openxmlformats.org/drawingml/2006/main"/>
           <a:p xmlns:a="http://schemas.openxmlformats.org/drawingml/2006/main">
             <a:pPr>
+              <a:buNone/>
               <a:defRPr sz="1800" b="0">
                 <a:solidFill>
                   <a:srgbClr val="7BC8C3"/>
@@ -4010,6 +6861,7 @@
           </a:p>
           <a:p xmlns:a="http://schemas.openxmlformats.org/drawingml/2006/main">
             <a:pPr>
+              <a:buNone/>
               <a:defRPr sz="1800" b="0">
                 <a:solidFill>
                   <a:srgbClr val="7BC8C3"/>
@@ -4062,6 +6914,156 @@
       <p:grpSpPr>
         <a:xfrm xmlns:a="http://schemas.openxmlformats.org/drawingml/2006/main"/>
       </p:grpSpPr>
+      <p:cxnSp>
+        <p:nvCxnSpPr>
+          <p:cNvPr id="24" name=""/>
+          <p:cNvCxnSpPr>
+            <a:stCxn xmlns:a="http://schemas.openxmlformats.org/drawingml/2006/main" id="13" idx="3"/>
+            <a:endCxn xmlns:a="http://schemas.openxmlformats.org/drawingml/2006/main" id="16" idx="1"/>
+          </p:cNvCxnSpPr>
+          <p:nvPr/>
+        </p:nvCxnSpPr>
+        <p:spPr>
+          <a:xfrm xmlns:a="http://schemas.openxmlformats.org/drawingml/2006/main">
+            <a:off x="7105650" y="3962400"/>
+            <a:ext cx="1352550" cy="0"/>
+          </a:xfrm>
+          <a:prstGeom xmlns:a="http://schemas.openxmlformats.org/drawingml/2006/main" prst="straightConnector1">
+            <a:avLst/>
+          </a:prstGeom>
+          <a:ln xmlns:a="http://schemas.openxmlformats.org/drawingml/2006/main" w="19050">
+            <a:solidFill>
+              <a:srgbClr val="147F80"/>
+            </a:solidFill>
+            <a:tailEnd type="triangle" w="sm" len="sm"/>
+          </a:ln>
+        </p:spPr>
+      </p:cxnSp>
+      <p:cxnSp>
+        <p:nvCxnSpPr>
+          <p:cNvPr id="25" name=""/>
+          <p:cNvCxnSpPr>
+            <a:stCxn xmlns:a="http://schemas.openxmlformats.org/drawingml/2006/main" id="15" idx="0"/>
+            <a:endCxn xmlns:a="http://schemas.openxmlformats.org/drawingml/2006/main" id="13" idx="2"/>
+          </p:cNvCxnSpPr>
+          <p:nvPr/>
+        </p:nvCxnSpPr>
+        <p:spPr>
+          <a:xfrm xmlns:a="http://schemas.openxmlformats.org/drawingml/2006/main" flipV="1">
+            <a:off x="5619750" y="4371975"/>
+            <a:ext cx="0" cy="762000"/>
+          </a:xfrm>
+          <a:prstGeom xmlns:a="http://schemas.openxmlformats.org/drawingml/2006/main" prst="straightConnector1">
+            <a:avLst/>
+          </a:prstGeom>
+          <a:ln xmlns:a="http://schemas.openxmlformats.org/drawingml/2006/main" w="19050">
+            <a:solidFill>
+              <a:srgbClr val="147F80"/>
+            </a:solidFill>
+            <a:tailEnd type="triangle" w="sm" len="sm"/>
+          </a:ln>
+        </p:spPr>
+      </p:cxnSp>
+      <p:cxnSp>
+        <p:nvCxnSpPr>
+          <p:cNvPr id="26" name=""/>
+          <p:cNvCxnSpPr>
+            <a:stCxn xmlns:a="http://schemas.openxmlformats.org/drawingml/2006/main" id="14" idx="3"/>
+            <a:endCxn xmlns:a="http://schemas.openxmlformats.org/drawingml/2006/main" id="15" idx="1"/>
+          </p:cNvCxnSpPr>
+          <p:nvPr/>
+        </p:nvCxnSpPr>
+        <p:spPr>
+          <a:xfrm xmlns:a="http://schemas.openxmlformats.org/drawingml/2006/main">
+            <a:off x="3467100" y="5543550"/>
+            <a:ext cx="666750" cy="0"/>
+          </a:xfrm>
+          <a:prstGeom xmlns:a="http://schemas.openxmlformats.org/drawingml/2006/main" prst="straightConnector1">
+            <a:avLst/>
+          </a:prstGeom>
+          <a:ln xmlns:a="http://schemas.openxmlformats.org/drawingml/2006/main" w="19050">
+            <a:solidFill>
+              <a:srgbClr val="147F80"/>
+            </a:solidFill>
+            <a:tailEnd type="triangle" w="sm" len="sm"/>
+          </a:ln>
+        </p:spPr>
+      </p:cxnSp>
+      <p:cxnSp>
+        <p:nvCxnSpPr>
+          <p:cNvPr id="27" name=""/>
+          <p:cNvCxnSpPr>
+            <a:stCxn xmlns:a="http://schemas.openxmlformats.org/drawingml/2006/main" id="12" idx="3"/>
+            <a:endCxn xmlns:a="http://schemas.openxmlformats.org/drawingml/2006/main" id="13" idx="1"/>
+          </p:cNvCxnSpPr>
+          <p:nvPr/>
+        </p:nvCxnSpPr>
+        <p:spPr>
+          <a:xfrm xmlns:a="http://schemas.openxmlformats.org/drawingml/2006/main">
+            <a:off x="3467100" y="3962400"/>
+            <a:ext cx="666750" cy="0"/>
+          </a:xfrm>
+          <a:prstGeom xmlns:a="http://schemas.openxmlformats.org/drawingml/2006/main" prst="straightConnector1">
+            <a:avLst/>
+          </a:prstGeom>
+          <a:ln xmlns:a="http://schemas.openxmlformats.org/drawingml/2006/main" w="19050">
+            <a:solidFill>
+              <a:srgbClr val="147F80"/>
+            </a:solidFill>
+            <a:tailEnd type="triangle" w="sm" len="sm"/>
+          </a:ln>
+        </p:spPr>
+      </p:cxnSp>
+      <p:cxnSp>
+        <p:nvCxnSpPr>
+          <p:cNvPr id="28" name=""/>
+          <p:cNvCxnSpPr>
+            <a:stCxn xmlns:a="http://schemas.openxmlformats.org/drawingml/2006/main" id="11" idx="2"/>
+            <a:endCxn xmlns:a="http://schemas.openxmlformats.org/drawingml/2006/main" id="13" idx="0"/>
+          </p:cNvCxnSpPr>
+          <p:nvPr/>
+        </p:nvCxnSpPr>
+        <p:spPr>
+          <a:xfrm xmlns:a="http://schemas.openxmlformats.org/drawingml/2006/main">
+            <a:off x="5619750" y="2790825"/>
+            <a:ext cx="0" cy="762000"/>
+          </a:xfrm>
+          <a:prstGeom xmlns:a="http://schemas.openxmlformats.org/drawingml/2006/main" prst="straightConnector1">
+            <a:avLst/>
+          </a:prstGeom>
+          <a:ln xmlns:a="http://schemas.openxmlformats.org/drawingml/2006/main" w="19050">
+            <a:solidFill>
+              <a:srgbClr val="147F80"/>
+            </a:solidFill>
+            <a:tailEnd type="triangle" w="sm" len="sm"/>
+          </a:ln>
+        </p:spPr>
+      </p:cxnSp>
+      <p:cxnSp>
+        <p:nvCxnSpPr>
+          <p:cNvPr id="29" name=""/>
+          <p:cNvCxnSpPr>
+            <a:stCxn xmlns:a="http://schemas.openxmlformats.org/drawingml/2006/main" id="10" idx="3"/>
+            <a:endCxn xmlns:a="http://schemas.openxmlformats.org/drawingml/2006/main" id="11" idx="1"/>
+          </p:cNvCxnSpPr>
+          <p:nvPr/>
+        </p:nvCxnSpPr>
+        <p:spPr>
+          <a:xfrm xmlns:a="http://schemas.openxmlformats.org/drawingml/2006/main">
+            <a:off x="3467100" y="2381250"/>
+            <a:ext cx="666750" cy="0"/>
+          </a:xfrm>
+          <a:prstGeom xmlns:a="http://schemas.openxmlformats.org/drawingml/2006/main" prst="straightConnector1">
+            <a:avLst/>
+          </a:prstGeom>
+          <a:ln xmlns:a="http://schemas.openxmlformats.org/drawingml/2006/main" w="19050">
+            <a:solidFill>
+              <a:srgbClr val="147F80"/>
+            </a:solidFill>
+            <a:tailEnd type="triangle" w="sm" len="sm"/>
+          </a:ln>
+        </p:spPr>
+      </p:cxnSp>
       <p:sp>
         <p:nvSpPr>
           <p:cNvPr id="9" name="Chess move tracking camera">
@@ -4096,6 +7098,7 @@
           <a:lstStyle xmlns:a="http://schemas.openxmlformats.org/drawingml/2006/main"/>
           <a:p xmlns:a="http://schemas.openxmlformats.org/drawingml/2006/main">
             <a:pPr>
+              <a:buNone/>
               <a:defRPr sz="3450" b="1">
                 <a:solidFill>
                   <a:srgbClr val="102637"/>
@@ -4153,6 +7156,7 @@
           <a:lstStyle xmlns:a="http://schemas.openxmlformats.org/drawingml/2006/main"/>
           <a:p xmlns:a="http://schemas.openxmlformats.org/drawingml/2006/main">
             <a:pPr>
+              <a:buNone/>
               <a:defRPr sz="1650" b="0">
                 <a:solidFill>
                   <a:srgbClr val="147F80"/>
@@ -4178,22 +7182,449 @@
       </p:sp>
       <p:sp>
         <p:nvSpPr>
-          <p:cNvPr id="3" name="Visual changes + known board state">
-            <a:extLst xmlns:a="http://schemas.openxmlformats.org/drawingml/2006/main">
-              <a:ext uri="{FF2B5EF4-FFF2-40B4-BE49-F238E27FC236}">
-                <a16:creationId xmlns:a16="http://schemas.microsoft.com/office/drawing/2014/main" id="{6BD421D3-2DFB-45CC-99CA-2C33283017E9}"/>
-              </a:ext>
-            </a:extLst>
-          </p:cNvPr>
-          <p:cNvSpPr>
-            <a:spLocks xmlns:a="http://schemas.openxmlformats.org/drawingml/2006/main" noGrp="1"/>
-          </p:cNvSpPr>
-          <p:nvPr/>
-        </p:nvSpPr>
-        <p:spPr>
-          <a:xfrm xmlns:a="http://schemas.openxmlformats.org/drawingml/2006/main">
-            <a:off x="609600" y="2000250"/>
-            <a:ext cx="10572750" cy="590550"/>
+          <p:cNvPr id="10" name="">
+            <a:extLst xmlns:a="http://schemas.openxmlformats.org/drawingml/2006/main">
+              <a:ext uri="{FF2B5EF4-FFF2-40B4-BE49-F238E27FC236}">
+                <a16:creationId xmlns:a16="http://schemas.microsoft.com/office/drawing/2014/main" id="{008CCBDA-9743-499B-8160-ED34340656D4}"/>
+              </a:ext>
+            </a:extLst>
+          </p:cNvPr>
+          <p:cNvSpPr>
+            <a:spLocks xmlns:a="http://schemas.openxmlformats.org/drawingml/2006/main" noGrp="1"/>
+          </p:cNvSpPr>
+          <p:nvPr/>
+        </p:nvSpPr>
+        <p:spPr>
+          <a:xfrm xmlns:a="http://schemas.openxmlformats.org/drawingml/2006/main">
+            <a:off x="609600" y="1971675"/>
+            <a:ext cx="2857500" cy="819150"/>
+          </a:xfrm>
+          <a:prstGeom xmlns:a="http://schemas.openxmlformats.org/drawingml/2006/main" prst="rect">
+            <a:avLst/>
+          </a:prstGeom>
+          <a:solidFill xmlns:a="http://schemas.openxmlformats.org/drawingml/2006/main">
+            <a:srgbClr val="E5F0EF"/>
+          </a:solidFill>
+          <a:ln xmlns:a="http://schemas.openxmlformats.org/drawingml/2006/main" w="12383">
+            <a:solidFill>
+              <a:srgbClr val="147F80"/>
+            </a:solidFill>
+          </a:ln>
+        </p:spPr>
+        <p:txBody>
+          <a:bodyPr xmlns:a="http://schemas.openxmlformats.org/drawingml/2006/main" lIns="133350" tIns="114300" rIns="133350" bIns="114300" anchor="ctr">
+            <a:noAutofit/>
+          </a:bodyPr>
+          <a:lstStyle xmlns:a="http://schemas.openxmlformats.org/drawingml/2006/main"/>
+          <a:p xmlns:a="http://schemas.openxmlformats.org/drawingml/2006/main">
+            <a:pPr algn="ctr">
+              <a:defRPr sz="1875" b="1">
+                <a:solidFill>
+                  <a:srgbClr val="102637"/>
+                </a:solidFill>
+                <a:latin typeface="DejaVu Sans"/>
+                <a:ea typeface="DejaVu Sans"/>
+                <a:cs typeface="DejaVu Sans"/>
+              </a:defRPr>
+            </a:pPr>
+            <a:r>
+              <a:rPr sz="1875" b="1">
+                <a:solidFill>
+                  <a:srgbClr val="102637"/>
+                </a:solidFill>
+                <a:latin typeface="DejaVu Sans"/>
+                <a:ea typeface="DejaVu Sans"/>
+                <a:cs typeface="DejaVu Sans"/>
+              </a:rPr>
+              <a:t>Camera image</a:t>
+            </a:r>
+          </a:p>
+        </p:txBody>
+      </p:sp>
+      <p:sp>
+        <p:nvSpPr>
+          <p:cNvPr id="11" name="">
+            <a:extLst xmlns:a="http://schemas.openxmlformats.org/drawingml/2006/main">
+              <a:ext uri="{FF2B5EF4-FFF2-40B4-BE49-F238E27FC236}">
+                <a16:creationId xmlns:a16="http://schemas.microsoft.com/office/drawing/2014/main" id="{38D20E7E-2FB0-4BD4-8269-84282EAE07E3}"/>
+              </a:ext>
+            </a:extLst>
+          </p:cNvPr>
+          <p:cNvSpPr>
+            <a:spLocks xmlns:a="http://schemas.openxmlformats.org/drawingml/2006/main" noGrp="1"/>
+          </p:cNvSpPr>
+          <p:nvPr/>
+        </p:nvSpPr>
+        <p:spPr>
+          <a:xfrm xmlns:a="http://schemas.openxmlformats.org/drawingml/2006/main">
+            <a:off x="4133850" y="1971675"/>
+            <a:ext cx="2971800" cy="819150"/>
+          </a:xfrm>
+          <a:prstGeom xmlns:a="http://schemas.openxmlformats.org/drawingml/2006/main" prst="rect">
+            <a:avLst/>
+          </a:prstGeom>
+          <a:solidFill xmlns:a="http://schemas.openxmlformats.org/drawingml/2006/main">
+            <a:srgbClr val="E5F0EF"/>
+          </a:solidFill>
+          <a:ln xmlns:a="http://schemas.openxmlformats.org/drawingml/2006/main" w="12383">
+            <a:solidFill>
+              <a:srgbClr val="147F80"/>
+            </a:solidFill>
+          </a:ln>
+        </p:spPr>
+        <p:txBody>
+          <a:bodyPr xmlns:a="http://schemas.openxmlformats.org/drawingml/2006/main" lIns="133350" tIns="114300" rIns="133350" bIns="114300" anchor="ctr">
+            <a:noAutofit/>
+          </a:bodyPr>
+          <a:lstStyle xmlns:a="http://schemas.openxmlformats.org/drawingml/2006/main"/>
+          <a:p xmlns:a="http://schemas.openxmlformats.org/drawingml/2006/main">
+            <a:pPr algn="ctr">
+              <a:defRPr sz="1875" b="1">
+                <a:solidFill>
+                  <a:srgbClr val="102637"/>
+                </a:solidFill>
+                <a:latin typeface="DejaVu Sans"/>
+                <a:ea typeface="DejaVu Sans"/>
+                <a:cs typeface="DejaVu Sans"/>
+              </a:defRPr>
+            </a:pPr>
+            <a:r>
+              <a:rPr sz="1875" b="1">
+                <a:solidFill>
+                  <a:srgbClr val="102637"/>
+                </a:solidFill>
+                <a:latin typeface="DejaVu Sans"/>
+                <a:ea typeface="DejaVu Sans"/>
+                <a:cs typeface="DejaVu Sans"/>
+              </a:rPr>
+              <a:t>Visual changes</a:t>
+            </a:r>
+          </a:p>
+        </p:txBody>
+      </p:sp>
+      <p:sp>
+        <p:nvSpPr>
+          <p:cNvPr id="12" name="">
+            <a:extLst xmlns:a="http://schemas.openxmlformats.org/drawingml/2006/main">
+              <a:ext uri="{FF2B5EF4-FFF2-40B4-BE49-F238E27FC236}">
+                <a16:creationId xmlns:a16="http://schemas.microsoft.com/office/drawing/2014/main" id="{47F5A9A2-3900-46AC-9DC6-964B7A38E812}"/>
+              </a:ext>
+            </a:extLst>
+          </p:cNvPr>
+          <p:cNvSpPr>
+            <a:spLocks xmlns:a="http://schemas.openxmlformats.org/drawingml/2006/main" noGrp="1"/>
+          </p:cNvSpPr>
+          <p:nvPr/>
+        </p:nvSpPr>
+        <p:spPr>
+          <a:xfrm xmlns:a="http://schemas.openxmlformats.org/drawingml/2006/main">
+            <a:off x="609600" y="3552825"/>
+            <a:ext cx="2857500" cy="819150"/>
+          </a:xfrm>
+          <a:prstGeom xmlns:a="http://schemas.openxmlformats.org/drawingml/2006/main" prst="rect">
+            <a:avLst/>
+          </a:prstGeom>
+          <a:solidFill xmlns:a="http://schemas.openxmlformats.org/drawingml/2006/main">
+            <a:srgbClr val="E5F0EF"/>
+          </a:solidFill>
+          <a:ln xmlns:a="http://schemas.openxmlformats.org/drawingml/2006/main" w="12383">
+            <a:solidFill>
+              <a:srgbClr val="147F80"/>
+            </a:solidFill>
+          </a:ln>
+        </p:spPr>
+        <p:txBody>
+          <a:bodyPr xmlns:a="http://schemas.openxmlformats.org/drawingml/2006/main" lIns="133350" tIns="114300" rIns="133350" bIns="114300" anchor="ctr">
+            <a:noAutofit/>
+          </a:bodyPr>
+          <a:lstStyle xmlns:a="http://schemas.openxmlformats.org/drawingml/2006/main"/>
+          <a:p xmlns:a="http://schemas.openxmlformats.org/drawingml/2006/main">
+            <a:pPr algn="ctr">
+              <a:defRPr sz="1875" b="1">
+                <a:solidFill>
+                  <a:srgbClr val="102637"/>
+                </a:solidFill>
+                <a:latin typeface="DejaVu Sans"/>
+                <a:ea typeface="DejaVu Sans"/>
+                <a:cs typeface="DejaVu Sans"/>
+              </a:defRPr>
+            </a:pPr>
+            <a:r>
+              <a:rPr sz="1875" b="1">
+                <a:solidFill>
+                  <a:srgbClr val="102637"/>
+                </a:solidFill>
+                <a:latin typeface="DejaVu Sans"/>
+                <a:ea typeface="DejaVu Sans"/>
+                <a:cs typeface="DejaVu Sans"/>
+              </a:rPr>
+              <a:t>Square geometry</a:t>
+            </a:r>
+          </a:p>
+        </p:txBody>
+      </p:sp>
+      <p:sp>
+        <p:nvSpPr>
+          <p:cNvPr id="13" name="">
+            <a:extLst xmlns:a="http://schemas.openxmlformats.org/drawingml/2006/main">
+              <a:ext uri="{FF2B5EF4-FFF2-40B4-BE49-F238E27FC236}">
+                <a16:creationId xmlns:a16="http://schemas.microsoft.com/office/drawing/2014/main" id="{AEC78A78-64CE-4358-9142-B5E37DB410A4}"/>
+              </a:ext>
+            </a:extLst>
+          </p:cNvPr>
+          <p:cNvSpPr>
+            <a:spLocks xmlns:a="http://schemas.openxmlformats.org/drawingml/2006/main" noGrp="1"/>
+          </p:cNvSpPr>
+          <p:nvPr/>
+        </p:nvSpPr>
+        <p:spPr>
+          <a:xfrm xmlns:a="http://schemas.openxmlformats.org/drawingml/2006/main">
+            <a:off x="4133850" y="3552825"/>
+            <a:ext cx="2971800" cy="819150"/>
+          </a:xfrm>
+          <a:prstGeom xmlns:a="http://schemas.openxmlformats.org/drawingml/2006/main" prst="rect">
+            <a:avLst/>
+          </a:prstGeom>
+          <a:solidFill xmlns:a="http://schemas.openxmlformats.org/drawingml/2006/main">
+            <a:srgbClr val="E5F0EF"/>
+          </a:solidFill>
+          <a:ln xmlns:a="http://schemas.openxmlformats.org/drawingml/2006/main" w="12383">
+            <a:solidFill>
+              <a:srgbClr val="147F80"/>
+            </a:solidFill>
+          </a:ln>
+        </p:spPr>
+        <p:txBody>
+          <a:bodyPr xmlns:a="http://schemas.openxmlformats.org/drawingml/2006/main" lIns="133350" tIns="114300" rIns="133350" bIns="114300" anchor="ctr">
+            <a:noAutofit/>
+          </a:bodyPr>
+          <a:lstStyle xmlns:a="http://schemas.openxmlformats.org/drawingml/2006/main"/>
+          <a:p xmlns:a="http://schemas.openxmlformats.org/drawingml/2006/main">
+            <a:pPr algn="ctr">
+              <a:defRPr sz="1875" b="1">
+                <a:solidFill>
+                  <a:srgbClr val="102637"/>
+                </a:solidFill>
+                <a:latin typeface="DejaVu Sans"/>
+                <a:ea typeface="DejaVu Sans"/>
+                <a:cs typeface="DejaVu Sans"/>
+              </a:defRPr>
+            </a:pPr>
+            <a:r>
+              <a:rPr sz="1875" b="1">
+                <a:solidFill>
+                  <a:srgbClr val="102637"/>
+                </a:solidFill>
+                <a:latin typeface="DejaVu Sans"/>
+                <a:ea typeface="DejaVu Sans"/>
+                <a:cs typeface="DejaVu Sans"/>
+              </a:rPr>
+              <a:t>Candidate move</a:t>
+            </a:r>
+          </a:p>
+        </p:txBody>
+      </p:sp>
+      <p:sp>
+        <p:nvSpPr>
+          <p:cNvPr id="14" name="">
+            <a:extLst xmlns:a="http://schemas.openxmlformats.org/drawingml/2006/main">
+              <a:ext uri="{FF2B5EF4-FFF2-40B4-BE49-F238E27FC236}">
+                <a16:creationId xmlns:a16="http://schemas.microsoft.com/office/drawing/2014/main" id="{520CF9E6-0131-4F87-8AED-E6A22586DA14}"/>
+              </a:ext>
+            </a:extLst>
+          </p:cNvPr>
+          <p:cNvSpPr>
+            <a:spLocks xmlns:a="http://schemas.openxmlformats.org/drawingml/2006/main" noGrp="1"/>
+          </p:cNvSpPr>
+          <p:nvPr/>
+        </p:nvSpPr>
+        <p:spPr>
+          <a:xfrm xmlns:a="http://schemas.openxmlformats.org/drawingml/2006/main">
+            <a:off x="609600" y="5133975"/>
+            <a:ext cx="2857500" cy="819150"/>
+          </a:xfrm>
+          <a:prstGeom xmlns:a="http://schemas.openxmlformats.org/drawingml/2006/main" prst="rect">
+            <a:avLst/>
+          </a:prstGeom>
+          <a:solidFill xmlns:a="http://schemas.openxmlformats.org/drawingml/2006/main">
+            <a:srgbClr val="E5F0EF"/>
+          </a:solidFill>
+          <a:ln xmlns:a="http://schemas.openxmlformats.org/drawingml/2006/main" w="12383">
+            <a:solidFill>
+              <a:srgbClr val="147F80"/>
+            </a:solidFill>
+          </a:ln>
+        </p:spPr>
+        <p:txBody>
+          <a:bodyPr xmlns:a="http://schemas.openxmlformats.org/drawingml/2006/main" lIns="133350" tIns="114300" rIns="133350" bIns="114300" anchor="ctr">
+            <a:noAutofit/>
+          </a:bodyPr>
+          <a:lstStyle xmlns:a="http://schemas.openxmlformats.org/drawingml/2006/main"/>
+          <a:p xmlns:a="http://schemas.openxmlformats.org/drawingml/2006/main">
+            <a:pPr algn="ctr">
+              <a:defRPr sz="1875" b="1">
+                <a:solidFill>
+                  <a:srgbClr val="102637"/>
+                </a:solidFill>
+                <a:latin typeface="DejaVu Sans"/>
+                <a:ea typeface="DejaVu Sans"/>
+                <a:cs typeface="DejaVu Sans"/>
+              </a:defRPr>
+            </a:pPr>
+            <a:r>
+              <a:rPr sz="1875" b="1">
+                <a:solidFill>
+                  <a:srgbClr val="102637"/>
+                </a:solidFill>
+                <a:latin typeface="DejaVu Sans"/>
+                <a:ea typeface="DejaVu Sans"/>
+                <a:cs typeface="DejaVu Sans"/>
+              </a:rPr>
+              <a:t>Prior board state</a:t>
+            </a:r>
+          </a:p>
+        </p:txBody>
+      </p:sp>
+      <p:sp>
+        <p:nvSpPr>
+          <p:cNvPr id="15" name="">
+            <a:extLst xmlns:a="http://schemas.openxmlformats.org/drawingml/2006/main">
+              <a:ext uri="{FF2B5EF4-FFF2-40B4-BE49-F238E27FC236}">
+                <a16:creationId xmlns:a16="http://schemas.microsoft.com/office/drawing/2014/main" id="{593EE94A-C60D-460C-9349-A667E2FF35BB}"/>
+              </a:ext>
+            </a:extLst>
+          </p:cNvPr>
+          <p:cNvSpPr>
+            <a:spLocks xmlns:a="http://schemas.openxmlformats.org/drawingml/2006/main" noGrp="1"/>
+          </p:cNvSpPr>
+          <p:nvPr/>
+        </p:nvSpPr>
+        <p:spPr>
+          <a:xfrm xmlns:a="http://schemas.openxmlformats.org/drawingml/2006/main">
+            <a:off x="4133850" y="5133975"/>
+            <a:ext cx="2971800" cy="819150"/>
+          </a:xfrm>
+          <a:prstGeom xmlns:a="http://schemas.openxmlformats.org/drawingml/2006/main" prst="rect">
+            <a:avLst/>
+          </a:prstGeom>
+          <a:solidFill xmlns:a="http://schemas.openxmlformats.org/drawingml/2006/main">
+            <a:srgbClr val="E5F0EF"/>
+          </a:solidFill>
+          <a:ln xmlns:a="http://schemas.openxmlformats.org/drawingml/2006/main" w="12383">
+            <a:solidFill>
+              <a:srgbClr val="147F80"/>
+            </a:solidFill>
+          </a:ln>
+        </p:spPr>
+        <p:txBody>
+          <a:bodyPr xmlns:a="http://schemas.openxmlformats.org/drawingml/2006/main" lIns="133350" tIns="114300" rIns="133350" bIns="114300" anchor="ctr">
+            <a:noAutofit/>
+          </a:bodyPr>
+          <a:lstStyle xmlns:a="http://schemas.openxmlformats.org/drawingml/2006/main"/>
+          <a:p xmlns:a="http://schemas.openxmlformats.org/drawingml/2006/main">
+            <a:pPr algn="ctr">
+              <a:defRPr sz="1875" b="1">
+                <a:solidFill>
+                  <a:srgbClr val="102637"/>
+                </a:solidFill>
+                <a:latin typeface="DejaVu Sans"/>
+                <a:ea typeface="DejaVu Sans"/>
+                <a:cs typeface="DejaVu Sans"/>
+              </a:defRPr>
+            </a:pPr>
+            <a:r>
+              <a:rPr sz="1875" b="1">
+                <a:solidFill>
+                  <a:srgbClr val="102637"/>
+                </a:solidFill>
+                <a:latin typeface="DejaVu Sans"/>
+                <a:ea typeface="DejaVu Sans"/>
+                <a:cs typeface="DejaVu Sans"/>
+              </a:rPr>
+              <a:t>Chess constraints</a:t>
+            </a:r>
+          </a:p>
+        </p:txBody>
+      </p:sp>
+      <p:sp>
+        <p:nvSpPr>
+          <p:cNvPr id="16" name="">
+            <a:extLst xmlns:a="http://schemas.openxmlformats.org/drawingml/2006/main">
+              <a:ext uri="{FF2B5EF4-FFF2-40B4-BE49-F238E27FC236}">
+                <a16:creationId xmlns:a16="http://schemas.microsoft.com/office/drawing/2014/main" id="{97ED43CF-3689-498F-9F89-08D52E34EE23}"/>
+              </a:ext>
+            </a:extLst>
+          </p:cNvPr>
+          <p:cNvSpPr>
+            <a:spLocks xmlns:a="http://schemas.openxmlformats.org/drawingml/2006/main" noGrp="1"/>
+          </p:cNvSpPr>
+          <p:nvPr/>
+        </p:nvSpPr>
+        <p:spPr>
+          <a:xfrm xmlns:a="http://schemas.openxmlformats.org/drawingml/2006/main">
+            <a:off x="8458200" y="3552825"/>
+            <a:ext cx="3124200" cy="819150"/>
+          </a:xfrm>
+          <a:prstGeom xmlns:a="http://schemas.openxmlformats.org/drawingml/2006/main" prst="rect">
+            <a:avLst/>
+          </a:prstGeom>
+          <a:solidFill xmlns:a="http://schemas.openxmlformats.org/drawingml/2006/main">
+            <a:srgbClr val="E5F0EF"/>
+          </a:solidFill>
+          <a:ln xmlns:a="http://schemas.openxmlformats.org/drawingml/2006/main" w="12383">
+            <a:solidFill>
+              <a:srgbClr val="147F80"/>
+            </a:solidFill>
+          </a:ln>
+        </p:spPr>
+        <p:txBody>
+          <a:bodyPr xmlns:a="http://schemas.openxmlformats.org/drawingml/2006/main" lIns="133350" tIns="114300" rIns="133350" bIns="114300" anchor="ctr">
+            <a:noAutofit/>
+          </a:bodyPr>
+          <a:lstStyle xmlns:a="http://schemas.openxmlformats.org/drawingml/2006/main"/>
+          <a:p xmlns:a="http://schemas.openxmlformats.org/drawingml/2006/main">
+            <a:pPr algn="ctr">
+              <a:defRPr sz="1875" b="1">
+                <a:solidFill>
+                  <a:srgbClr val="102637"/>
+                </a:solidFill>
+                <a:latin typeface="DejaVu Sans"/>
+                <a:ea typeface="DejaVu Sans"/>
+                <a:cs typeface="DejaVu Sans"/>
+              </a:defRPr>
+            </a:pPr>
+            <a:r>
+              <a:rPr sz="1875" b="1">
+                <a:solidFill>
+                  <a:srgbClr val="102637"/>
+                </a:solidFill>
+                <a:latin typeface="DejaVu Sans"/>
+                <a:ea typeface="DejaVu Sans"/>
+                <a:cs typeface="DejaVu Sans"/>
+              </a:rPr>
+              <a:t>Recorded move</a:t>
+            </a:r>
+          </a:p>
+        </p:txBody>
+      </p:sp>
+      <p:sp>
+        <p:nvSpPr>
+          <p:cNvPr id="23" name="">
+            <a:extLst xmlns:a="http://schemas.openxmlformats.org/drawingml/2006/main">
+              <a:ext uri="{FF2B5EF4-FFF2-40B4-BE49-F238E27FC236}">
+                <a16:creationId xmlns:a16="http://schemas.microsoft.com/office/drawing/2014/main" id="{DDD2D8EB-E794-4E2F-BB3A-737F16536896}"/>
+              </a:ext>
+            </a:extLst>
+          </p:cNvPr>
+          <p:cNvSpPr>
+            <a:spLocks xmlns:a="http://schemas.openxmlformats.org/drawingml/2006/main" noGrp="1"/>
+          </p:cNvSpPr>
+          <p:nvPr/>
+        </p:nvSpPr>
+        <p:spPr>
+          <a:xfrm xmlns:a="http://schemas.openxmlformats.org/drawingml/2006/main">
+            <a:off x="609600" y="6296025"/>
+            <a:ext cx="10972800" cy="285750"/>
           </a:xfrm>
           <a:prstGeom xmlns:a="http://schemas.openxmlformats.org/drawingml/2006/main" prst="rect">
             <a:avLst/>
@@ -4210,9 +7641,9 @@
           <a:lstStyle xmlns:a="http://schemas.openxmlformats.org/drawingml/2006/main"/>
           <a:p xmlns:a="http://schemas.openxmlformats.org/drawingml/2006/main">
             <a:pPr>
-              <a:defRPr sz="3000" b="1">
-                <a:solidFill>
-                  <a:srgbClr val="102637"/>
+              <a:defRPr sz="1500" b="0">
+                <a:solidFill>
+                  <a:srgbClr val="4C626E"/>
                 </a:solidFill>
                 <a:latin typeface="DejaVu Sans"/>
                 <a:ea typeface="DejaVu Sans"/>
@@ -4220,323 +7651,15 @@
               </a:defRPr>
             </a:pPr>
             <a:r>
-              <a:rPr sz="3000" b="1">
-                <a:solidFill>
-                  <a:srgbClr val="102637"/>
+              <a:rPr sz="1500" b="0">
+                <a:solidFill>
+                  <a:srgbClr val="4C626E"/>
                 </a:solidFill>
                 <a:latin typeface="DejaVu Sans"/>
                 <a:ea typeface="DejaVu Sans"/>
                 <a:cs typeface="DejaVu Sans"/>
               </a:rPr>
-              <a:t>Visual changes + known board state</a:t>
-            </a:r>
-          </a:p>
-        </p:txBody>
-      </p:sp>
-      <p:sp>
-        <p:nvSpPr>
-          <p:cNvPr id="4" name="Calibrated square geometry links image locati">
-            <a:extLst xmlns:a="http://schemas.openxmlformats.org/drawingml/2006/main">
-              <a:ext uri="{FF2B5EF4-FFF2-40B4-BE49-F238E27FC236}">
-                <a16:creationId xmlns:a16="http://schemas.microsoft.com/office/drawing/2014/main" id="{1050CDFF-014A-4FF4-9BE1-5213DE31F463}"/>
-              </a:ext>
-            </a:extLst>
-          </p:cNvPr>
-          <p:cNvSpPr>
-            <a:spLocks xmlns:a="http://schemas.openxmlformats.org/drawingml/2006/main" noGrp="1"/>
-          </p:cNvSpPr>
-          <p:nvPr/>
-        </p:nvSpPr>
-        <p:spPr>
-          <a:xfrm xmlns:a="http://schemas.openxmlformats.org/drawingml/2006/main">
-            <a:off x="609600" y="2819400"/>
-            <a:ext cx="10668000" cy="1028700"/>
-          </a:xfrm>
-          <a:prstGeom xmlns:a="http://schemas.openxmlformats.org/drawingml/2006/main" prst="rect">
-            <a:avLst/>
-          </a:prstGeom>
-          <a:noFill xmlns:a="http://schemas.openxmlformats.org/drawingml/2006/main"/>
-          <a:ln xmlns:a="http://schemas.openxmlformats.org/drawingml/2006/main" w="0">
-            <a:noFill/>
-          </a:ln>
-        </p:spPr>
-        <p:txBody>
-          <a:bodyPr xmlns:a="http://schemas.openxmlformats.org/drawingml/2006/main">
-            <a:noAutofit/>
-          </a:bodyPr>
-          <a:lstStyle xmlns:a="http://schemas.openxmlformats.org/drawingml/2006/main"/>
-          <a:p xmlns:a="http://schemas.openxmlformats.org/drawingml/2006/main">
-            <a:pPr>
-              <a:defRPr sz="2175" b="0">
-                <a:solidFill>
-                  <a:srgbClr val="4C626E"/>
-                </a:solidFill>
-                <a:latin typeface="DejaVu Sans"/>
-                <a:ea typeface="DejaVu Sans"/>
-                <a:cs typeface="DejaVu Sans"/>
-              </a:defRPr>
-            </a:pPr>
-            <a:r>
-              <a:rPr sz="2175" b="0">
-                <a:solidFill>
-                  <a:srgbClr val="4C626E"/>
-                </a:solidFill>
-                <a:latin typeface="DejaVu Sans"/>
-                <a:ea typeface="DejaVu Sans"/>
-                <a:cs typeface="DejaVu Sans"/>
-              </a:rPr>
-              <a:t>Calibrated square geometry links image locations to the board.</a:t>
-            </a:r>
-          </a:p>
-          <a:p xmlns:a="http://schemas.openxmlformats.org/drawingml/2006/main">
-            <a:pPr>
-              <a:defRPr sz="2175" b="0">
-                <a:solidFill>
-                  <a:srgbClr val="4C626E"/>
-                </a:solidFill>
-                <a:latin typeface="DejaVu Sans"/>
-                <a:ea typeface="DejaVu Sans"/>
-                <a:cs typeface="DejaVu Sans"/>
-              </a:defRPr>
-            </a:pPr>
-            <a:r>
-              <a:rPr sz="2175" b="0">
-                <a:solidFill>
-                  <a:srgbClr val="4C626E"/>
-                </a:solidFill>
-                <a:latin typeface="DejaVu Sans"/>
-                <a:ea typeface="DejaVu Sans"/>
-                <a:cs typeface="DejaVu Sans"/>
-              </a:rPr>
-              <a:t>The previous game state and chess constraints narrow candidate moves.</a:t>
-            </a:r>
-          </a:p>
-        </p:txBody>
-      </p:sp>
-      <p:sp>
-        <p:nvSpPr>
-          <p:cNvPr id="5" name="Testing under disturbances">
-            <a:extLst xmlns:a="http://schemas.openxmlformats.org/drawingml/2006/main">
-              <a:ext uri="{FF2B5EF4-FFF2-40B4-BE49-F238E27FC236}">
-                <a16:creationId xmlns:a16="http://schemas.microsoft.com/office/drawing/2014/main" id="{9E6BDF7A-6720-49A6-B84B-80E7443A8CAF}"/>
-              </a:ext>
-            </a:extLst>
-          </p:cNvPr>
-          <p:cNvSpPr>
-            <a:spLocks xmlns:a="http://schemas.openxmlformats.org/drawingml/2006/main" noGrp="1"/>
-          </p:cNvSpPr>
-          <p:nvPr/>
-        </p:nvSpPr>
-        <p:spPr>
-          <a:xfrm xmlns:a="http://schemas.openxmlformats.org/drawingml/2006/main">
-            <a:off x="609600" y="4314825"/>
-            <a:ext cx="4762500" cy="400050"/>
-          </a:xfrm>
-          <a:prstGeom xmlns:a="http://schemas.openxmlformats.org/drawingml/2006/main" prst="rect">
-            <a:avLst/>
-          </a:prstGeom>
-          <a:noFill xmlns:a="http://schemas.openxmlformats.org/drawingml/2006/main"/>
-          <a:ln xmlns:a="http://schemas.openxmlformats.org/drawingml/2006/main" w="0">
-            <a:noFill/>
-          </a:ln>
-        </p:spPr>
-        <p:txBody>
-          <a:bodyPr xmlns:a="http://schemas.openxmlformats.org/drawingml/2006/main">
-            <a:noAutofit/>
-          </a:bodyPr>
-          <a:lstStyle xmlns:a="http://schemas.openxmlformats.org/drawingml/2006/main"/>
-          <a:p xmlns:a="http://schemas.openxmlformats.org/drawingml/2006/main">
-            <a:pPr>
-              <a:defRPr sz="2100" b="1">
-                <a:solidFill>
-                  <a:srgbClr val="147F80"/>
-                </a:solidFill>
-                <a:latin typeface="DejaVu Sans"/>
-                <a:ea typeface="DejaVu Sans"/>
-                <a:cs typeface="DejaVu Sans"/>
-              </a:defRPr>
-            </a:pPr>
-            <a:r>
-              <a:rPr sz="2100" b="1">
-                <a:solidFill>
-                  <a:srgbClr val="147F80"/>
-                </a:solidFill>
-                <a:latin typeface="DejaVu Sans"/>
-                <a:ea typeface="DejaVu Sans"/>
-                <a:cs typeface="DejaVu Sans"/>
-              </a:rPr>
-              <a:t>Testing under disturbances</a:t>
-            </a:r>
-          </a:p>
-        </p:txBody>
-      </p:sp>
-      <p:sp>
-        <p:nvSpPr>
-          <p:cNvPr id="6" name="We tested shadows, camera shaking, bumped pie">
-            <a:extLst xmlns:a="http://schemas.openxmlformats.org/drawingml/2006/main">
-              <a:ext uri="{FF2B5EF4-FFF2-40B4-BE49-F238E27FC236}">
-                <a16:creationId xmlns:a16="http://schemas.microsoft.com/office/drawing/2014/main" id="{2AF2DFDA-72C6-43F9-BB08-135FDE1910E1}"/>
-              </a:ext>
-            </a:extLst>
-          </p:cNvPr>
-          <p:cNvSpPr>
-            <a:spLocks xmlns:a="http://schemas.openxmlformats.org/drawingml/2006/main" noGrp="1"/>
-          </p:cNvSpPr>
-          <p:nvPr/>
-        </p:nvSpPr>
-        <p:spPr>
-          <a:xfrm xmlns:a="http://schemas.openxmlformats.org/drawingml/2006/main">
-            <a:off x="609600" y="4800600"/>
-            <a:ext cx="5238750" cy="1000125"/>
-          </a:xfrm>
-          <a:prstGeom xmlns:a="http://schemas.openxmlformats.org/drawingml/2006/main" prst="rect">
-            <a:avLst/>
-          </a:prstGeom>
-          <a:noFill xmlns:a="http://schemas.openxmlformats.org/drawingml/2006/main"/>
-          <a:ln xmlns:a="http://schemas.openxmlformats.org/drawingml/2006/main" w="0">
-            <a:noFill/>
-          </a:ln>
-        </p:spPr>
-        <p:txBody>
-          <a:bodyPr xmlns:a="http://schemas.openxmlformats.org/drawingml/2006/main">
-            <a:noAutofit/>
-          </a:bodyPr>
-          <a:lstStyle xmlns:a="http://schemas.openxmlformats.org/drawingml/2006/main"/>
-          <a:p xmlns:a="http://schemas.openxmlformats.org/drawingml/2006/main">
-            <a:pPr>
-              <a:defRPr sz="1950" b="0">
-                <a:solidFill>
-                  <a:srgbClr val="4C626E"/>
-                </a:solidFill>
-                <a:latin typeface="DejaVu Sans"/>
-                <a:ea typeface="DejaVu Sans"/>
-                <a:cs typeface="DejaVu Sans"/>
-              </a:defRPr>
-            </a:pPr>
-            <a:r>
-              <a:rPr sz="1950" b="0">
-                <a:solidFill>
-                  <a:srgbClr val="4C626E"/>
-                </a:solidFill>
-                <a:latin typeface="DejaVu Sans"/>
-                <a:ea typeface="DejaVu Sans"/>
-                <a:cs typeface="DejaVu Sans"/>
-              </a:rPr>
-              <a:t>We tested shadows, camera shaking, bumped pieces, and imperfect placement.</a:t>
-            </a:r>
-          </a:p>
-        </p:txBody>
-      </p:sp>
-      <p:sp>
-        <p:nvSpPr>
-          <p:cNvPr id="7" name="Next step">
-            <a:extLst xmlns:a="http://schemas.openxmlformats.org/drawingml/2006/main">
-              <a:ext uri="{FF2B5EF4-FFF2-40B4-BE49-F238E27FC236}">
-                <a16:creationId xmlns:a16="http://schemas.microsoft.com/office/drawing/2014/main" id="{EC407C77-4FA5-4A4A-8B60-8F6A2AC868E4}"/>
-              </a:ext>
-            </a:extLst>
-          </p:cNvPr>
-          <p:cNvSpPr>
-            <a:spLocks xmlns:a="http://schemas.openxmlformats.org/drawingml/2006/main" noGrp="1"/>
-          </p:cNvSpPr>
-          <p:nvPr/>
-        </p:nvSpPr>
-        <p:spPr>
-          <a:xfrm xmlns:a="http://schemas.openxmlformats.org/drawingml/2006/main">
-            <a:off x="6667500" y="4314825"/>
-            <a:ext cx="4762500" cy="400050"/>
-          </a:xfrm>
-          <a:prstGeom xmlns:a="http://schemas.openxmlformats.org/drawingml/2006/main" prst="rect">
-            <a:avLst/>
-          </a:prstGeom>
-          <a:noFill xmlns:a="http://schemas.openxmlformats.org/drawingml/2006/main"/>
-          <a:ln xmlns:a="http://schemas.openxmlformats.org/drawingml/2006/main" w="0">
-            <a:noFill/>
-          </a:ln>
-        </p:spPr>
-        <p:txBody>
-          <a:bodyPr xmlns:a="http://schemas.openxmlformats.org/drawingml/2006/main">
-            <a:noAutofit/>
-          </a:bodyPr>
-          <a:lstStyle xmlns:a="http://schemas.openxmlformats.org/drawingml/2006/main"/>
-          <a:p xmlns:a="http://schemas.openxmlformats.org/drawingml/2006/main">
-            <a:pPr>
-              <a:defRPr sz="2100" b="1">
-                <a:solidFill>
-                  <a:srgbClr val="147F80"/>
-                </a:solidFill>
-                <a:latin typeface="DejaVu Sans"/>
-                <a:ea typeface="DejaVu Sans"/>
-                <a:cs typeface="DejaVu Sans"/>
-              </a:defRPr>
-            </a:pPr>
-            <a:r>
-              <a:rPr sz="2100" b="1">
-                <a:solidFill>
-                  <a:srgbClr val="147F80"/>
-                </a:solidFill>
-                <a:latin typeface="DejaVu Sans"/>
-                <a:ea typeface="DejaVu Sans"/>
-                <a:cs typeface="DejaVu Sans"/>
-              </a:rPr>
-              <a:t>Next step</a:t>
-            </a:r>
-          </a:p>
-        </p:txBody>
-      </p:sp>
-      <p:sp>
-        <p:nvSpPr>
-          <p:cNvPr id="8" name="Preserve labeled trials and source code so th">
-            <a:extLst xmlns:a="http://schemas.openxmlformats.org/drawingml/2006/main">
-              <a:ext uri="{FF2B5EF4-FFF2-40B4-BE49-F238E27FC236}">
-                <a16:creationId xmlns:a16="http://schemas.microsoft.com/office/drawing/2014/main" id="{EB00BA69-126E-4EC2-8A15-717312DCA00A}"/>
-              </a:ext>
-            </a:extLst>
-          </p:cNvPr>
-          <p:cNvSpPr>
-            <a:spLocks xmlns:a="http://schemas.openxmlformats.org/drawingml/2006/main" noGrp="1"/>
-          </p:cNvSpPr>
-          <p:nvPr/>
-        </p:nvSpPr>
-        <p:spPr>
-          <a:xfrm xmlns:a="http://schemas.openxmlformats.org/drawingml/2006/main">
-            <a:off x="6667500" y="4800600"/>
-            <a:ext cx="4762500" cy="1000125"/>
-          </a:xfrm>
-          <a:prstGeom xmlns:a="http://schemas.openxmlformats.org/drawingml/2006/main" prst="rect">
-            <a:avLst/>
-          </a:prstGeom>
-          <a:noFill xmlns:a="http://schemas.openxmlformats.org/drawingml/2006/main"/>
-          <a:ln xmlns:a="http://schemas.openxmlformats.org/drawingml/2006/main" w="0">
-            <a:noFill/>
-          </a:ln>
-        </p:spPr>
-        <p:txBody>
-          <a:bodyPr xmlns:a="http://schemas.openxmlformats.org/drawingml/2006/main">
-            <a:noAutofit/>
-          </a:bodyPr>
-          <a:lstStyle xmlns:a="http://schemas.openxmlformats.org/drawingml/2006/main"/>
-          <a:p xmlns:a="http://schemas.openxmlformats.org/drawingml/2006/main">
-            <a:pPr>
-              <a:defRPr sz="1950" b="0">
-                <a:solidFill>
-                  <a:srgbClr val="4C626E"/>
-                </a:solidFill>
-                <a:latin typeface="DejaVu Sans"/>
-                <a:ea typeface="DejaVu Sans"/>
-                <a:cs typeface="DejaVu Sans"/>
-              </a:defRPr>
-            </a:pPr>
-            <a:r>
-              <a:rPr sz="1950" b="0">
-                <a:solidFill>
-                  <a:srgbClr val="4C626E"/>
-                </a:solidFill>
-                <a:latin typeface="DejaVu Sans"/>
-                <a:ea typeface="DejaVu Sans"/>
-                <a:cs typeface="DejaVu Sans"/>
-              </a:rPr>
-              <a:t>Preserve labeled trials and source code so the result can be reproduced.</a:t>
+              <a:t>Conceptual overview based on the project description</a:t>
             </a:r>
           </a:p>
         </p:txBody>
@@ -4604,6 +7727,7 @@
           <a:lstStyle xmlns:a="http://schemas.openxmlformats.org/drawingml/2006/main"/>
           <a:p xmlns:a="http://schemas.openxmlformats.org/drawingml/2006/main">
             <a:pPr>
+              <a:buNone/>
               <a:defRPr sz="3450" b="1">
                 <a:solidFill>
                   <a:srgbClr val="102637"/>
@@ -4661,6 +7785,7 @@
           <a:lstStyle xmlns:a="http://schemas.openxmlformats.org/drawingml/2006/main"/>
           <a:p xmlns:a="http://schemas.openxmlformats.org/drawingml/2006/main">
             <a:pPr>
+              <a:buNone/>
               <a:defRPr sz="1650" b="0">
                 <a:solidFill>
                   <a:srgbClr val="147F80"/>
@@ -4718,6 +7843,7 @@
           <a:lstStyle xmlns:a="http://schemas.openxmlformats.org/drawingml/2006/main"/>
           <a:p xmlns:a="http://schemas.openxmlformats.org/drawingml/2006/main">
             <a:pPr>
+              <a:buNone/>
               <a:defRPr sz="1950" b="1">
                 <a:solidFill>
                   <a:srgbClr val="102637"/>
@@ -4775,6 +7901,7 @@
           <a:lstStyle xmlns:a="http://schemas.openxmlformats.org/drawingml/2006/main"/>
           <a:p xmlns:a="http://schemas.openxmlformats.org/drawingml/2006/main">
             <a:pPr>
+              <a:buNone/>
               <a:defRPr sz="1800" b="0">
                 <a:solidFill>
                   <a:srgbClr val="4C626E"/>
@@ -4832,6 +7959,7 @@
           <a:lstStyle xmlns:a="http://schemas.openxmlformats.org/drawingml/2006/main"/>
           <a:p xmlns:a="http://schemas.openxmlformats.org/drawingml/2006/main">
             <a:pPr>
+              <a:buNone/>
               <a:defRPr sz="1950" b="1">
                 <a:solidFill>
                   <a:srgbClr val="102637"/>
@@ -4889,6 +8017,7 @@
           <a:lstStyle xmlns:a="http://schemas.openxmlformats.org/drawingml/2006/main"/>
           <a:p xmlns:a="http://schemas.openxmlformats.org/drawingml/2006/main">
             <a:pPr>
+              <a:buNone/>
               <a:defRPr sz="1800" b="0">
                 <a:solidFill>
                   <a:srgbClr val="4C626E"/>
@@ -4946,6 +8075,7 @@
           <a:lstStyle xmlns:a="http://schemas.openxmlformats.org/drawingml/2006/main"/>
           <a:p xmlns:a="http://schemas.openxmlformats.org/drawingml/2006/main">
             <a:pPr>
+              <a:buNone/>
               <a:defRPr sz="1950" b="1">
                 <a:solidFill>
                   <a:srgbClr val="102637"/>
@@ -5003,6 +8133,7 @@
           <a:lstStyle xmlns:a="http://schemas.openxmlformats.org/drawingml/2006/main"/>
           <a:p xmlns:a="http://schemas.openxmlformats.org/drawingml/2006/main">
             <a:pPr>
+              <a:buNone/>
               <a:defRPr sz="1800" b="0">
                 <a:solidFill>
                   <a:srgbClr val="4C626E"/>
@@ -5028,14 +8159,14 @@
       </p:sp>
       <p:pic>
         <p:nvPicPr>
-          <p:cNvPr id="18" name=""/>
+          <p:cNvPr id="20" name=""/>
           <p:cNvPicPr>
             <a:picLocks xmlns:a="http://schemas.openxmlformats.org/drawingml/2006/main" noChangeAspect="1"/>
           </p:cNvPicPr>
           <p:nvPr/>
         </p:nvPicPr>
         <p:blipFill>
-          <a:blip xmlns:r="http://schemas.openxmlformats.org/officeDocument/2006/relationships" xmlns:a="http://schemas.openxmlformats.org/drawingml/2006/main" r:embed="Rc4b054b3ccc84ad2"/>
+          <a:blip xmlns:r="http://schemas.openxmlformats.org/officeDocument/2006/relationships" xmlns:a="http://schemas.openxmlformats.org/drawingml/2006/main" r:embed="R1abc4550f05c48e8"/>
           <a:stretch xmlns:a="http://schemas.openxmlformats.org/drawingml/2006/main"/>
         </p:blipFill>
         <p:spPr>
@@ -5079,10 +8210,10 @@
       </p:grpSpPr>
       <p:sp>
         <p:nvSpPr>
-          <p:cNvPr id="10" name="Environment-adaptive speaker">
-            <a:extLst xmlns:a="http://schemas.openxmlformats.org/drawingml/2006/main">
-              <a:ext uri="{FF2B5EF4-FFF2-40B4-BE49-F238E27FC236}">
-                <a16:creationId xmlns:a16="http://schemas.microsoft.com/office/drawing/2014/main" id="{A00A6290-9F0B-4177-8A31-FC71E253AA20}"/>
+          <p:cNvPr id="11" name="">
+            <a:extLst xmlns:a="http://schemas.openxmlformats.org/drawingml/2006/main">
+              <a:ext uri="{FF2B5EF4-FFF2-40B4-BE49-F238E27FC236}">
+                <a16:creationId xmlns:a16="http://schemas.microsoft.com/office/drawing/2014/main" id="{79DEAADC-2490-4803-B93C-E0404B1E730C}"/>
               </a:ext>
             </a:extLst>
           </p:cNvPr>
@@ -5129,17 +8260,17 @@
                 <a:ea typeface="DejaVu Sans"/>
                 <a:cs typeface="DejaVu Sans"/>
               </a:rPr>
-              <a:t>Environment-adaptive speaker</a:t>
-            </a:r>
-          </a:p>
-        </p:txBody>
-      </p:sp>
-      <p:sp>
-        <p:nvSpPr>
-          <p:cNvPr id="2" name="ECE Makerspace 2026 · Individual design propo">
-            <a:extLst xmlns:a="http://schemas.openxmlformats.org/drawingml/2006/main">
-              <a:ext uri="{FF2B5EF4-FFF2-40B4-BE49-F238E27FC236}">
-                <a16:creationId xmlns:a16="http://schemas.microsoft.com/office/drawing/2014/main" id="{04863FA4-8CB3-4226-BAD5-E19DE632560C}"/>
+              <a:t>Robot build progression</a:t>
+            </a:r>
+          </a:p>
+        </p:txBody>
+      </p:sp>
+      <p:sp>
+        <p:nvSpPr>
+          <p:cNvPr id="2" name="">
+            <a:extLst xmlns:a="http://schemas.openxmlformats.org/drawingml/2006/main">
+              <a:ext uri="{FF2B5EF4-FFF2-40B4-BE49-F238E27FC236}">
+                <a16:creationId xmlns:a16="http://schemas.microsoft.com/office/drawing/2014/main" id="{46AFD20C-CA18-4512-B77F-D8EE8BCD80BE}"/>
               </a:ext>
             </a:extLst>
           </p:cNvPr>
@@ -5186,29 +8317,51 @@
                 <a:ea typeface="DejaVu Sans"/>
                 <a:cs typeface="DejaVu Sans"/>
               </a:rPr>
-              <a:t>ECE Makerspace 2026 · Individual design proposal</a:t>
-            </a:r>
-          </a:p>
-        </p:txBody>
-      </p:sp>
-      <p:sp>
-        <p:nvSpPr>
-          <p:cNvPr id="3" name="Enclosure concept">
-            <a:extLst xmlns:a="http://schemas.openxmlformats.org/drawingml/2006/main">
-              <a:ext uri="{FF2B5EF4-FFF2-40B4-BE49-F238E27FC236}">
-                <a16:creationId xmlns:a16="http://schemas.microsoft.com/office/drawing/2014/main" id="{148D6128-3457-44E7-9921-27255ABBBD6D}"/>
-              </a:ext>
-            </a:extLst>
-          </p:cNvPr>
-          <p:cNvSpPr>
-            <a:spLocks xmlns:a="http://schemas.openxmlformats.org/drawingml/2006/main" noGrp="1"/>
-          </p:cNvSpPr>
-          <p:nvPr/>
-        </p:nvSpPr>
-        <p:spPr>
-          <a:xfrm xmlns:a="http://schemas.openxmlformats.org/drawingml/2006/main">
-            <a:off x="609600" y="1847850"/>
-            <a:ext cx="4362450" cy="361950"/>
+              <a:t>Original build photographs and notebook sketch</a:t>
+            </a:r>
+          </a:p>
+        </p:txBody>
+      </p:sp>
+      <p:pic>
+        <p:nvPicPr>
+          <p:cNvPr id="13" name=""/>
+          <p:cNvPicPr>
+            <a:picLocks xmlns:a="http://schemas.openxmlformats.org/drawingml/2006/main" noChangeAspect="1"/>
+          </p:cNvPicPr>
+          <p:nvPr/>
+        </p:nvPicPr>
+        <p:blipFill>
+          <a:blip xmlns:r="http://schemas.openxmlformats.org/officeDocument/2006/relationships" xmlns:a="http://schemas.openxmlformats.org/drawingml/2006/main" r:embed="Rf0ef64f7e4674e7e"/>
+          <a:stretch xmlns:a="http://schemas.openxmlformats.org/drawingml/2006/main"/>
+        </p:blipFill>
+        <p:spPr>
+          <a:xfrm xmlns:a="http://schemas.openxmlformats.org/drawingml/2006/main">
+            <a:off x="1898650" y="1752600"/>
+            <a:ext cx="2641600" cy="1981200"/>
+          </a:xfrm>
+          <a:prstGeom xmlns:a="http://schemas.openxmlformats.org/drawingml/2006/main" prst="rect">
+            <a:avLst/>
+          </a:prstGeom>
+        </p:spPr>
+      </p:pic>
+      <p:sp>
+        <p:nvSpPr>
+          <p:cNvPr id="4" name="">
+            <a:extLst xmlns:a="http://schemas.openxmlformats.org/drawingml/2006/main">
+              <a:ext uri="{FF2B5EF4-FFF2-40B4-BE49-F238E27FC236}">
+                <a16:creationId xmlns:a16="http://schemas.microsoft.com/office/drawing/2014/main" id="{3460ACDB-3206-434F-821A-EAC885C4F330}"/>
+              </a:ext>
+            </a:extLst>
+          </p:cNvPr>
+          <p:cNvSpPr>
+            <a:spLocks xmlns:a="http://schemas.openxmlformats.org/drawingml/2006/main" noGrp="1"/>
+          </p:cNvSpPr>
+          <p:nvPr/>
+        </p:nvSpPr>
+        <p:spPr>
+          <a:xfrm xmlns:a="http://schemas.openxmlformats.org/drawingml/2006/main">
+            <a:off x="609600" y="3771900"/>
+            <a:ext cx="5219700" cy="323850"/>
           </a:xfrm>
           <a:prstGeom xmlns:a="http://schemas.openxmlformats.org/drawingml/2006/main" prst="rect">
             <a:avLst/>
@@ -5225,9 +8378,9 @@
           <a:lstStyle xmlns:a="http://schemas.openxmlformats.org/drawingml/2006/main"/>
           <a:p xmlns:a="http://schemas.openxmlformats.org/drawingml/2006/main">
             <a:pPr>
-              <a:defRPr sz="1950" b="1">
-                <a:solidFill>
-                  <a:srgbClr val="102637"/>
+              <a:defRPr sz="1500" b="0">
+                <a:solidFill>
+                  <a:srgbClr val="4C626E"/>
                 </a:solidFill>
                 <a:latin typeface="DejaVu Sans"/>
                 <a:ea typeface="DejaVu Sans"/>
@@ -5235,37 +8388,59 @@
               </a:defRPr>
             </a:pPr>
             <a:r>
-              <a:rPr sz="1950" b="1">
-                <a:solidFill>
-                  <a:srgbClr val="102637"/>
+              <a:rPr sz="1500" b="0">
+                <a:solidFill>
+                  <a:srgbClr val="4C626E"/>
                 </a:solidFill>
                 <a:latin typeface="DejaVu Sans"/>
                 <a:ea typeface="DejaVu Sans"/>
                 <a:cs typeface="DejaVu Sans"/>
               </a:rPr>
-              <a:t>Enclosure concept</a:t>
-            </a:r>
-          </a:p>
-        </p:txBody>
-      </p:sp>
-      <p:sp>
-        <p:nvSpPr>
-          <p:cNvPr id="4" name="A 6 × 6 in base and 4.5 in height. Four posts">
-            <a:extLst xmlns:a="http://schemas.openxmlformats.org/drawingml/2006/main">
-              <a:ext uri="{FF2B5EF4-FFF2-40B4-BE49-F238E27FC236}">
-                <a16:creationId xmlns:a16="http://schemas.microsoft.com/office/drawing/2014/main" id="{58B34949-5C6C-4847-999E-6D684C2A436D}"/>
-              </a:ext>
-            </a:extLst>
-          </p:cNvPr>
-          <p:cNvSpPr>
-            <a:spLocks xmlns:a="http://schemas.openxmlformats.org/drawingml/2006/main" noGrp="1"/>
-          </p:cNvSpPr>
-          <p:nvPr/>
-        </p:nvSpPr>
-        <p:spPr>
-          <a:xfrm xmlns:a="http://schemas.openxmlformats.org/drawingml/2006/main">
-            <a:off x="609600" y="2257425"/>
-            <a:ext cx="4362450" cy="1143000"/>
+              <a:t>Chassis and drivetrain</a:t>
+            </a:r>
+          </a:p>
+        </p:txBody>
+      </p:sp>
+      <p:pic>
+        <p:nvPicPr>
+          <p:cNvPr id="15" name=""/>
+          <p:cNvPicPr>
+            <a:picLocks xmlns:a="http://schemas.openxmlformats.org/drawingml/2006/main" noChangeAspect="1"/>
+          </p:cNvPicPr>
+          <p:nvPr/>
+        </p:nvPicPr>
+        <p:blipFill>
+          <a:blip xmlns:r="http://schemas.openxmlformats.org/officeDocument/2006/relationships" xmlns:a="http://schemas.openxmlformats.org/drawingml/2006/main" r:embed="Rb56920b8cb1e47aa"/>
+          <a:stretch xmlns:a="http://schemas.openxmlformats.org/drawingml/2006/main"/>
+        </p:blipFill>
+        <p:spPr>
+          <a:xfrm xmlns:a="http://schemas.openxmlformats.org/drawingml/2006/main">
+            <a:off x="7651750" y="1752600"/>
+            <a:ext cx="2641600" cy="1981200"/>
+          </a:xfrm>
+          <a:prstGeom xmlns:a="http://schemas.openxmlformats.org/drawingml/2006/main" prst="rect">
+            <a:avLst/>
+          </a:prstGeom>
+        </p:spPr>
+      </p:pic>
+      <p:sp>
+        <p:nvSpPr>
+          <p:cNvPr id="6" name="">
+            <a:extLst xmlns:a="http://schemas.openxmlformats.org/drawingml/2006/main">
+              <a:ext uri="{FF2B5EF4-FFF2-40B4-BE49-F238E27FC236}">
+                <a16:creationId xmlns:a16="http://schemas.microsoft.com/office/drawing/2014/main" id="{CC587B9A-8E96-4E01-AD23-1ACBF8037662}"/>
+              </a:ext>
+            </a:extLst>
+          </p:cNvPr>
+          <p:cNvSpPr>
+            <a:spLocks xmlns:a="http://schemas.openxmlformats.org/drawingml/2006/main" noGrp="1"/>
+          </p:cNvSpPr>
+          <p:nvPr/>
+        </p:nvSpPr>
+        <p:spPr>
+          <a:xfrm xmlns:a="http://schemas.openxmlformats.org/drawingml/2006/main">
+            <a:off x="6362700" y="3771900"/>
+            <a:ext cx="5219700" cy="323850"/>
           </a:xfrm>
           <a:prstGeom xmlns:a="http://schemas.openxmlformats.org/drawingml/2006/main" prst="rect">
             <a:avLst/>
@@ -5282,7 +8457,7 @@
           <a:lstStyle xmlns:a="http://schemas.openxmlformats.org/drawingml/2006/main"/>
           <a:p xmlns:a="http://schemas.openxmlformats.org/drawingml/2006/main">
             <a:pPr>
-              <a:defRPr sz="1800" b="0">
+              <a:defRPr sz="1500" b="0">
                 <a:solidFill>
                   <a:srgbClr val="4C626E"/>
                 </a:solidFill>
@@ -5292,7 +8467,7 @@
               </a:defRPr>
             </a:pPr>
             <a:r>
-              <a:rPr sz="1800" b="0">
+              <a:rPr sz="1500" b="0">
                 <a:solidFill>
                   <a:srgbClr val="4C626E"/>
                 </a:solidFill>
@@ -5300,29 +8475,51 @@
                 <a:ea typeface="DejaVu Sans"/>
                 <a:cs typeface="DejaVu Sans"/>
               </a:rPr>
-              <a:t>A 6 × 6 in base and 4.5 in height. Four posts support the truncated pyramid frame.</a:t>
-            </a:r>
-          </a:p>
-        </p:txBody>
-      </p:sp>
-      <p:sp>
-        <p:nvSpPr>
-          <p:cNvPr id="5" name="Adaptive behavior">
-            <a:extLst xmlns:a="http://schemas.openxmlformats.org/drawingml/2006/main">
-              <a:ext uri="{FF2B5EF4-FFF2-40B4-BE49-F238E27FC236}">
-                <a16:creationId xmlns:a16="http://schemas.microsoft.com/office/drawing/2014/main" id="{14814913-25E1-4764-8DDB-EAD4B7982F2E}"/>
-              </a:ext>
-            </a:extLst>
-          </p:cNvPr>
-          <p:cNvSpPr>
-            <a:spLocks xmlns:a="http://schemas.openxmlformats.org/drawingml/2006/main" noGrp="1"/>
-          </p:cNvSpPr>
-          <p:nvPr/>
-        </p:nvSpPr>
-        <p:spPr>
-          <a:xfrm xmlns:a="http://schemas.openxmlformats.org/drawingml/2006/main">
-            <a:off x="609600" y="3371850"/>
-            <a:ext cx="4362450" cy="361950"/>
+              <a:t>Assembly stage</a:t>
+            </a:r>
+          </a:p>
+        </p:txBody>
+      </p:sp>
+      <p:pic>
+        <p:nvPicPr>
+          <p:cNvPr id="17" name=""/>
+          <p:cNvPicPr>
+            <a:picLocks xmlns:a="http://schemas.openxmlformats.org/drawingml/2006/main" noChangeAspect="1"/>
+          </p:cNvPicPr>
+          <p:nvPr/>
+        </p:nvPicPr>
+        <p:blipFill>
+          <a:blip xmlns:r="http://schemas.openxmlformats.org/officeDocument/2006/relationships" xmlns:a="http://schemas.openxmlformats.org/drawingml/2006/main" r:embed="R8b96d3c8fd764f1a"/>
+          <a:stretch xmlns:a="http://schemas.openxmlformats.org/drawingml/2006/main"/>
+        </p:blipFill>
+        <p:spPr>
+          <a:xfrm xmlns:a="http://schemas.openxmlformats.org/drawingml/2006/main">
+            <a:off x="1898650" y="4105275"/>
+            <a:ext cx="2641600" cy="1981200"/>
+          </a:xfrm>
+          <a:prstGeom xmlns:a="http://schemas.openxmlformats.org/drawingml/2006/main" prst="rect">
+            <a:avLst/>
+          </a:prstGeom>
+        </p:spPr>
+      </p:pic>
+      <p:sp>
+        <p:nvSpPr>
+          <p:cNvPr id="8" name="">
+            <a:extLst xmlns:a="http://schemas.openxmlformats.org/drawingml/2006/main">
+              <a:ext uri="{FF2B5EF4-FFF2-40B4-BE49-F238E27FC236}">
+                <a16:creationId xmlns:a16="http://schemas.microsoft.com/office/drawing/2014/main" id="{73A2810D-12A6-4308-8730-8223DD7DF640}"/>
+              </a:ext>
+            </a:extLst>
+          </p:cNvPr>
+          <p:cNvSpPr>
+            <a:spLocks xmlns:a="http://schemas.openxmlformats.org/drawingml/2006/main" noGrp="1"/>
+          </p:cNvSpPr>
+          <p:nvPr/>
+        </p:nvSpPr>
+        <p:spPr>
+          <a:xfrm xmlns:a="http://schemas.openxmlformats.org/drawingml/2006/main">
+            <a:off x="609600" y="6124575"/>
+            <a:ext cx="5219700" cy="323850"/>
           </a:xfrm>
           <a:prstGeom xmlns:a="http://schemas.openxmlformats.org/drawingml/2006/main" prst="rect">
             <a:avLst/>
@@ -5339,9 +8536,9 @@
           <a:lstStyle xmlns:a="http://schemas.openxmlformats.org/drawingml/2006/main"/>
           <a:p xmlns:a="http://schemas.openxmlformats.org/drawingml/2006/main">
             <a:pPr>
-              <a:defRPr sz="1950" b="1">
-                <a:solidFill>
-                  <a:srgbClr val="102637"/>
+              <a:defRPr sz="1500" b="0">
+                <a:solidFill>
+                  <a:srgbClr val="4C626E"/>
                 </a:solidFill>
                 <a:latin typeface="DejaVu Sans"/>
                 <a:ea typeface="DejaVu Sans"/>
@@ -5349,37 +8546,59 @@
               </a:defRPr>
             </a:pPr>
             <a:r>
-              <a:rPr sz="1950" b="1">
-                <a:solidFill>
-                  <a:srgbClr val="102637"/>
+              <a:rPr sz="1500" b="0">
+                <a:solidFill>
+                  <a:srgbClr val="4C626E"/>
                 </a:solidFill>
                 <a:latin typeface="DejaVu Sans"/>
                 <a:ea typeface="DejaVu Sans"/>
                 <a:cs typeface="DejaVu Sans"/>
               </a:rPr>
-              <a:t>Adaptive behavior</a:t>
-            </a:r>
-          </a:p>
-        </p:txBody>
-      </p:sp>
-      <p:sp>
-        <p:nvSpPr>
-          <p:cNvPr id="6" name="Each face would sense nearby obstructions and">
-            <a:extLst xmlns:a="http://schemas.openxmlformats.org/drawingml/2006/main">
-              <a:ext uri="{FF2B5EF4-FFF2-40B4-BE49-F238E27FC236}">
-                <a16:creationId xmlns:a16="http://schemas.microsoft.com/office/drawing/2014/main" id="{F8CBBB7D-843B-403F-9ED7-B69D1D83A4A0}"/>
-              </a:ext>
-            </a:extLst>
-          </p:cNvPr>
-          <p:cNvSpPr>
-            <a:spLocks xmlns:a="http://schemas.openxmlformats.org/drawingml/2006/main" noGrp="1"/>
-          </p:cNvSpPr>
-          <p:nvPr/>
-        </p:nvSpPr>
-        <p:spPr>
-          <a:xfrm xmlns:a="http://schemas.openxmlformats.org/drawingml/2006/main">
-            <a:off x="609600" y="3781425"/>
-            <a:ext cx="4362450" cy="1143000"/>
+              <a:t>Sensor-facing view</a:t>
+            </a:r>
+          </a:p>
+        </p:txBody>
+      </p:sp>
+      <p:pic>
+        <p:nvPicPr>
+          <p:cNvPr id="19" name=""/>
+          <p:cNvPicPr>
+            <a:picLocks xmlns:a="http://schemas.openxmlformats.org/drawingml/2006/main" noChangeAspect="1"/>
+          </p:cNvPicPr>
+          <p:nvPr/>
+        </p:nvPicPr>
+        <p:blipFill>
+          <a:blip xmlns:r="http://schemas.openxmlformats.org/officeDocument/2006/relationships" xmlns:a="http://schemas.openxmlformats.org/drawingml/2006/main" r:embed="R228fcf2717cb4018"/>
+          <a:stretch xmlns:a="http://schemas.openxmlformats.org/drawingml/2006/main"/>
+        </p:blipFill>
+        <p:spPr>
+          <a:xfrm xmlns:a="http://schemas.openxmlformats.org/drawingml/2006/main">
+            <a:off x="7223146" y="4105275"/>
+            <a:ext cx="3498808" cy="1981200"/>
+          </a:xfrm>
+          <a:prstGeom xmlns:a="http://schemas.openxmlformats.org/drawingml/2006/main" prst="rect">
+            <a:avLst/>
+          </a:prstGeom>
+        </p:spPr>
+      </p:pic>
+      <p:sp>
+        <p:nvSpPr>
+          <p:cNvPr id="10" name="">
+            <a:extLst xmlns:a="http://schemas.openxmlformats.org/drawingml/2006/main">
+              <a:ext uri="{FF2B5EF4-FFF2-40B4-BE49-F238E27FC236}">
+                <a16:creationId xmlns:a16="http://schemas.microsoft.com/office/drawing/2014/main" id="{080FA109-5E3F-44E5-AF92-D45F87D7C114}"/>
+              </a:ext>
+            </a:extLst>
+          </p:cNvPr>
+          <p:cNvSpPr>
+            <a:spLocks xmlns:a="http://schemas.openxmlformats.org/drawingml/2006/main" noGrp="1"/>
+          </p:cNvSpPr>
+          <p:nvPr/>
+        </p:nvSpPr>
+        <p:spPr>
+          <a:xfrm xmlns:a="http://schemas.openxmlformats.org/drawingml/2006/main">
+            <a:off x="6362700" y="6124575"/>
+            <a:ext cx="5219700" cy="323850"/>
           </a:xfrm>
           <a:prstGeom xmlns:a="http://schemas.openxmlformats.org/drawingml/2006/main" prst="rect">
             <a:avLst/>
@@ -5396,7 +8615,7 @@
           <a:lstStyle xmlns:a="http://schemas.openxmlformats.org/drawingml/2006/main"/>
           <a:p xmlns:a="http://schemas.openxmlformats.org/drawingml/2006/main">
             <a:pPr>
-              <a:defRPr sz="1800" b="0">
+              <a:defRPr sz="1500" b="0">
                 <a:solidFill>
                   <a:srgbClr val="4C626E"/>
                 </a:solidFill>
@@ -5406,7 +8625,7 @@
               </a:defRPr>
             </a:pPr>
             <a:r>
-              <a:rPr sz="1800" b="0">
+              <a:rPr sz="1500" b="0">
                 <a:solidFill>
                   <a:srgbClr val="4C626E"/>
                 </a:solidFill>
@@ -5414,151 +8633,15 @@
                 <a:ea typeface="DejaVu Sans"/>
                 <a:cs typeface="DejaVu Sans"/>
               </a:rPr>
-              <a:t>Each face would sense nearby obstructions and reduce its corresponding driver output.</a:t>
-            </a:r>
-          </a:p>
-        </p:txBody>
-      </p:sp>
-      <p:sp>
-        <p:nvSpPr>
-          <p:cNvPr id="7" name="Completed work">
-            <a:extLst xmlns:a="http://schemas.openxmlformats.org/drawingml/2006/main">
-              <a:ext uri="{FF2B5EF4-FFF2-40B4-BE49-F238E27FC236}">
-                <a16:creationId xmlns:a16="http://schemas.microsoft.com/office/drawing/2014/main" id="{9D32AC63-C375-4544-A96B-A5B16009842F}"/>
-              </a:ext>
-            </a:extLst>
-          </p:cNvPr>
-          <p:cNvSpPr>
-            <a:spLocks xmlns:a="http://schemas.openxmlformats.org/drawingml/2006/main" noGrp="1"/>
-          </p:cNvSpPr>
-          <p:nvPr/>
-        </p:nvSpPr>
-        <p:spPr>
-          <a:xfrm xmlns:a="http://schemas.openxmlformats.org/drawingml/2006/main">
-            <a:off x="609600" y="4895850"/>
-            <a:ext cx="4362450" cy="361950"/>
-          </a:xfrm>
-          <a:prstGeom xmlns:a="http://schemas.openxmlformats.org/drawingml/2006/main" prst="rect">
-            <a:avLst/>
-          </a:prstGeom>
-          <a:noFill xmlns:a="http://schemas.openxmlformats.org/drawingml/2006/main"/>
-          <a:ln xmlns:a="http://schemas.openxmlformats.org/drawingml/2006/main" w="0">
-            <a:noFill/>
-          </a:ln>
-        </p:spPr>
-        <p:txBody>
-          <a:bodyPr xmlns:a="http://schemas.openxmlformats.org/drawingml/2006/main">
-            <a:noAutofit/>
-          </a:bodyPr>
-          <a:lstStyle xmlns:a="http://schemas.openxmlformats.org/drawingml/2006/main"/>
-          <a:p xmlns:a="http://schemas.openxmlformats.org/drawingml/2006/main">
-            <a:pPr>
-              <a:defRPr sz="1950" b="1">
-                <a:solidFill>
-                  <a:srgbClr val="102637"/>
-                </a:solidFill>
-                <a:latin typeface="DejaVu Sans"/>
-                <a:ea typeface="DejaVu Sans"/>
-                <a:cs typeface="DejaVu Sans"/>
-              </a:defRPr>
-            </a:pPr>
-            <a:r>
-              <a:rPr sz="1950" b="1">
-                <a:solidFill>
-                  <a:srgbClr val="102637"/>
-                </a:solidFill>
-                <a:latin typeface="DejaVu Sans"/>
-                <a:ea typeface="DejaVu Sans"/>
-                <a:cs typeface="DejaVu Sans"/>
-              </a:rPr>
-              <a:t>Completed work</a:t>
-            </a:r>
-          </a:p>
-        </p:txBody>
-      </p:sp>
-      <p:sp>
-        <p:nvSpPr>
-          <p:cNvPr id="8" name="Frame CAD, bottom fastener locations, and a c">
-            <a:extLst xmlns:a="http://schemas.openxmlformats.org/drawingml/2006/main">
-              <a:ext uri="{FF2B5EF4-FFF2-40B4-BE49-F238E27FC236}">
-                <a16:creationId xmlns:a16="http://schemas.microsoft.com/office/drawing/2014/main" id="{21B5DBAB-2EA4-47CC-95FD-7C6017F6B39F}"/>
-              </a:ext>
-            </a:extLst>
-          </p:cNvPr>
-          <p:cNvSpPr>
-            <a:spLocks xmlns:a="http://schemas.openxmlformats.org/drawingml/2006/main" noGrp="1"/>
-          </p:cNvSpPr>
-          <p:nvPr/>
-        </p:nvSpPr>
-        <p:spPr>
-          <a:xfrm xmlns:a="http://schemas.openxmlformats.org/drawingml/2006/main">
-            <a:off x="609600" y="5305425"/>
-            <a:ext cx="4362450" cy="1143000"/>
-          </a:xfrm>
-          <a:prstGeom xmlns:a="http://schemas.openxmlformats.org/drawingml/2006/main" prst="rect">
-            <a:avLst/>
-          </a:prstGeom>
-          <a:noFill xmlns:a="http://schemas.openxmlformats.org/drawingml/2006/main"/>
-          <a:ln xmlns:a="http://schemas.openxmlformats.org/drawingml/2006/main" w="0">
-            <a:noFill/>
-          </a:ln>
-        </p:spPr>
-        <p:txBody>
-          <a:bodyPr xmlns:a="http://schemas.openxmlformats.org/drawingml/2006/main">
-            <a:noAutofit/>
-          </a:bodyPr>
-          <a:lstStyle xmlns:a="http://schemas.openxmlformats.org/drawingml/2006/main"/>
-          <a:p xmlns:a="http://schemas.openxmlformats.org/drawingml/2006/main">
-            <a:pPr>
-              <a:defRPr sz="1800" b="0">
-                <a:solidFill>
-                  <a:srgbClr val="4C626E"/>
-                </a:solidFill>
-                <a:latin typeface="DejaVu Sans"/>
-                <a:ea typeface="DejaVu Sans"/>
-                <a:cs typeface="DejaVu Sans"/>
-              </a:defRPr>
-            </a:pPr>
-            <a:r>
-              <a:rPr sz="1800" b="0">
-                <a:solidFill>
-                  <a:srgbClr val="4C626E"/>
-                </a:solidFill>
-                <a:latin typeface="DejaVu Sans"/>
-                <a:ea typeface="DejaVu Sans"/>
-                <a:cs typeface="DejaVu Sans"/>
-              </a:rPr>
-              <a:t>Frame CAD, bottom fastener locations, and a construction plan.</a:t>
-            </a:r>
-          </a:p>
-        </p:txBody>
-      </p:sp>
-      <p:pic>
-        <p:nvPicPr>
-          <p:cNvPr id="18" name=""/>
-          <p:cNvPicPr>
-            <a:picLocks xmlns:a="http://schemas.openxmlformats.org/drawingml/2006/main" noChangeAspect="1"/>
-          </p:cNvPicPr>
-          <p:nvPr/>
-        </p:nvPicPr>
-        <p:blipFill>
-          <a:blip xmlns:r="http://schemas.openxmlformats.org/officeDocument/2006/relationships" xmlns:a="http://schemas.openxmlformats.org/drawingml/2006/main" r:embed="R74a871a6b3ac4944"/>
-          <a:stretch xmlns:a="http://schemas.openxmlformats.org/drawingml/2006/main"/>
-        </p:blipFill>
-        <p:spPr>
-          <a:xfrm xmlns:a="http://schemas.openxmlformats.org/drawingml/2006/main">
-            <a:off x="5334000" y="2010619"/>
-            <a:ext cx="6248400" cy="4084538"/>
-          </a:xfrm>
-          <a:prstGeom xmlns:a="http://schemas.openxmlformats.org/drawingml/2006/main" prst="rect">
-            <a:avLst/>
-          </a:prstGeom>
-        </p:spPr>
-      </p:pic>
+              <a:t>Early concept sketch</a:t>
+            </a:r>
+          </a:p>
+        </p:txBody>
+      </p:sp>
     </p:spTree>
     <p:extLst>
       <p:ext uri="{BB962C8B-B14F-4D97-AF65-F5344CB8AC3E}">
-        <p14:creationId xmlns:p14="http://schemas.microsoft.com/office/powerpoint/2010/main" val="1634410701"/>
+        <p14:creationId xmlns:p14="http://schemas.microsoft.com/office/powerpoint/2010/main" val="1087103565"/>
       </p:ext>
     </p:extLst>
   </p:cSld>
@@ -5586,10 +8669,10 @@
       </p:grpSpPr>
       <p:sp>
         <p:nvSpPr>
-          <p:cNvPr id="10" name="Speaker architecture and testing">
-            <a:extLst xmlns:a="http://schemas.openxmlformats.org/drawingml/2006/main">
-              <a:ext uri="{FF2B5EF4-FFF2-40B4-BE49-F238E27FC236}">
-                <a16:creationId xmlns:a16="http://schemas.microsoft.com/office/drawing/2014/main" id="{3C3CBF52-5BA9-405C-9929-A46299F108B1}"/>
+          <p:cNvPr id="10" name="Environment-adaptive speaker">
+            <a:extLst xmlns:a="http://schemas.openxmlformats.org/drawingml/2006/main">
+              <a:ext uri="{FF2B5EF4-FFF2-40B4-BE49-F238E27FC236}">
+                <a16:creationId xmlns:a16="http://schemas.microsoft.com/office/drawing/2014/main" id="{A00A6290-9F0B-4177-8A31-FC71E253AA20}"/>
               </a:ext>
             </a:extLst>
           </p:cNvPr>
@@ -5618,6 +8701,7 @@
           <a:lstStyle xmlns:a="http://schemas.openxmlformats.org/drawingml/2006/main"/>
           <a:p xmlns:a="http://schemas.openxmlformats.org/drawingml/2006/main">
             <a:pPr>
+              <a:buNone/>
               <a:defRPr sz="3450" b="1">
                 <a:solidFill>
                   <a:srgbClr val="102637"/>
@@ -5636,17 +8720,17 @@
                 <a:ea typeface="DejaVu Sans"/>
                 <a:cs typeface="DejaVu Sans"/>
               </a:rPr>
-              <a:t>Speaker architecture and testing</a:t>
-            </a:r>
-          </a:p>
-        </p:txBody>
-      </p:sp>
-      <p:sp>
-        <p:nvSpPr>
-          <p:cNvPr id="2" name="Four independent outputs remain a design requ">
-            <a:extLst xmlns:a="http://schemas.openxmlformats.org/drawingml/2006/main">
-              <a:ext uri="{FF2B5EF4-FFF2-40B4-BE49-F238E27FC236}">
-                <a16:creationId xmlns:a16="http://schemas.microsoft.com/office/drawing/2014/main" id="{94D2B40D-FC73-4FE7-8209-C0CAC18442E6}"/>
+              <a:t>Environment-adaptive speaker</a:t>
+            </a:r>
+          </a:p>
+        </p:txBody>
+      </p:sp>
+      <p:sp>
+        <p:nvSpPr>
+          <p:cNvPr id="2" name="ECE Makerspace 2026 · Individual design propo">
+            <a:extLst xmlns:a="http://schemas.openxmlformats.org/drawingml/2006/main">
+              <a:ext uri="{FF2B5EF4-FFF2-40B4-BE49-F238E27FC236}">
+                <a16:creationId xmlns:a16="http://schemas.microsoft.com/office/drawing/2014/main" id="{04863FA4-8CB3-4226-BAD5-E19DE632560C}"/>
               </a:ext>
             </a:extLst>
           </p:cNvPr>
@@ -5675,6 +8759,7 @@
           <a:lstStyle xmlns:a="http://schemas.openxmlformats.org/drawingml/2006/main"/>
           <a:p xmlns:a="http://schemas.openxmlformats.org/drawingml/2006/main">
             <a:pPr>
+              <a:buNone/>
               <a:defRPr sz="1650" b="0">
                 <a:solidFill>
                   <a:srgbClr val="147F80"/>
@@ -5693,17 +8778,17 @@
                 <a:ea typeface="DejaVu Sans"/>
                 <a:cs typeface="DejaVu Sans"/>
               </a:rPr>
-              <a:t>Four independent outputs remain a design requirement</a:t>
-            </a:r>
-          </a:p>
-        </p:txBody>
-      </p:sp>
-      <p:sp>
-        <p:nvSpPr>
-          <p:cNvPr id="3" name="Audio control">
-            <a:extLst xmlns:a="http://schemas.openxmlformats.org/drawingml/2006/main">
-              <a:ext uri="{FF2B5EF4-FFF2-40B4-BE49-F238E27FC236}">
-                <a16:creationId xmlns:a16="http://schemas.microsoft.com/office/drawing/2014/main" id="{94AA54AB-12DA-4DB8-ACC8-C90AC37AA213}"/>
+              <a:t>ECE Makerspace 2026 · Individual design proposal</a:t>
+            </a:r>
+          </a:p>
+        </p:txBody>
+      </p:sp>
+      <p:sp>
+        <p:nvSpPr>
+          <p:cNvPr id="3" name="Enclosure concept">
+            <a:extLst xmlns:a="http://schemas.openxmlformats.org/drawingml/2006/main">
+              <a:ext uri="{FF2B5EF4-FFF2-40B4-BE49-F238E27FC236}">
+                <a16:creationId xmlns:a16="http://schemas.microsoft.com/office/drawing/2014/main" id="{148D6128-3457-44E7-9921-27255ABBBD6D}"/>
               </a:ext>
             </a:extLst>
           </p:cNvPr>
@@ -5715,7 +8800,7 @@
         <p:spPr>
           <a:xfrm xmlns:a="http://schemas.openxmlformats.org/drawingml/2006/main">
             <a:off x="609600" y="1847850"/>
-            <a:ext cx="4457700" cy="361950"/>
+            <a:ext cx="4362450" cy="361950"/>
           </a:xfrm>
           <a:prstGeom xmlns:a="http://schemas.openxmlformats.org/drawingml/2006/main" prst="rect">
             <a:avLst/>
@@ -5732,6 +8817,7 @@
           <a:lstStyle xmlns:a="http://schemas.openxmlformats.org/drawingml/2006/main"/>
           <a:p xmlns:a="http://schemas.openxmlformats.org/drawingml/2006/main">
             <a:pPr>
+              <a:buNone/>
               <a:defRPr sz="1950" b="1">
                 <a:solidFill>
                   <a:srgbClr val="102637"/>
@@ -5750,17 +8836,17 @@
                 <a:ea typeface="DejaVu Sans"/>
                 <a:cs typeface="DejaVu Sans"/>
               </a:rPr>
-              <a:t>Audio control</a:t>
-            </a:r>
-          </a:p>
-        </p:txBody>
-      </p:sp>
-      <p:sp>
-        <p:nvSpPr>
-          <p:cNvPr id="4" name="The listed stereo amplifier needs revision or">
-            <a:extLst xmlns:a="http://schemas.openxmlformats.org/drawingml/2006/main">
-              <a:ext uri="{FF2B5EF4-FFF2-40B4-BE49-F238E27FC236}">
-                <a16:creationId xmlns:a16="http://schemas.microsoft.com/office/drawing/2014/main" id="{5E9B5128-96DA-49C2-B11E-42DF8A69ECC1}"/>
+              <a:t>Enclosure concept</a:t>
+            </a:r>
+          </a:p>
+        </p:txBody>
+      </p:sp>
+      <p:sp>
+        <p:nvSpPr>
+          <p:cNvPr id="4" name="A 6 × 6 in base and 4.5 in height. Four posts">
+            <a:extLst xmlns:a="http://schemas.openxmlformats.org/drawingml/2006/main">
+              <a:ext uri="{FF2B5EF4-FFF2-40B4-BE49-F238E27FC236}">
+                <a16:creationId xmlns:a16="http://schemas.microsoft.com/office/drawing/2014/main" id="{58B34949-5C6C-4847-999E-6D684C2A436D}"/>
               </a:ext>
             </a:extLst>
           </p:cNvPr>
@@ -5772,7 +8858,7 @@
         <p:spPr>
           <a:xfrm xmlns:a="http://schemas.openxmlformats.org/drawingml/2006/main">
             <a:off x="609600" y="2257425"/>
-            <a:ext cx="4457700" cy="1143000"/>
+            <a:ext cx="4362450" cy="1143000"/>
           </a:xfrm>
           <a:prstGeom xmlns:a="http://schemas.openxmlformats.org/drawingml/2006/main" prst="rect">
             <a:avLst/>
@@ -5789,6 +8875,7 @@
           <a:lstStyle xmlns:a="http://schemas.openxmlformats.org/drawingml/2006/main"/>
           <a:p xmlns:a="http://schemas.openxmlformats.org/drawingml/2006/main">
             <a:pPr>
+              <a:buNone/>
               <a:defRPr sz="1800" b="0">
                 <a:solidFill>
                   <a:srgbClr val="4C626E"/>
@@ -5807,17 +8894,17 @@
                 <a:ea typeface="DejaVu Sans"/>
                 <a:cs typeface="DejaVu Sans"/>
               </a:rPr>
-              <a:t>The listed stereo amplifier needs revision or added channel control for four independent outputs.</a:t>
-            </a:r>
-          </a:p>
-        </p:txBody>
-      </p:sp>
-      <p:sp>
-        <p:nvSpPr>
-          <p:cNvPr id="5" name="Test plan">
-            <a:extLst xmlns:a="http://schemas.openxmlformats.org/drawingml/2006/main">
-              <a:ext uri="{FF2B5EF4-FFF2-40B4-BE49-F238E27FC236}">
-                <a16:creationId xmlns:a16="http://schemas.microsoft.com/office/drawing/2014/main" id="{AF52F962-FA4D-46A1-BD0C-0AE42F4FB1BC}"/>
+              <a:t>A 6 × 6 in base and 4.5 in height. Four posts support the truncated pyramid frame.</a:t>
+            </a:r>
+          </a:p>
+        </p:txBody>
+      </p:sp>
+      <p:sp>
+        <p:nvSpPr>
+          <p:cNvPr id="5" name="Adaptive behavior">
+            <a:extLst xmlns:a="http://schemas.openxmlformats.org/drawingml/2006/main">
+              <a:ext uri="{FF2B5EF4-FFF2-40B4-BE49-F238E27FC236}">
+                <a16:creationId xmlns:a16="http://schemas.microsoft.com/office/drawing/2014/main" id="{14814913-25E1-4764-8DDB-EAD4B7982F2E}"/>
               </a:ext>
             </a:extLst>
           </p:cNvPr>
@@ -5829,7 +8916,7 @@
         <p:spPr>
           <a:xfrm xmlns:a="http://schemas.openxmlformats.org/drawingml/2006/main">
             <a:off x="609600" y="3371850"/>
-            <a:ext cx="4457700" cy="361950"/>
+            <a:ext cx="4362450" cy="361950"/>
           </a:xfrm>
           <a:prstGeom xmlns:a="http://schemas.openxmlformats.org/drawingml/2006/main" prst="rect">
             <a:avLst/>
@@ -5846,6 +8933,7 @@
           <a:lstStyle xmlns:a="http://schemas.openxmlformats.org/drawingml/2006/main"/>
           <a:p xmlns:a="http://schemas.openxmlformats.org/drawingml/2006/main">
             <a:pPr>
+              <a:buNone/>
               <a:defRPr sz="1950" b="1">
                 <a:solidFill>
                   <a:srgbClr val="102637"/>
@@ -5864,17 +8952,17 @@
                 <a:ea typeface="DejaVu Sans"/>
                 <a:cs typeface="DejaVu Sans"/>
               </a:rPr>
-              <a:t>Test plan</a:t>
-            </a:r>
-          </a:p>
-        </p:txBody>
-      </p:sp>
-      <p:sp>
-        <p:nvSpPr>
-          <p:cNvPr id="6" name="Compare adaptive mode on and off near walls a">
-            <a:extLst xmlns:a="http://schemas.openxmlformats.org/drawingml/2006/main">
-              <a:ext uri="{FF2B5EF4-FFF2-40B4-BE49-F238E27FC236}">
-                <a16:creationId xmlns:a16="http://schemas.microsoft.com/office/drawing/2014/main" id="{17DB66C3-6202-4869-B662-33069AE5A6AA}"/>
+              <a:t>Adaptive behavior</a:t>
+            </a:r>
+          </a:p>
+        </p:txBody>
+      </p:sp>
+      <p:sp>
+        <p:nvSpPr>
+          <p:cNvPr id="6" name="Each face would sense nearby obstructions and">
+            <a:extLst xmlns:a="http://schemas.openxmlformats.org/drawingml/2006/main">
+              <a:ext uri="{FF2B5EF4-FFF2-40B4-BE49-F238E27FC236}">
+                <a16:creationId xmlns:a16="http://schemas.microsoft.com/office/drawing/2014/main" id="{F8CBBB7D-843B-403F-9ED7-B69D1D83A4A0}"/>
               </a:ext>
             </a:extLst>
           </p:cNvPr>
@@ -5886,7 +8974,7 @@
         <p:spPr>
           <a:xfrm xmlns:a="http://schemas.openxmlformats.org/drawingml/2006/main">
             <a:off x="609600" y="3781425"/>
-            <a:ext cx="4457700" cy="1143000"/>
+            <a:ext cx="4362450" cy="1143000"/>
           </a:xfrm>
           <a:prstGeom xmlns:a="http://schemas.openxmlformats.org/drawingml/2006/main" prst="rect">
             <a:avLst/>
@@ -5903,6 +8991,7 @@
           <a:lstStyle xmlns:a="http://schemas.openxmlformats.org/drawingml/2006/main"/>
           <a:p xmlns:a="http://schemas.openxmlformats.org/drawingml/2006/main">
             <a:pPr>
+              <a:buNone/>
               <a:defRPr sz="1800" b="0">
                 <a:solidFill>
                   <a:srgbClr val="4C626E"/>
@@ -5921,17 +9010,17 @@
                 <a:ea typeface="DejaVu Sans"/>
                 <a:cs typeface="DejaVu Sans"/>
               </a:rPr>
-              <a:t>Compare adaptive mode on and off near walls and corners. Measure power and audible effects.</a:t>
-            </a:r>
-          </a:p>
-        </p:txBody>
-      </p:sp>
-      <p:sp>
-        <p:nvSpPr>
-          <p:cNvPr id="7" name="Design questions">
-            <a:extLst xmlns:a="http://schemas.openxmlformats.org/drawingml/2006/main">
-              <a:ext uri="{FF2B5EF4-FFF2-40B4-BE49-F238E27FC236}">
-                <a16:creationId xmlns:a16="http://schemas.microsoft.com/office/drawing/2014/main" id="{BBC30D88-D141-4391-BC5D-B4A4C8605102}"/>
+              <a:t>Each face would sense nearby obstructions and reduce its corresponding driver output.</a:t>
+            </a:r>
+          </a:p>
+        </p:txBody>
+      </p:sp>
+      <p:sp>
+        <p:nvSpPr>
+          <p:cNvPr id="7" name="Completed work">
+            <a:extLst xmlns:a="http://schemas.openxmlformats.org/drawingml/2006/main">
+              <a:ext uri="{FF2B5EF4-FFF2-40B4-BE49-F238E27FC236}">
+                <a16:creationId xmlns:a16="http://schemas.microsoft.com/office/drawing/2014/main" id="{9D32AC63-C375-4544-A96B-A5B16009842F}"/>
               </a:ext>
             </a:extLst>
           </p:cNvPr>
@@ -5943,7 +9032,7 @@
         <p:spPr>
           <a:xfrm xmlns:a="http://schemas.openxmlformats.org/drawingml/2006/main">
             <a:off x="609600" y="4895850"/>
-            <a:ext cx="4457700" cy="361950"/>
+            <a:ext cx="4362450" cy="361950"/>
           </a:xfrm>
           <a:prstGeom xmlns:a="http://schemas.openxmlformats.org/drawingml/2006/main" prst="rect">
             <a:avLst/>
@@ -5960,6 +9049,7 @@
           <a:lstStyle xmlns:a="http://schemas.openxmlformats.org/drawingml/2006/main"/>
           <a:p xmlns:a="http://schemas.openxmlformats.org/drawingml/2006/main">
             <a:pPr>
+              <a:buNone/>
               <a:defRPr sz="1950" b="1">
                 <a:solidFill>
                   <a:srgbClr val="102637"/>
@@ -5978,17 +9068,17 @@
                 <a:ea typeface="DejaVu Sans"/>
                 <a:cs typeface="DejaVu Sans"/>
               </a:rPr>
-              <a:t>Design questions</a:t>
-            </a:r>
-          </a:p>
-        </p:txBody>
-      </p:sp>
-      <p:sp>
-        <p:nvSpPr>
-          <p:cNvPr id="8" name="Sensor thresholds, driver interaction, and in">
-            <a:extLst xmlns:a="http://schemas.openxmlformats.org/drawingml/2006/main">
-              <a:ext uri="{FF2B5EF4-FFF2-40B4-BE49-F238E27FC236}">
-                <a16:creationId xmlns:a16="http://schemas.microsoft.com/office/drawing/2014/main" id="{4B02E990-BB22-435D-8A42-104AC67892B9}"/>
+              <a:t>Completed work</a:t>
+            </a:r>
+          </a:p>
+        </p:txBody>
+      </p:sp>
+      <p:sp>
+        <p:nvSpPr>
+          <p:cNvPr id="8" name="Frame CAD, bottom fastener locations, and a c">
+            <a:extLst xmlns:a="http://schemas.openxmlformats.org/drawingml/2006/main">
+              <a:ext uri="{FF2B5EF4-FFF2-40B4-BE49-F238E27FC236}">
+                <a16:creationId xmlns:a16="http://schemas.microsoft.com/office/drawing/2014/main" id="{21B5DBAB-2EA4-47CC-95FD-7C6017F6B39F}"/>
               </a:ext>
             </a:extLst>
           </p:cNvPr>
@@ -6000,7 +9090,7 @@
         <p:spPr>
           <a:xfrm xmlns:a="http://schemas.openxmlformats.org/drawingml/2006/main">
             <a:off x="609600" y="5305425"/>
-            <a:ext cx="4457700" cy="1143000"/>
+            <a:ext cx="4362450" cy="1143000"/>
           </a:xfrm>
           <a:prstGeom xmlns:a="http://schemas.openxmlformats.org/drawingml/2006/main" prst="rect">
             <a:avLst/>
@@ -6017,6 +9107,7 @@
           <a:lstStyle xmlns:a="http://schemas.openxmlformats.org/drawingml/2006/main"/>
           <a:p xmlns:a="http://schemas.openxmlformats.org/drawingml/2006/main">
             <a:pPr>
+              <a:buNone/>
               <a:defRPr sz="1800" b="0">
                 <a:solidFill>
                   <a:srgbClr val="4C626E"/>
@@ -6035,27 +9126,27 @@
                 <a:ea typeface="DejaVu Sans"/>
                 <a:cs typeface="DejaVu Sans"/>
               </a:rPr>
-              <a:t>Sensor thresholds, driver interaction, and internal volume still need testing.</a:t>
+              <a:t>Frame CAD, bottom fastener locations, and a construction plan.</a:t>
             </a:r>
           </a:p>
         </p:txBody>
       </p:sp>
       <p:pic>
         <p:nvPicPr>
-          <p:cNvPr id="18" name=""/>
+          <p:cNvPr id="20" name=""/>
           <p:cNvPicPr>
             <a:picLocks xmlns:a="http://schemas.openxmlformats.org/drawingml/2006/main" noChangeAspect="1"/>
           </p:cNvPicPr>
           <p:nvPr/>
         </p:nvPicPr>
         <p:blipFill>
-          <a:blip xmlns:r="http://schemas.openxmlformats.org/officeDocument/2006/relationships" xmlns:a="http://schemas.openxmlformats.org/drawingml/2006/main" r:embed="R9e8ce944e8994d5a"/>
+          <a:blip xmlns:r="http://schemas.openxmlformats.org/officeDocument/2006/relationships" xmlns:a="http://schemas.openxmlformats.org/drawingml/2006/main" r:embed="Rbb219b2b03814692"/>
           <a:stretch xmlns:a="http://schemas.openxmlformats.org/drawingml/2006/main"/>
         </p:blipFill>
         <p:spPr>
           <a:xfrm xmlns:a="http://schemas.openxmlformats.org/drawingml/2006/main">
-            <a:off x="5529432" y="1857375"/>
-            <a:ext cx="5895636" cy="4400550"/>
+            <a:off x="5334000" y="2010619"/>
+            <a:ext cx="6248400" cy="4084538"/>
           </a:xfrm>
           <a:prstGeom xmlns:a="http://schemas.openxmlformats.org/drawingml/2006/main" prst="rect">
             <a:avLst/>
@@ -6065,7 +9156,7 @@
     </p:spTree>
     <p:extLst>
       <p:ext uri="{BB962C8B-B14F-4D97-AF65-F5344CB8AC3E}">
-        <p14:creationId xmlns:p14="http://schemas.microsoft.com/office/powerpoint/2010/main" val="1968746840"/>
+        <p14:creationId xmlns:p14="http://schemas.microsoft.com/office/powerpoint/2010/main" val="1634410701"/>
       </p:ext>
     </p:extLst>
   </p:cSld>
@@ -6093,10 +9184,10 @@
       </p:grpSpPr>
       <p:sp>
         <p:nvSpPr>
-          <p:cNvPr id="10" name="Minecraft chess set">
-            <a:extLst xmlns:a="http://schemas.openxmlformats.org/drawingml/2006/main">
-              <a:ext uri="{FF2B5EF4-FFF2-40B4-BE49-F238E27FC236}">
-                <a16:creationId xmlns:a16="http://schemas.microsoft.com/office/drawing/2014/main" id="{2701B785-DD28-4702-A0BE-D61EE1367225}"/>
+          <p:cNvPr id="10" name="Speaker architecture and testing">
+            <a:extLst xmlns:a="http://schemas.openxmlformats.org/drawingml/2006/main">
+              <a:ext uri="{FF2B5EF4-FFF2-40B4-BE49-F238E27FC236}">
+                <a16:creationId xmlns:a16="http://schemas.microsoft.com/office/drawing/2014/main" id="{3C3CBF52-5BA9-405C-9929-A46299F108B1}"/>
               </a:ext>
             </a:extLst>
           </p:cNvPr>
@@ -6125,6 +9216,7 @@
           <a:lstStyle xmlns:a="http://schemas.openxmlformats.org/drawingml/2006/main"/>
           <a:p xmlns:a="http://schemas.openxmlformats.org/drawingml/2006/main">
             <a:pPr>
+              <a:buNone/>
               <a:defRPr sz="3450" b="1">
                 <a:solidFill>
                   <a:srgbClr val="102637"/>
@@ -6143,17 +9235,17 @@
                 <a:ea typeface="DejaVu Sans"/>
                 <a:cs typeface="DejaVu Sans"/>
               </a:rPr>
-              <a:t>Minecraft chess set</a:t>
-            </a:r>
-          </a:p>
-        </p:txBody>
-      </p:sp>
-      <p:sp>
-        <p:nvSpPr>
-          <p:cNvPr id="2" name="PLTW 2024 · Individual parts in a team assemb">
-            <a:extLst xmlns:a="http://schemas.openxmlformats.org/drawingml/2006/main">
-              <a:ext uri="{FF2B5EF4-FFF2-40B4-BE49-F238E27FC236}">
-                <a16:creationId xmlns:a16="http://schemas.microsoft.com/office/drawing/2014/main" id="{D03CDCA2-F1D4-4A4E-95C6-C93065096B29}"/>
+              <a:t>Speaker architecture and testing</a:t>
+            </a:r>
+          </a:p>
+        </p:txBody>
+      </p:sp>
+      <p:sp>
+        <p:nvSpPr>
+          <p:cNvPr id="2" name="Four independent outputs remain a design requ">
+            <a:extLst xmlns:a="http://schemas.openxmlformats.org/drawingml/2006/main">
+              <a:ext uri="{FF2B5EF4-FFF2-40B4-BE49-F238E27FC236}">
+                <a16:creationId xmlns:a16="http://schemas.microsoft.com/office/drawing/2014/main" id="{94D2B40D-FC73-4FE7-8209-C0CAC18442E6}"/>
               </a:ext>
             </a:extLst>
           </p:cNvPr>
@@ -6182,6 +9274,7 @@
           <a:lstStyle xmlns:a="http://schemas.openxmlformats.org/drawingml/2006/main"/>
           <a:p xmlns:a="http://schemas.openxmlformats.org/drawingml/2006/main">
             <a:pPr>
+              <a:buNone/>
               <a:defRPr sz="1650" b="0">
                 <a:solidFill>
                   <a:srgbClr val="147F80"/>
@@ -6200,17 +9293,17 @@
                 <a:ea typeface="DejaVu Sans"/>
                 <a:cs typeface="DejaVu Sans"/>
               </a:rPr>
-              <a:t>PLTW 2024 · Individual parts in a team assembly</a:t>
-            </a:r>
-          </a:p>
-        </p:txBody>
-      </p:sp>
-      <p:sp>
-        <p:nvSpPr>
-          <p:cNvPr id="3" name="My parts">
-            <a:extLst xmlns:a="http://schemas.openxmlformats.org/drawingml/2006/main">
-              <a:ext uri="{FF2B5EF4-FFF2-40B4-BE49-F238E27FC236}">
-                <a16:creationId xmlns:a16="http://schemas.microsoft.com/office/drawing/2014/main" id="{12488B51-96DB-4203-93DB-85B1C0144AD7}"/>
+              <a:t>Four independent outputs remain a design requirement</a:t>
+            </a:r>
+          </a:p>
+        </p:txBody>
+      </p:sp>
+      <p:sp>
+        <p:nvSpPr>
+          <p:cNvPr id="3" name="Audio control">
+            <a:extLst xmlns:a="http://schemas.openxmlformats.org/drawingml/2006/main">
+              <a:ext uri="{FF2B5EF4-FFF2-40B4-BE49-F238E27FC236}">
+                <a16:creationId xmlns:a16="http://schemas.microsoft.com/office/drawing/2014/main" id="{94AA54AB-12DA-4DB8-ACC8-C90AC37AA213}"/>
               </a:ext>
             </a:extLst>
           </p:cNvPr>
@@ -6222,7 +9315,7 @@
         <p:spPr>
           <a:xfrm xmlns:a="http://schemas.openxmlformats.org/drawingml/2006/main">
             <a:off x="609600" y="1847850"/>
-            <a:ext cx="4381500" cy="361950"/>
+            <a:ext cx="4457700" cy="361950"/>
           </a:xfrm>
           <a:prstGeom xmlns:a="http://schemas.openxmlformats.org/drawingml/2006/main" prst="rect">
             <a:avLst/>
@@ -6239,6 +9332,7 @@
           <a:lstStyle xmlns:a="http://schemas.openxmlformats.org/drawingml/2006/main"/>
           <a:p xmlns:a="http://schemas.openxmlformats.org/drawingml/2006/main">
             <a:pPr>
+              <a:buNone/>
               <a:defRPr sz="1950" b="1">
                 <a:solidFill>
                   <a:srgbClr val="102637"/>
@@ -6257,17 +9351,17 @@
                 <a:ea typeface="DejaVu Sans"/>
                 <a:cs typeface="DejaVu Sans"/>
               </a:rPr>
-              <a:t>My parts</a:t>
-            </a:r>
-          </a:p>
-        </p:txBody>
-      </p:sp>
-      <p:sp>
-        <p:nvSpPr>
-          <p:cNvPr id="4" name="Knight, Steve piece, and wolf bishop. Drawing">
-            <a:extLst xmlns:a="http://schemas.openxmlformats.org/drawingml/2006/main">
-              <a:ext uri="{FF2B5EF4-FFF2-40B4-BE49-F238E27FC236}">
-                <a16:creationId xmlns:a16="http://schemas.microsoft.com/office/drawing/2014/main" id="{16761CD3-7CA6-49B5-9861-E22241C38D8F}"/>
+              <a:t>Audio control</a:t>
+            </a:r>
+          </a:p>
+        </p:txBody>
+      </p:sp>
+      <p:sp>
+        <p:nvSpPr>
+          <p:cNvPr id="4" name="The listed stereo amplifier needs revision or">
+            <a:extLst xmlns:a="http://schemas.openxmlformats.org/drawingml/2006/main">
+              <a:ext uri="{FF2B5EF4-FFF2-40B4-BE49-F238E27FC236}">
+                <a16:creationId xmlns:a16="http://schemas.microsoft.com/office/drawing/2014/main" id="{5E9B5128-96DA-49C2-B11E-42DF8A69ECC1}"/>
               </a:ext>
             </a:extLst>
           </p:cNvPr>
@@ -6279,7 +9373,7 @@
         <p:spPr>
           <a:xfrm xmlns:a="http://schemas.openxmlformats.org/drawingml/2006/main">
             <a:off x="609600" y="2257425"/>
-            <a:ext cx="4381500" cy="1143000"/>
+            <a:ext cx="4457700" cy="1143000"/>
           </a:xfrm>
           <a:prstGeom xmlns:a="http://schemas.openxmlformats.org/drawingml/2006/main" prst="rect">
             <a:avLst/>
@@ -6296,6 +9390,7 @@
           <a:lstStyle xmlns:a="http://schemas.openxmlformats.org/drawingml/2006/main"/>
           <a:p xmlns:a="http://schemas.openxmlformats.org/drawingml/2006/main">
             <a:pPr>
+              <a:buNone/>
               <a:defRPr sz="1800" b="0">
                 <a:solidFill>
                   <a:srgbClr val="4C626E"/>
@@ -6314,17 +9409,17 @@
                 <a:ea typeface="DejaVu Sans"/>
                 <a:cs typeface="DejaVu Sans"/>
               </a:rPr>
-              <a:t>Knight, Steve piece, and wolf bishop. Drawing title blocks identify my contribution.</a:t>
-            </a:r>
-          </a:p>
-        </p:txBody>
-      </p:sp>
-      <p:sp>
-        <p:nvSpPr>
-          <p:cNvPr id="5" name="Documentation">
-            <a:extLst xmlns:a="http://schemas.openxmlformats.org/drawingml/2006/main">
-              <a:ext uri="{FF2B5EF4-FFF2-40B4-BE49-F238E27FC236}">
-                <a16:creationId xmlns:a16="http://schemas.microsoft.com/office/drawing/2014/main" id="{2F5FB261-1310-44E8-A460-F53129516D7E}"/>
+              <a:t>The listed stereo amplifier needs revision or added channel control for four independent outputs.</a:t>
+            </a:r>
+          </a:p>
+        </p:txBody>
+      </p:sp>
+      <p:sp>
+        <p:nvSpPr>
+          <p:cNvPr id="5" name="Test plan">
+            <a:extLst xmlns:a="http://schemas.openxmlformats.org/drawingml/2006/main">
+              <a:ext uri="{FF2B5EF4-FFF2-40B4-BE49-F238E27FC236}">
+                <a16:creationId xmlns:a16="http://schemas.microsoft.com/office/drawing/2014/main" id="{AF52F962-FA4D-46A1-BD0C-0AE42F4FB1BC}"/>
               </a:ext>
             </a:extLst>
           </p:cNvPr>
@@ -6336,7 +9431,7 @@
         <p:spPr>
           <a:xfrm xmlns:a="http://schemas.openxmlformats.org/drawingml/2006/main">
             <a:off x="609600" y="3371850"/>
-            <a:ext cx="4381500" cy="361950"/>
+            <a:ext cx="4457700" cy="361950"/>
           </a:xfrm>
           <a:prstGeom xmlns:a="http://schemas.openxmlformats.org/drawingml/2006/main" prst="rect">
             <a:avLst/>
@@ -6353,6 +9448,7 @@
           <a:lstStyle xmlns:a="http://schemas.openxmlformats.org/drawingml/2006/main"/>
           <a:p xmlns:a="http://schemas.openxmlformats.org/drawingml/2006/main">
             <a:pPr>
+              <a:buNone/>
               <a:defRPr sz="1950" b="1">
                 <a:solidFill>
                   <a:srgbClr val="102637"/>
@@ -6371,17 +9467,17 @@
                 <a:ea typeface="DejaVu Sans"/>
                 <a:cs typeface="DejaVu Sans"/>
               </a:rPr>
-              <a:t>Documentation</a:t>
-            </a:r>
-          </a:p>
-        </p:txBody>
-      </p:sp>
-      <p:sp>
-        <p:nvSpPr>
-          <p:cNvPr id="6" name="Dimensioned views and neutral STEP geometry p">
-            <a:extLst xmlns:a="http://schemas.openxmlformats.org/drawingml/2006/main">
-              <a:ext uri="{FF2B5EF4-FFF2-40B4-BE49-F238E27FC236}">
-                <a16:creationId xmlns:a16="http://schemas.microsoft.com/office/drawing/2014/main" id="{E4DDC903-C9A5-444B-A589-6A8068D5D4F1}"/>
+              <a:t>Test plan</a:t>
+            </a:r>
+          </a:p>
+        </p:txBody>
+      </p:sp>
+      <p:sp>
+        <p:nvSpPr>
+          <p:cNvPr id="6" name="Compare adaptive mode on and off near walls a">
+            <a:extLst xmlns:a="http://schemas.openxmlformats.org/drawingml/2006/main">
+              <a:ext uri="{FF2B5EF4-FFF2-40B4-BE49-F238E27FC236}">
+                <a16:creationId xmlns:a16="http://schemas.microsoft.com/office/drawing/2014/main" id="{17DB66C3-6202-4869-B662-33069AE5A6AA}"/>
               </a:ext>
             </a:extLst>
           </p:cNvPr>
@@ -6393,7 +9489,7 @@
         <p:spPr>
           <a:xfrm xmlns:a="http://schemas.openxmlformats.org/drawingml/2006/main">
             <a:off x="609600" y="3781425"/>
-            <a:ext cx="4381500" cy="1143000"/>
+            <a:ext cx="4457700" cy="1143000"/>
           </a:xfrm>
           <a:prstGeom xmlns:a="http://schemas.openxmlformats.org/drawingml/2006/main" prst="rect">
             <a:avLst/>
@@ -6410,6 +9506,7 @@
           <a:lstStyle xmlns:a="http://schemas.openxmlformats.org/drawingml/2006/main"/>
           <a:p xmlns:a="http://schemas.openxmlformats.org/drawingml/2006/main">
             <a:pPr>
+              <a:buNone/>
               <a:defRPr sz="1800" b="0">
                 <a:solidFill>
                   <a:srgbClr val="4C626E"/>
@@ -6428,17 +9525,17 @@
                 <a:ea typeface="DejaVu Sans"/>
                 <a:cs typeface="DejaVu Sans"/>
               </a:rPr>
-              <a:t>Dimensioned views and neutral STEP geometry preserve the designs.</a:t>
-            </a:r>
-          </a:p>
-        </p:txBody>
-      </p:sp>
-      <p:sp>
-        <p:nvSpPr>
-          <p:cNvPr id="7" name="Next iteration">
-            <a:extLst xmlns:a="http://schemas.openxmlformats.org/drawingml/2006/main">
-              <a:ext uri="{FF2B5EF4-FFF2-40B4-BE49-F238E27FC236}">
-                <a16:creationId xmlns:a16="http://schemas.microsoft.com/office/drawing/2014/main" id="{A42F1779-9B97-4CC4-B026-D47CCBDCCCAD}"/>
+              <a:t>Compare adaptive mode on and off near walls and corners. Measure power and audible effects.</a:t>
+            </a:r>
+          </a:p>
+        </p:txBody>
+      </p:sp>
+      <p:sp>
+        <p:nvSpPr>
+          <p:cNvPr id="7" name="Design questions">
+            <a:extLst xmlns:a="http://schemas.openxmlformats.org/drawingml/2006/main">
+              <a:ext uri="{FF2B5EF4-FFF2-40B4-BE49-F238E27FC236}">
+                <a16:creationId xmlns:a16="http://schemas.microsoft.com/office/drawing/2014/main" id="{BBC30D88-D141-4391-BC5D-B4A4C8605102}"/>
               </a:ext>
             </a:extLst>
           </p:cNvPr>
@@ -6450,7 +9547,7 @@
         <p:spPr>
           <a:xfrm xmlns:a="http://schemas.openxmlformats.org/drawingml/2006/main">
             <a:off x="609600" y="4895850"/>
-            <a:ext cx="4381500" cy="361950"/>
+            <a:ext cx="4457700" cy="361950"/>
           </a:xfrm>
           <a:prstGeom xmlns:a="http://schemas.openxmlformats.org/drawingml/2006/main" prst="rect">
             <a:avLst/>
@@ -6467,6 +9564,7 @@
           <a:lstStyle xmlns:a="http://schemas.openxmlformats.org/drawingml/2006/main"/>
           <a:p xmlns:a="http://schemas.openxmlformats.org/drawingml/2006/main">
             <a:pPr>
+              <a:buNone/>
               <a:defRPr sz="1950" b="1">
                 <a:solidFill>
                   <a:srgbClr val="102637"/>
@@ -6485,17 +9583,17 @@
                 <a:ea typeface="DejaVu Sans"/>
                 <a:cs typeface="DejaVu Sans"/>
               </a:rPr>
-              <a:t>Next iteration</a:t>
-            </a:r>
-          </a:p>
-        </p:txBody>
-      </p:sp>
-      <p:sp>
-        <p:nvSpPr>
-          <p:cNvPr id="8" name="Check manufacturability and base consistency ">
-            <a:extLst xmlns:a="http://schemas.openxmlformats.org/drawingml/2006/main">
-              <a:ext uri="{FF2B5EF4-FFF2-40B4-BE49-F238E27FC236}">
-                <a16:creationId xmlns:a16="http://schemas.microsoft.com/office/drawing/2014/main" id="{617FE6DA-1AD2-49D1-A639-D5837D6703C8}"/>
+              <a:t>Design questions</a:t>
+            </a:r>
+          </a:p>
+        </p:txBody>
+      </p:sp>
+      <p:sp>
+        <p:nvSpPr>
+          <p:cNvPr id="8" name="Sensor thresholds, driver interaction, and in">
+            <a:extLst xmlns:a="http://schemas.openxmlformats.org/drawingml/2006/main">
+              <a:ext uri="{FF2B5EF4-FFF2-40B4-BE49-F238E27FC236}">
+                <a16:creationId xmlns:a16="http://schemas.microsoft.com/office/drawing/2014/main" id="{4B02E990-BB22-435D-8A42-104AC67892B9}"/>
               </a:ext>
             </a:extLst>
           </p:cNvPr>
@@ -6507,7 +9605,7 @@
         <p:spPr>
           <a:xfrm xmlns:a="http://schemas.openxmlformats.org/drawingml/2006/main">
             <a:off x="609600" y="5305425"/>
-            <a:ext cx="4381500" cy="1143000"/>
+            <a:ext cx="4457700" cy="1143000"/>
           </a:xfrm>
           <a:prstGeom xmlns:a="http://schemas.openxmlformats.org/drawingml/2006/main" prst="rect">
             <a:avLst/>
@@ -6524,6 +9622,7 @@
           <a:lstStyle xmlns:a="http://schemas.openxmlformats.org/drawingml/2006/main"/>
           <a:p xmlns:a="http://schemas.openxmlformats.org/drawingml/2006/main">
             <a:pPr>
+              <a:buNone/>
               <a:defRPr sz="1800" b="0">
                 <a:solidFill>
                   <a:srgbClr val="4C626E"/>
@@ -6542,27 +9641,27 @@
                 <a:ea typeface="DejaVu Sans"/>
                 <a:cs typeface="DejaVu Sans"/>
               </a:rPr>
-              <a:t>Check manufacturability and base consistency with a physical test print.</a:t>
+              <a:t>Sensor thresholds, driver interaction, and internal volume still need testing.</a:t>
             </a:r>
           </a:p>
         </p:txBody>
       </p:sp>
       <p:pic>
         <p:nvPicPr>
-          <p:cNvPr id="18" name=""/>
+          <p:cNvPr id="20" name=""/>
           <p:cNvPicPr>
             <a:picLocks xmlns:a="http://schemas.openxmlformats.org/drawingml/2006/main" noChangeAspect="1"/>
           </p:cNvPicPr>
           <p:nvPr/>
         </p:nvPicPr>
         <p:blipFill>
-          <a:blip xmlns:r="http://schemas.openxmlformats.org/officeDocument/2006/relationships" xmlns:a="http://schemas.openxmlformats.org/drawingml/2006/main" r:embed="R9881af4aae954c09"/>
+          <a:blip xmlns:r="http://schemas.openxmlformats.org/officeDocument/2006/relationships" xmlns:a="http://schemas.openxmlformats.org/drawingml/2006/main" r:embed="Re21cd080965f4163"/>
           <a:stretch xmlns:a="http://schemas.openxmlformats.org/drawingml/2006/main"/>
         </p:blipFill>
         <p:spPr>
           <a:xfrm xmlns:a="http://schemas.openxmlformats.org/drawingml/2006/main">
-            <a:off x="5334000" y="2067091"/>
-            <a:ext cx="6248400" cy="4028743"/>
+            <a:off x="5529432" y="1857375"/>
+            <a:ext cx="5895636" cy="4400550"/>
           </a:xfrm>
           <a:prstGeom xmlns:a="http://schemas.openxmlformats.org/drawingml/2006/main" prst="rect">
             <a:avLst/>
@@ -6572,7 +9671,7 @@
     </p:spTree>
     <p:extLst>
       <p:ext uri="{BB962C8B-B14F-4D97-AF65-F5344CB8AC3E}">
-        <p14:creationId xmlns:p14="http://schemas.microsoft.com/office/powerpoint/2010/main" val="426864410"/>
+        <p14:creationId xmlns:p14="http://schemas.microsoft.com/office/powerpoint/2010/main" val="1968746840"/>
       </p:ext>
     </p:extLst>
   </p:cSld>
@@ -6600,10 +9699,10 @@
       </p:grpSpPr>
       <p:sp>
         <p:nvSpPr>
-          <p:cNvPr id="11" name="Star container and CAM studies">
-            <a:extLst xmlns:a="http://schemas.openxmlformats.org/drawingml/2006/main">
-              <a:ext uri="{FF2B5EF4-FFF2-40B4-BE49-F238E27FC236}">
-                <a16:creationId xmlns:a16="http://schemas.microsoft.com/office/drawing/2014/main" id="{A2E6142B-E373-47AC-8BD2-29DE5415F7A3}"/>
+          <p:cNvPr id="9" name="">
+            <a:extLst xmlns:a="http://schemas.openxmlformats.org/drawingml/2006/main">
+              <a:ext uri="{FF2B5EF4-FFF2-40B4-BE49-F238E27FC236}">
+                <a16:creationId xmlns:a16="http://schemas.microsoft.com/office/drawing/2014/main" id="{F9AFBCE9-34C6-4087-A5C8-BAF54046DF3A}"/>
               </a:ext>
             </a:extLst>
           </p:cNvPr>
@@ -6650,17 +9749,17 @@
                 <a:ea typeface="DejaVu Sans"/>
                 <a:cs typeface="DejaVu Sans"/>
               </a:rPr>
-              <a:t>Star container and CAM studies</a:t>
-            </a:r>
-          </a:p>
-        </p:txBody>
-      </p:sp>
-      <p:sp>
-        <p:nvSpPr>
-          <p:cNvPr id="2" name="PLTW 2025 · CAD models and toolpath simulatio">
-            <a:extLst xmlns:a="http://schemas.openxmlformats.org/drawingml/2006/main">
-              <a:ext uri="{FF2B5EF4-FFF2-40B4-BE49-F238E27FC236}">
-                <a16:creationId xmlns:a16="http://schemas.microsoft.com/office/drawing/2014/main" id="{89AFF6FB-F171-4464-802A-426E48E1FA6D}"/>
+              <a:t>Speaker concept sketch</a:t>
+            </a:r>
+          </a:p>
+        </p:txBody>
+      </p:sp>
+      <p:sp>
+        <p:nvSpPr>
+          <p:cNvPr id="2" name="">
+            <a:extLst xmlns:a="http://schemas.openxmlformats.org/drawingml/2006/main">
+              <a:ext uri="{FF2B5EF4-FFF2-40B4-BE49-F238E27FC236}">
+                <a16:creationId xmlns:a16="http://schemas.microsoft.com/office/drawing/2014/main" id="{054E8262-52C7-4484-BD23-9E13A91EC9A0}"/>
               </a:ext>
             </a:extLst>
           </p:cNvPr>
@@ -6707,29 +9806,51 @@
                 <a:ea typeface="DejaVu Sans"/>
                 <a:cs typeface="DejaVu Sans"/>
               </a:rPr>
-              <a:t>PLTW 2025 · CAD models and toolpath simulations</a:t>
-            </a:r>
-          </a:p>
-        </p:txBody>
-      </p:sp>
-      <p:sp>
-        <p:nvSpPr>
-          <p:cNvPr id="3" name="Part geometry">
-            <a:extLst xmlns:a="http://schemas.openxmlformats.org/drawingml/2006/main">
-              <a:ext uri="{FF2B5EF4-FFF2-40B4-BE49-F238E27FC236}">
-                <a16:creationId xmlns:a16="http://schemas.microsoft.com/office/drawing/2014/main" id="{60A96118-A2A6-4F12-95C0-B8F30A80F5FA}"/>
-              </a:ext>
-            </a:extLst>
-          </p:cNvPr>
-          <p:cNvSpPr>
-            <a:spLocks xmlns:a="http://schemas.openxmlformats.org/drawingml/2006/main" noGrp="1"/>
-          </p:cNvSpPr>
-          <p:nvPr/>
-        </p:nvSpPr>
-        <p:spPr>
-          <a:xfrm xmlns:a="http://schemas.openxmlformats.org/drawingml/2006/main">
-            <a:off x="609600" y="1847850"/>
-            <a:ext cx="4324350" cy="361950"/>
+              <a:t>Original notebook drawing</a:t>
+            </a:r>
+          </a:p>
+        </p:txBody>
+      </p:sp>
+      <p:pic>
+        <p:nvPicPr>
+          <p:cNvPr id="11" name=""/>
+          <p:cNvPicPr>
+            <a:picLocks xmlns:a="http://schemas.openxmlformats.org/drawingml/2006/main" noChangeAspect="1"/>
+          </p:cNvPicPr>
+          <p:nvPr/>
+        </p:nvPicPr>
+        <p:blipFill>
+          <a:blip xmlns:r="http://schemas.openxmlformats.org/officeDocument/2006/relationships" xmlns:a="http://schemas.openxmlformats.org/drawingml/2006/main" r:embed="R9798e4d769804eba"/>
+          <a:stretch xmlns:a="http://schemas.openxmlformats.org/drawingml/2006/main"/>
+        </p:blipFill>
+        <p:spPr>
+          <a:xfrm xmlns:a="http://schemas.openxmlformats.org/drawingml/2006/main">
+            <a:off x="1026319" y="1752600"/>
+            <a:ext cx="3500438" cy="4667250"/>
+          </a:xfrm>
+          <a:prstGeom xmlns:a="http://schemas.openxmlformats.org/drawingml/2006/main" prst="rect">
+            <a:avLst/>
+          </a:prstGeom>
+        </p:spPr>
+      </p:pic>
+      <p:sp>
+        <p:nvSpPr>
+          <p:cNvPr id="4" name="">
+            <a:extLst xmlns:a="http://schemas.openxmlformats.org/drawingml/2006/main">
+              <a:ext uri="{FF2B5EF4-FFF2-40B4-BE49-F238E27FC236}">
+                <a16:creationId xmlns:a16="http://schemas.microsoft.com/office/drawing/2014/main" id="{F8FE4A51-7880-4FBF-A520-EDD9B9AE6E60}"/>
+              </a:ext>
+            </a:extLst>
+          </p:cNvPr>
+          <p:cNvSpPr>
+            <a:spLocks xmlns:a="http://schemas.openxmlformats.org/drawingml/2006/main" noGrp="1"/>
+          </p:cNvSpPr>
+          <p:nvPr/>
+        </p:nvSpPr>
+        <p:spPr>
+          <a:xfrm xmlns:a="http://schemas.openxmlformats.org/drawingml/2006/main">
+            <a:off x="5638800" y="2095500"/>
+            <a:ext cx="5715000" cy="400050"/>
           </a:xfrm>
           <a:prstGeom xmlns:a="http://schemas.openxmlformats.org/drawingml/2006/main" prst="rect">
             <a:avLst/>
@@ -6746,7 +9867,7 @@
           <a:lstStyle xmlns:a="http://schemas.openxmlformats.org/drawingml/2006/main"/>
           <a:p xmlns:a="http://schemas.openxmlformats.org/drawingml/2006/main">
             <a:pPr>
-              <a:defRPr sz="1950" b="1">
+              <a:defRPr sz="2100" b="1">
                 <a:solidFill>
                   <a:srgbClr val="102637"/>
                 </a:solidFill>
@@ -6756,7 +9877,7 @@
               </a:defRPr>
             </a:pPr>
             <a:r>
-              <a:rPr sz="1950" b="1">
+              <a:rPr sz="2100" b="1">
                 <a:solidFill>
                   <a:srgbClr val="102637"/>
                 </a:solidFill>
@@ -6764,29 +9885,29 @@
                 <a:ea typeface="DejaVu Sans"/>
                 <a:cs typeface="DejaVu Sans"/>
               </a:rPr>
-              <a:t>Part geometry</a:t>
-            </a:r>
-          </a:p>
-        </p:txBody>
-      </p:sp>
-      <p:sp>
-        <p:nvSpPr>
-          <p:cNvPr id="4" name="A star-shaped base and fitted lid. Sketches e">
-            <a:extLst xmlns:a="http://schemas.openxmlformats.org/drawingml/2006/main">
-              <a:ext uri="{FF2B5EF4-FFF2-40B4-BE49-F238E27FC236}">
-                <a16:creationId xmlns:a16="http://schemas.microsoft.com/office/drawing/2014/main" id="{A15FFCC3-8D26-4FDA-9DBC-C62BD5FBCF1A}"/>
-              </a:ext>
-            </a:extLst>
-          </p:cNvPr>
-          <p:cNvSpPr>
-            <a:spLocks xmlns:a="http://schemas.openxmlformats.org/drawingml/2006/main" noGrp="1"/>
-          </p:cNvSpPr>
-          <p:nvPr/>
-        </p:nvSpPr>
-        <p:spPr>
-          <a:xfrm xmlns:a="http://schemas.openxmlformats.org/drawingml/2006/main">
-            <a:off x="609600" y="2257425"/>
-            <a:ext cx="4324350" cy="1143000"/>
+              <a:t>Structure</a:t>
+            </a:r>
+          </a:p>
+        </p:txBody>
+      </p:sp>
+      <p:sp>
+        <p:nvSpPr>
+          <p:cNvPr id="5" name="">
+            <a:extLst xmlns:a="http://schemas.openxmlformats.org/drawingml/2006/main">
+              <a:ext uri="{FF2B5EF4-FFF2-40B4-BE49-F238E27FC236}">
+                <a16:creationId xmlns:a16="http://schemas.microsoft.com/office/drawing/2014/main" id="{C516AC06-605F-45A1-ADAD-39D7050E7E95}"/>
+              </a:ext>
+            </a:extLst>
+          </p:cNvPr>
+          <p:cNvSpPr>
+            <a:spLocks xmlns:a="http://schemas.openxmlformats.org/drawingml/2006/main" noGrp="1"/>
+          </p:cNvSpPr>
+          <p:nvPr/>
+        </p:nvSpPr>
+        <p:spPr>
+          <a:xfrm xmlns:a="http://schemas.openxmlformats.org/drawingml/2006/main">
+            <a:off x="5638800" y="2581275"/>
+            <a:ext cx="5715000" cy="857250"/>
           </a:xfrm>
           <a:prstGeom xmlns:a="http://schemas.openxmlformats.org/drawingml/2006/main" prst="rect">
             <a:avLst/>
@@ -6803,7 +9924,7 @@
           <a:lstStyle xmlns:a="http://schemas.openxmlformats.org/drawingml/2006/main"/>
           <a:p xmlns:a="http://schemas.openxmlformats.org/drawingml/2006/main">
             <a:pPr>
-              <a:defRPr sz="1800" b="0">
+              <a:defRPr sz="1950" b="0">
                 <a:solidFill>
                   <a:srgbClr val="4C626E"/>
                 </a:solidFill>
@@ -6813,7 +9934,7 @@
               </a:defRPr>
             </a:pPr>
             <a:r>
-              <a:rPr sz="1800" b="0">
+              <a:rPr sz="1950" b="0">
                 <a:solidFill>
                   <a:srgbClr val="4C626E"/>
                 </a:solidFill>
@@ -6821,29 +9942,29 @@
                 <a:ea typeface="DejaVu Sans"/>
                 <a:cs typeface="DejaVu Sans"/>
               </a:rPr>
-              <a:t>A star-shaped base and fitted lid. Sketches examine the fit between the opening and the lid.</a:t>
-            </a:r>
-          </a:p>
-        </p:txBody>
-      </p:sp>
-      <p:sp>
-        <p:nvSpPr>
-          <p:cNvPr id="5" name="CAM work">
-            <a:extLst xmlns:a="http://schemas.openxmlformats.org/drawingml/2006/main">
-              <a:ext uri="{FF2B5EF4-FFF2-40B4-BE49-F238E27FC236}">
-                <a16:creationId xmlns:a16="http://schemas.microsoft.com/office/drawing/2014/main" id="{3DCBB31C-D1F9-489A-A594-0CBF32FD1FA8}"/>
-              </a:ext>
-            </a:extLst>
-          </p:cNvPr>
-          <p:cNvSpPr>
-            <a:spLocks xmlns:a="http://schemas.openxmlformats.org/drawingml/2006/main" noGrp="1"/>
-          </p:cNvSpPr>
-          <p:nvPr/>
-        </p:nvSpPr>
-        <p:spPr>
-          <a:xfrm xmlns:a="http://schemas.openxmlformats.org/drawingml/2006/main">
-            <a:off x="609600" y="3371850"/>
-            <a:ext cx="4324350" cy="361950"/>
+              <a:t>Four internal posts support the enclosure and provide mounting locations.</a:t>
+            </a:r>
+          </a:p>
+        </p:txBody>
+      </p:sp>
+      <p:sp>
+        <p:nvSpPr>
+          <p:cNvPr id="6" name="">
+            <a:extLst xmlns:a="http://schemas.openxmlformats.org/drawingml/2006/main">
+              <a:ext uri="{FF2B5EF4-FFF2-40B4-BE49-F238E27FC236}">
+                <a16:creationId xmlns:a16="http://schemas.microsoft.com/office/drawing/2014/main" id="{28705D42-A066-4C67-A011-218C01F08A92}"/>
+              </a:ext>
+            </a:extLst>
+          </p:cNvPr>
+          <p:cNvSpPr>
+            <a:spLocks xmlns:a="http://schemas.openxmlformats.org/drawingml/2006/main" noGrp="1"/>
+          </p:cNvSpPr>
+          <p:nvPr/>
+        </p:nvSpPr>
+        <p:spPr>
+          <a:xfrm xmlns:a="http://schemas.openxmlformats.org/drawingml/2006/main">
+            <a:off x="5638800" y="3695700"/>
+            <a:ext cx="5715000" cy="400050"/>
           </a:xfrm>
           <a:prstGeom xmlns:a="http://schemas.openxmlformats.org/drawingml/2006/main" prst="rect">
             <a:avLst/>
@@ -6860,7 +9981,7 @@
           <a:lstStyle xmlns:a="http://schemas.openxmlformats.org/drawingml/2006/main"/>
           <a:p xmlns:a="http://schemas.openxmlformats.org/drawingml/2006/main">
             <a:pPr>
-              <a:defRPr sz="1950" b="1">
+              <a:defRPr sz="2100" b="1">
                 <a:solidFill>
                   <a:srgbClr val="102637"/>
                 </a:solidFill>
@@ -6870,7 +9991,7 @@
               </a:defRPr>
             </a:pPr>
             <a:r>
-              <a:rPr sz="1950" b="1">
+              <a:rPr sz="2100" b="1">
                 <a:solidFill>
                   <a:srgbClr val="102637"/>
                 </a:solidFill>
@@ -6878,29 +9999,29 @@
                 <a:ea typeface="DejaVu Sans"/>
                 <a:cs typeface="DejaVu Sans"/>
               </a:rPr>
-              <a:t>CAM work</a:t>
-            </a:r>
-          </a:p>
-        </p:txBody>
-      </p:sp>
-      <p:sp>
-        <p:nvSpPr>
-          <p:cNvPr id="6" name="2D pockets and contours, with related studies">
-            <a:extLst xmlns:a="http://schemas.openxmlformats.org/drawingml/2006/main">
-              <a:ext uri="{FF2B5EF4-FFF2-40B4-BE49-F238E27FC236}">
-                <a16:creationId xmlns:a16="http://schemas.microsoft.com/office/drawing/2014/main" id="{847B5AC5-3E8A-44F3-BA51-DD38265D42A9}"/>
-              </a:ext>
-            </a:extLst>
-          </p:cNvPr>
-          <p:cNvSpPr>
-            <a:spLocks xmlns:a="http://schemas.openxmlformats.org/drawingml/2006/main" noGrp="1"/>
-          </p:cNvSpPr>
-          <p:nvPr/>
-        </p:nvSpPr>
-        <p:spPr>
-          <a:xfrm xmlns:a="http://schemas.openxmlformats.org/drawingml/2006/main">
-            <a:off x="609600" y="3781425"/>
-            <a:ext cx="4324350" cy="1143000"/>
+              <a:t>Access and controls</a:t>
+            </a:r>
+          </a:p>
+        </p:txBody>
+      </p:sp>
+      <p:sp>
+        <p:nvSpPr>
+          <p:cNvPr id="7" name="">
+            <a:extLst xmlns:a="http://schemas.openxmlformats.org/drawingml/2006/main">
+              <a:ext uri="{FF2B5EF4-FFF2-40B4-BE49-F238E27FC236}">
+                <a16:creationId xmlns:a16="http://schemas.microsoft.com/office/drawing/2014/main" id="{24C4F384-8722-48D1-A37D-7A666EC1E0CB}"/>
+              </a:ext>
+            </a:extLst>
+          </p:cNvPr>
+          <p:cNvSpPr>
+            <a:spLocks xmlns:a="http://schemas.openxmlformats.org/drawingml/2006/main" noGrp="1"/>
+          </p:cNvSpPr>
+          <p:nvPr/>
+        </p:nvSpPr>
+        <p:spPr>
+          <a:xfrm xmlns:a="http://schemas.openxmlformats.org/drawingml/2006/main">
+            <a:off x="5638800" y="4181475"/>
+            <a:ext cx="5715000" cy="952500"/>
           </a:xfrm>
           <a:prstGeom xmlns:a="http://schemas.openxmlformats.org/drawingml/2006/main" prst="rect">
             <a:avLst/>
@@ -6917,7 +10038,7 @@
           <a:lstStyle xmlns:a="http://schemas.openxmlformats.org/drawingml/2006/main"/>
           <a:p xmlns:a="http://schemas.openxmlformats.org/drawingml/2006/main">
             <a:pPr>
-              <a:defRPr sz="1800" b="0">
+              <a:defRPr sz="1950" b="0">
                 <a:solidFill>
                   <a:srgbClr val="4C626E"/>
                 </a:solidFill>
@@ -6927,7 +10048,7 @@
               </a:defRPr>
             </a:pPr>
             <a:r>
-              <a:rPr sz="1800" b="0">
+              <a:rPr sz="1950" b="0">
                 <a:solidFill>
                   <a:srgbClr val="4C626E"/>
                 </a:solidFill>
@@ -6935,29 +10056,29 @@
                 <a:ea typeface="DejaVu Sans"/>
                 <a:cs typeface="DejaVu Sans"/>
               </a:rPr>
-              <a:t>2D pockets and contours, with related studies in facing, slotting, drilling, and surface machining.</a:t>
-            </a:r>
-          </a:p>
-        </p:txBody>
-      </p:sp>
-      <p:sp>
-        <p:nvSpPr>
-          <p:cNvPr id="7" name="Lesson">
-            <a:extLst xmlns:a="http://schemas.openxmlformats.org/drawingml/2006/main">
-              <a:ext uri="{FF2B5EF4-FFF2-40B4-BE49-F238E27FC236}">
-                <a16:creationId xmlns:a16="http://schemas.microsoft.com/office/drawing/2014/main" id="{AD758B77-91F7-4CED-8671-2DC864E59C86}"/>
-              </a:ext>
-            </a:extLst>
-          </p:cNvPr>
-          <p:cNvSpPr>
-            <a:spLocks xmlns:a="http://schemas.openxmlformats.org/drawingml/2006/main" noGrp="1"/>
-          </p:cNvSpPr>
-          <p:nvPr/>
-        </p:nvSpPr>
-        <p:spPr>
-          <a:xfrm xmlns:a="http://schemas.openxmlformats.org/drawingml/2006/main">
-            <a:off x="609600" y="4895850"/>
-            <a:ext cx="4324350" cy="361950"/>
+              <a:t>Top controls and bottom service access appear in the original sketch.</a:t>
+            </a:r>
+          </a:p>
+        </p:txBody>
+      </p:sp>
+      <p:sp>
+        <p:nvSpPr>
+          <p:cNvPr id="8" name="">
+            <a:extLst xmlns:a="http://schemas.openxmlformats.org/drawingml/2006/main">
+              <a:ext uri="{FF2B5EF4-FFF2-40B4-BE49-F238E27FC236}">
+                <a16:creationId xmlns:a16="http://schemas.microsoft.com/office/drawing/2014/main" id="{A02AD8CE-FF8F-4DA9-962B-CD5B41D90C89}"/>
+              </a:ext>
+            </a:extLst>
+          </p:cNvPr>
+          <p:cNvSpPr>
+            <a:spLocks xmlns:a="http://schemas.openxmlformats.org/drawingml/2006/main" noGrp="1"/>
+          </p:cNvSpPr>
+          <p:nvPr/>
+        </p:nvSpPr>
+        <p:spPr>
+          <a:xfrm xmlns:a="http://schemas.openxmlformats.org/drawingml/2006/main">
+            <a:off x="5638800" y="5534025"/>
+            <a:ext cx="5810250" cy="828675"/>
           </a:xfrm>
           <a:prstGeom xmlns:a="http://schemas.openxmlformats.org/drawingml/2006/main" prst="rect">
             <a:avLst/>
@@ -6974,9 +10095,9 @@
           <a:lstStyle xmlns:a="http://schemas.openxmlformats.org/drawingml/2006/main"/>
           <a:p xmlns:a="http://schemas.openxmlformats.org/drawingml/2006/main">
             <a:pPr>
-              <a:defRPr sz="1950" b="1">
-                <a:solidFill>
-                  <a:srgbClr val="102637"/>
+              <a:defRPr sz="1650" b="0">
+                <a:solidFill>
+                  <a:srgbClr val="4C626E"/>
                 </a:solidFill>
                 <a:latin typeface="DejaVu Sans"/>
                 <a:ea typeface="DejaVu Sans"/>
@@ -6984,124 +10105,23 @@
               </a:defRPr>
             </a:pPr>
             <a:r>
-              <a:rPr sz="1950" b="1">
-                <a:solidFill>
-                  <a:srgbClr val="102637"/>
+              <a:rPr sz="1650" b="0">
+                <a:solidFill>
+                  <a:srgbClr val="4C626E"/>
                 </a:solidFill>
                 <a:latin typeface="DejaVu Sans"/>
                 <a:ea typeface="DejaVu Sans"/>
                 <a:cs typeface="DejaVu Sans"/>
               </a:rPr>
-              <a:t>Lesson</a:t>
-            </a:r>
-          </a:p>
-        </p:txBody>
-      </p:sp>
-      <p:sp>
-        <p:nvSpPr>
-          <p:cNvPr id="8" name="Plan tool access while modeling. Reduce unnec">
-            <a:extLst xmlns:a="http://schemas.openxmlformats.org/drawingml/2006/main">
-              <a:ext uri="{FF2B5EF4-FFF2-40B4-BE49-F238E27FC236}">
-                <a16:creationId xmlns:a16="http://schemas.microsoft.com/office/drawing/2014/main" id="{F7F615CD-6F4D-42AA-9437-81B2064B76EE}"/>
-              </a:ext>
-            </a:extLst>
-          </p:cNvPr>
-          <p:cNvSpPr>
-            <a:spLocks xmlns:a="http://schemas.openxmlformats.org/drawingml/2006/main" noGrp="1"/>
-          </p:cNvSpPr>
-          <p:nvPr/>
-        </p:nvSpPr>
-        <p:spPr>
-          <a:xfrm xmlns:a="http://schemas.openxmlformats.org/drawingml/2006/main">
-            <a:off x="609600" y="5305425"/>
-            <a:ext cx="4324350" cy="1143000"/>
-          </a:xfrm>
-          <a:prstGeom xmlns:a="http://schemas.openxmlformats.org/drawingml/2006/main" prst="rect">
-            <a:avLst/>
-          </a:prstGeom>
-          <a:noFill xmlns:a="http://schemas.openxmlformats.org/drawingml/2006/main"/>
-          <a:ln xmlns:a="http://schemas.openxmlformats.org/drawingml/2006/main" w="0">
-            <a:noFill/>
-          </a:ln>
-        </p:spPr>
-        <p:txBody>
-          <a:bodyPr xmlns:a="http://schemas.openxmlformats.org/drawingml/2006/main">
-            <a:noAutofit/>
-          </a:bodyPr>
-          <a:lstStyle xmlns:a="http://schemas.openxmlformats.org/drawingml/2006/main"/>
-          <a:p xmlns:a="http://schemas.openxmlformats.org/drawingml/2006/main">
-            <a:pPr>
-              <a:defRPr sz="1800" b="0">
-                <a:solidFill>
-                  <a:srgbClr val="4C626E"/>
-                </a:solidFill>
-                <a:latin typeface="DejaVu Sans"/>
-                <a:ea typeface="DejaVu Sans"/>
-                <a:cs typeface="DejaVu Sans"/>
-              </a:defRPr>
-            </a:pPr>
-            <a:r>
-              <a:rPr sz="1800" b="0">
-                <a:solidFill>
-                  <a:srgbClr val="4C626E"/>
-                </a:solidFill>
-                <a:latin typeface="DejaVu Sans"/>
-                <a:ea typeface="DejaVu Sans"/>
-                <a:cs typeface="DejaVu Sans"/>
-              </a:rPr>
-              <a:t>Plan tool access while modeling. Reduce unnecessary tool travel.</a:t>
-            </a:r>
-          </a:p>
-        </p:txBody>
-      </p:sp>
-      <p:pic>
-        <p:nvPicPr>
-          <p:cNvPr id="19" name=""/>
-          <p:cNvPicPr>
-            <a:picLocks xmlns:a="http://schemas.openxmlformats.org/drawingml/2006/main" noChangeAspect="1"/>
-          </p:cNvPicPr>
-          <p:nvPr/>
-        </p:nvPicPr>
-        <p:blipFill>
-          <a:blip xmlns:r="http://schemas.openxmlformats.org/officeDocument/2006/relationships" xmlns:a="http://schemas.openxmlformats.org/drawingml/2006/main" r:embed="Rb849c49fd20c41c2"/>
-          <a:stretch xmlns:a="http://schemas.openxmlformats.org/drawingml/2006/main"/>
-        </p:blipFill>
-        <p:spPr>
-          <a:xfrm xmlns:a="http://schemas.openxmlformats.org/drawingml/2006/main">
-            <a:off x="6826619" y="1809750"/>
-            <a:ext cx="3110762" cy="2619375"/>
-          </a:xfrm>
-          <a:prstGeom xmlns:a="http://schemas.openxmlformats.org/drawingml/2006/main" prst="rect">
-            <a:avLst/>
-          </a:prstGeom>
-        </p:spPr>
-      </p:pic>
-      <p:pic>
-        <p:nvPicPr>
-          <p:cNvPr id="20" name=""/>
-          <p:cNvPicPr>
-            <a:picLocks xmlns:a="http://schemas.openxmlformats.org/drawingml/2006/main" noChangeAspect="1"/>
-          </p:cNvPicPr>
-          <p:nvPr/>
-        </p:nvPicPr>
-        <p:blipFill>
-          <a:blip xmlns:r="http://schemas.openxmlformats.org/officeDocument/2006/relationships" xmlns:a="http://schemas.openxmlformats.org/drawingml/2006/main" r:embed="Rffe1114725404213"/>
-          <a:stretch xmlns:a="http://schemas.openxmlformats.org/drawingml/2006/main"/>
-        </p:blipFill>
-        <p:spPr>
-          <a:xfrm xmlns:a="http://schemas.openxmlformats.org/drawingml/2006/main">
-            <a:off x="6896060" y="4457700"/>
-            <a:ext cx="2971881" cy="1790700"/>
-          </a:xfrm>
-          <a:prstGeom xmlns:a="http://schemas.openxmlformats.org/drawingml/2006/main" prst="rect">
-            <a:avLst/>
-          </a:prstGeom>
-        </p:spPr>
-      </p:pic>
+              <a:t>Early concept sketch. Final proposal dimensions appear on the enclosure slide.</a:t>
+            </a:r>
+          </a:p>
+        </p:txBody>
+      </p:sp>
     </p:spTree>
     <p:extLst>
       <p:ext uri="{BB962C8B-B14F-4D97-AF65-F5344CB8AC3E}">
-        <p14:creationId xmlns:p14="http://schemas.microsoft.com/office/powerpoint/2010/main" val="603630751"/>
+        <p14:creationId xmlns:p14="http://schemas.microsoft.com/office/powerpoint/2010/main" val="851041854"/>
       </p:ext>
     </p:extLst>
   </p:cSld>
@@ -7129,10 +10149,10 @@
       </p:grpSpPr>
       <p:sp>
         <p:nvSpPr>
-          <p:cNvPr id="9" name="Insole design study">
-            <a:extLst xmlns:a="http://schemas.openxmlformats.org/drawingml/2006/main">
-              <a:ext uri="{FF2B5EF4-FFF2-40B4-BE49-F238E27FC236}">
-                <a16:creationId xmlns:a16="http://schemas.microsoft.com/office/drawing/2014/main" id="{4EDEF8D4-83E8-4557-ABC2-0DFA505FED38}"/>
+          <p:cNvPr id="10" name="Minecraft chess set">
+            <a:extLst xmlns:a="http://schemas.openxmlformats.org/drawingml/2006/main">
+              <a:ext uri="{FF2B5EF4-FFF2-40B4-BE49-F238E27FC236}">
+                <a16:creationId xmlns:a16="http://schemas.microsoft.com/office/drawing/2014/main" id="{2701B785-DD28-4702-A0BE-D61EE1367225}"/>
               </a:ext>
             </a:extLst>
           </p:cNvPr>
@@ -7161,6 +10181,7 @@
           <a:lstStyle xmlns:a="http://schemas.openxmlformats.org/drawingml/2006/main"/>
           <a:p xmlns:a="http://schemas.openxmlformats.org/drawingml/2006/main">
             <a:pPr>
+              <a:buNone/>
               <a:defRPr sz="3450" b="1">
                 <a:solidFill>
                   <a:srgbClr val="102637"/>
@@ -7179,17 +10200,17 @@
                 <a:ea typeface="DejaVu Sans"/>
                 <a:cs typeface="DejaVu Sans"/>
               </a:rPr>
-              <a:t>Insole design study</a:t>
-            </a:r>
-          </a:p>
-        </p:txBody>
-      </p:sp>
-      <p:sp>
-        <p:nvSpPr>
-          <p:cNvPr id="2" name="Senior PLTW capstone · Team planning and desi">
-            <a:extLst xmlns:a="http://schemas.openxmlformats.org/drawingml/2006/main">
-              <a:ext uri="{FF2B5EF4-FFF2-40B4-BE49-F238E27FC236}">
-                <a16:creationId xmlns:a16="http://schemas.microsoft.com/office/drawing/2014/main" id="{10EA777C-EF51-4BBE-AA2E-527F29C720C4}"/>
+              <a:t>Minecraft chess set</a:t>
+            </a:r>
+          </a:p>
+        </p:txBody>
+      </p:sp>
+      <p:sp>
+        <p:nvSpPr>
+          <p:cNvPr id="2" name="PLTW 2024 · Individual parts in a team assemb">
+            <a:extLst xmlns:a="http://schemas.openxmlformats.org/drawingml/2006/main">
+              <a:ext uri="{FF2B5EF4-FFF2-40B4-BE49-F238E27FC236}">
+                <a16:creationId xmlns:a16="http://schemas.microsoft.com/office/drawing/2014/main" id="{D03CDCA2-F1D4-4A4E-95C6-C93065096B29}"/>
               </a:ext>
             </a:extLst>
           </p:cNvPr>
@@ -7218,6 +10239,7 @@
           <a:lstStyle xmlns:a="http://schemas.openxmlformats.org/drawingml/2006/main"/>
           <a:p xmlns:a="http://schemas.openxmlformats.org/drawingml/2006/main">
             <a:pPr>
+              <a:buNone/>
               <a:defRPr sz="1650" b="0">
                 <a:solidFill>
                   <a:srgbClr val="147F80"/>
@@ -7236,29 +10258,29 @@
                 <a:ea typeface="DejaVu Sans"/>
                 <a:cs typeface="DejaVu Sans"/>
               </a:rPr>
-              <a:t>Senior PLTW capstone · Team planning and design research</a:t>
-            </a:r>
-          </a:p>
-        </p:txBody>
-      </p:sp>
-      <p:sp>
-        <p:nvSpPr>
-          <p:cNvPr id="3" name="Material stack and prototype planning">
-            <a:extLst xmlns:a="http://schemas.openxmlformats.org/drawingml/2006/main">
-              <a:ext uri="{FF2B5EF4-FFF2-40B4-BE49-F238E27FC236}">
-                <a16:creationId xmlns:a16="http://schemas.microsoft.com/office/drawing/2014/main" id="{2DA70E5E-5BEF-46C2-A200-5B52A4439211}"/>
-              </a:ext>
-            </a:extLst>
-          </p:cNvPr>
-          <p:cNvSpPr>
-            <a:spLocks xmlns:a="http://schemas.openxmlformats.org/drawingml/2006/main" noGrp="1"/>
-          </p:cNvSpPr>
-          <p:nvPr/>
-        </p:nvSpPr>
-        <p:spPr>
-          <a:xfrm xmlns:a="http://schemas.openxmlformats.org/drawingml/2006/main">
-            <a:off x="609600" y="2095500"/>
-            <a:ext cx="10810875" cy="571500"/>
+              <a:t>PLTW 2024 · Individual parts in a team assembly</a:t>
+            </a:r>
+          </a:p>
+        </p:txBody>
+      </p:sp>
+      <p:sp>
+        <p:nvSpPr>
+          <p:cNvPr id="3" name="My parts">
+            <a:extLst xmlns:a="http://schemas.openxmlformats.org/drawingml/2006/main">
+              <a:ext uri="{FF2B5EF4-FFF2-40B4-BE49-F238E27FC236}">
+                <a16:creationId xmlns:a16="http://schemas.microsoft.com/office/drawing/2014/main" id="{12488B51-96DB-4203-93DB-85B1C0144AD7}"/>
+              </a:ext>
+            </a:extLst>
+          </p:cNvPr>
+          <p:cNvSpPr>
+            <a:spLocks xmlns:a="http://schemas.openxmlformats.org/drawingml/2006/main" noGrp="1"/>
+          </p:cNvSpPr>
+          <p:nvPr/>
+        </p:nvSpPr>
+        <p:spPr>
+          <a:xfrm xmlns:a="http://schemas.openxmlformats.org/drawingml/2006/main">
+            <a:off x="609600" y="1847850"/>
+            <a:ext cx="4381500" cy="361950"/>
           </a:xfrm>
           <a:prstGeom xmlns:a="http://schemas.openxmlformats.org/drawingml/2006/main" prst="rect">
             <a:avLst/>
@@ -7275,7 +10297,8 @@
           <a:lstStyle xmlns:a="http://schemas.openxmlformats.org/drawingml/2006/main"/>
           <a:p xmlns:a="http://schemas.openxmlformats.org/drawingml/2006/main">
             <a:pPr>
-              <a:defRPr sz="2850" b="1">
+              <a:buNone/>
+              <a:defRPr sz="1950" b="1">
                 <a:solidFill>
                   <a:srgbClr val="102637"/>
                 </a:solidFill>
@@ -7285,7 +10308,7 @@
               </a:defRPr>
             </a:pPr>
             <a:r>
-              <a:rPr sz="2850" b="1">
+              <a:rPr sz="1950" b="1">
                 <a:solidFill>
                   <a:srgbClr val="102637"/>
                 </a:solidFill>
@@ -7293,29 +10316,29 @@
                 <a:ea typeface="DejaVu Sans"/>
                 <a:cs typeface="DejaVu Sans"/>
               </a:rPr>
-              <a:t>Material stack and prototype planning</a:t>
-            </a:r>
-          </a:p>
-        </p:txBody>
-      </p:sp>
-      <p:sp>
-        <p:nvSpPr>
-          <p:cNvPr id="4" name="Compared foam, silicone, fabric, and memory f">
-            <a:extLst xmlns:a="http://schemas.openxmlformats.org/drawingml/2006/main">
-              <a:ext uri="{FF2B5EF4-FFF2-40B4-BE49-F238E27FC236}">
-                <a16:creationId xmlns:a16="http://schemas.microsoft.com/office/drawing/2014/main" id="{E2E32E02-433D-4EEE-80AD-9C6F012B62E5}"/>
-              </a:ext>
-            </a:extLst>
-          </p:cNvPr>
-          <p:cNvSpPr>
-            <a:spLocks xmlns:a="http://schemas.openxmlformats.org/drawingml/2006/main" noGrp="1"/>
-          </p:cNvSpPr>
-          <p:nvPr/>
-        </p:nvSpPr>
-        <p:spPr>
-          <a:xfrm xmlns:a="http://schemas.openxmlformats.org/drawingml/2006/main">
-            <a:off x="609600" y="2933700"/>
-            <a:ext cx="10668000" cy="1000125"/>
+              <a:t>My parts</a:t>
+            </a:r>
+          </a:p>
+        </p:txBody>
+      </p:sp>
+      <p:sp>
+        <p:nvSpPr>
+          <p:cNvPr id="4" name="Knight, Steve piece, and wolf bishop. Drawing">
+            <a:extLst xmlns:a="http://schemas.openxmlformats.org/drawingml/2006/main">
+              <a:ext uri="{FF2B5EF4-FFF2-40B4-BE49-F238E27FC236}">
+                <a16:creationId xmlns:a16="http://schemas.microsoft.com/office/drawing/2014/main" id="{16761CD3-7CA6-49B5-9861-E22241C38D8F}"/>
+              </a:ext>
+            </a:extLst>
+          </p:cNvPr>
+          <p:cNvSpPr>
+            <a:spLocks xmlns:a="http://schemas.openxmlformats.org/drawingml/2006/main" noGrp="1"/>
+          </p:cNvSpPr>
+          <p:nvPr/>
+        </p:nvSpPr>
+        <p:spPr>
+          <a:xfrm xmlns:a="http://schemas.openxmlformats.org/drawingml/2006/main">
+            <a:off x="609600" y="2257425"/>
+            <a:ext cx="4381500" cy="1143000"/>
           </a:xfrm>
           <a:prstGeom xmlns:a="http://schemas.openxmlformats.org/drawingml/2006/main" prst="rect">
             <a:avLst/>
@@ -7332,7 +10355,8 @@
           <a:lstStyle xmlns:a="http://schemas.openxmlformats.org/drawingml/2006/main"/>
           <a:p xmlns:a="http://schemas.openxmlformats.org/drawingml/2006/main">
             <a:pPr>
-              <a:defRPr sz="2175" b="0">
+              <a:buNone/>
+              <a:defRPr sz="1800" b="0">
                 <a:solidFill>
                   <a:srgbClr val="4C626E"/>
                 </a:solidFill>
@@ -7342,7 +10366,7 @@
               </a:defRPr>
             </a:pPr>
             <a:r>
-              <a:rPr sz="2175" b="0">
+              <a:rPr sz="1800" b="0">
                 <a:solidFill>
                   <a:srgbClr val="4C626E"/>
                 </a:solidFill>
@@ -7350,52 +10374,29 @@
                 <a:ea typeface="DejaVu Sans"/>
                 <a:cs typeface="DejaVu Sans"/>
               </a:rPr>
-              <a:t>Compared foam, silicone, fabric, and memory foam.</a:t>
-            </a:r>
-          </a:p>
-          <a:p xmlns:a="http://schemas.openxmlformats.org/drawingml/2006/main">
-            <a:pPr>
-              <a:defRPr sz="2175" b="0">
-                <a:solidFill>
-                  <a:srgbClr val="4C626E"/>
-                </a:solidFill>
-                <a:latin typeface="DejaVu Sans"/>
-                <a:ea typeface="DejaVu Sans"/>
-                <a:cs typeface="DejaVu Sans"/>
-              </a:defRPr>
-            </a:pPr>
-            <a:r>
-              <a:rPr sz="2175" b="0">
-                <a:solidFill>
-                  <a:srgbClr val="4C626E"/>
-                </a:solidFill>
-                <a:latin typeface="DejaVu Sans"/>
-                <a:ea typeface="DejaVu Sans"/>
-                <a:cs typeface="DejaVu Sans"/>
-              </a:rPr>
-              <a:t>Planned cutting, shaping, and assembly with available equipment.</a:t>
-            </a:r>
-          </a:p>
-        </p:txBody>
-      </p:sp>
-      <p:sp>
-        <p:nvSpPr>
-          <p:cNvPr id="5" name="Sensing exploration">
-            <a:extLst xmlns:a="http://schemas.openxmlformats.org/drawingml/2006/main">
-              <a:ext uri="{FF2B5EF4-FFF2-40B4-BE49-F238E27FC236}">
-                <a16:creationId xmlns:a16="http://schemas.microsoft.com/office/drawing/2014/main" id="{84974258-EA87-4000-A11B-2C2B1F0420AE}"/>
-              </a:ext>
-            </a:extLst>
-          </p:cNvPr>
-          <p:cNvSpPr>
-            <a:spLocks xmlns:a="http://schemas.openxmlformats.org/drawingml/2006/main" noGrp="1"/>
-          </p:cNvSpPr>
-          <p:nvPr/>
-        </p:nvSpPr>
-        <p:spPr>
-          <a:xfrm xmlns:a="http://schemas.openxmlformats.org/drawingml/2006/main">
-            <a:off x="609600" y="4410075"/>
-            <a:ext cx="4953000" cy="400050"/>
+              <a:t>Knight, Steve piece, and wolf bishop. Drawing title blocks identify my contribution.</a:t>
+            </a:r>
+          </a:p>
+        </p:txBody>
+      </p:sp>
+      <p:sp>
+        <p:nvSpPr>
+          <p:cNvPr id="5" name="Documentation">
+            <a:extLst xmlns:a="http://schemas.openxmlformats.org/drawingml/2006/main">
+              <a:ext uri="{FF2B5EF4-FFF2-40B4-BE49-F238E27FC236}">
+                <a16:creationId xmlns:a16="http://schemas.microsoft.com/office/drawing/2014/main" id="{2F5FB261-1310-44E8-A460-F53129516D7E}"/>
+              </a:ext>
+            </a:extLst>
+          </p:cNvPr>
+          <p:cNvSpPr>
+            <a:spLocks xmlns:a="http://schemas.openxmlformats.org/drawingml/2006/main" noGrp="1"/>
+          </p:cNvSpPr>
+          <p:nvPr/>
+        </p:nvSpPr>
+        <p:spPr>
+          <a:xfrm xmlns:a="http://schemas.openxmlformats.org/drawingml/2006/main">
+            <a:off x="609600" y="3371850"/>
+            <a:ext cx="4381500" cy="361950"/>
           </a:xfrm>
           <a:prstGeom xmlns:a="http://schemas.openxmlformats.org/drawingml/2006/main" prst="rect">
             <a:avLst/>
@@ -7412,9 +10413,10 @@
           <a:lstStyle xmlns:a="http://schemas.openxmlformats.org/drawingml/2006/main"/>
           <a:p xmlns:a="http://schemas.openxmlformats.org/drawingml/2006/main">
             <a:pPr>
-              <a:defRPr sz="2100" b="1">
-                <a:solidFill>
-                  <a:srgbClr val="147F80"/>
+              <a:buNone/>
+              <a:defRPr sz="1950" b="1">
+                <a:solidFill>
+                  <a:srgbClr val="102637"/>
                 </a:solidFill>
                 <a:latin typeface="DejaVu Sans"/>
                 <a:ea typeface="DejaVu Sans"/>
@@ -7422,37 +10424,37 @@
               </a:defRPr>
             </a:pPr>
             <a:r>
-              <a:rPr sz="2100" b="1">
-                <a:solidFill>
-                  <a:srgbClr val="147F80"/>
+              <a:rPr sz="1950" b="1">
+                <a:solidFill>
+                  <a:srgbClr val="102637"/>
                 </a:solidFill>
                 <a:latin typeface="DejaVu Sans"/>
                 <a:ea typeface="DejaVu Sans"/>
                 <a:cs typeface="DejaVu Sans"/>
               </a:rPr>
-              <a:t>Sensing exploration</a:t>
-            </a:r>
-          </a:p>
-        </p:txBody>
-      </p:sp>
-      <p:sp>
-        <p:nvSpPr>
-          <p:cNvPr id="6" name="Considered load cells, HX711 modules,&#10;and a m">
-            <a:extLst xmlns:a="http://schemas.openxmlformats.org/drawingml/2006/main">
-              <a:ext uri="{FF2B5EF4-FFF2-40B4-BE49-F238E27FC236}">
-                <a16:creationId xmlns:a16="http://schemas.microsoft.com/office/drawing/2014/main" id="{BC888D9E-00DC-44A4-A06F-2D5E329CD992}"/>
-              </a:ext>
-            </a:extLst>
-          </p:cNvPr>
-          <p:cNvSpPr>
-            <a:spLocks xmlns:a="http://schemas.openxmlformats.org/drawingml/2006/main" noGrp="1"/>
-          </p:cNvSpPr>
-          <p:nvPr/>
-        </p:nvSpPr>
-        <p:spPr>
-          <a:xfrm xmlns:a="http://schemas.openxmlformats.org/drawingml/2006/main">
-            <a:off x="609600" y="4924425"/>
-            <a:ext cx="5267325" cy="1171575"/>
+              <a:t>Documentation</a:t>
+            </a:r>
+          </a:p>
+        </p:txBody>
+      </p:sp>
+      <p:sp>
+        <p:nvSpPr>
+          <p:cNvPr id="6" name="Dimensioned views and neutral STEP geometry p">
+            <a:extLst xmlns:a="http://schemas.openxmlformats.org/drawingml/2006/main">
+              <a:ext uri="{FF2B5EF4-FFF2-40B4-BE49-F238E27FC236}">
+                <a16:creationId xmlns:a16="http://schemas.microsoft.com/office/drawing/2014/main" id="{E4DDC903-C9A5-444B-A589-6A8068D5D4F1}"/>
+              </a:ext>
+            </a:extLst>
+          </p:cNvPr>
+          <p:cNvSpPr>
+            <a:spLocks xmlns:a="http://schemas.openxmlformats.org/drawingml/2006/main" noGrp="1"/>
+          </p:cNvSpPr>
+          <p:nvPr/>
+        </p:nvSpPr>
+        <p:spPr>
+          <a:xfrm xmlns:a="http://schemas.openxmlformats.org/drawingml/2006/main">
+            <a:off x="609600" y="3781425"/>
+            <a:ext cx="4381500" cy="1143000"/>
           </a:xfrm>
           <a:prstGeom xmlns:a="http://schemas.openxmlformats.org/drawingml/2006/main" prst="rect">
             <a:avLst/>
@@ -7469,7 +10471,8 @@
           <a:lstStyle xmlns:a="http://schemas.openxmlformats.org/drawingml/2006/main"/>
           <a:p xmlns:a="http://schemas.openxmlformats.org/drawingml/2006/main">
             <a:pPr>
-              <a:defRPr sz="1950" b="0">
+              <a:buNone/>
+              <a:defRPr sz="1800" b="0">
                 <a:solidFill>
                   <a:srgbClr val="4C626E"/>
                 </a:solidFill>
@@ -7479,7 +10482,7 @@
               </a:defRPr>
             </a:pPr>
             <a:r>
-              <a:rPr sz="1950" b="0">
+              <a:rPr sz="1800" b="0">
                 <a:solidFill>
                   <a:srgbClr val="4C626E"/>
                 </a:solidFill>
@@ -7487,53 +10490,7 @@
                 <a:ea typeface="DejaVu Sans"/>
                 <a:cs typeface="DejaVu Sans"/>
               </a:rPr>
-              <a:t>Considered load cells, HX711 modules,</a:t>
-            </a:r>
-          </a:p>
-          <a:p xmlns:a="http://schemas.openxmlformats.org/drawingml/2006/main">
-            <a:pPr>
-              <a:defRPr sz="1950" b="0">
-                <a:solidFill>
-                  <a:srgbClr val="4C626E"/>
-                </a:solidFill>
-                <a:latin typeface="DejaVu Sans"/>
-                <a:ea typeface="DejaVu Sans"/>
-                <a:cs typeface="DejaVu Sans"/>
-              </a:defRPr>
-            </a:pPr>
-            <a:r>
-              <a:rPr sz="1950" b="0">
-                <a:solidFill>
-                  <a:srgbClr val="4C626E"/>
-                </a:solidFill>
-                <a:latin typeface="DejaVu Sans"/>
-                <a:ea typeface="DejaVu Sans"/>
-                <a:cs typeface="DejaVu Sans"/>
-              </a:rPr>
-              <a:t>and a microcontroller. Sensor integration</a:t>
-            </a:r>
-          </a:p>
-          <a:p xmlns:a="http://schemas.openxmlformats.org/drawingml/2006/main">
-            <a:pPr>
-              <a:defRPr sz="1950" b="0">
-                <a:solidFill>
-                  <a:srgbClr val="4C626E"/>
-                </a:solidFill>
-                <a:latin typeface="DejaVu Sans"/>
-                <a:ea typeface="DejaVu Sans"/>
-                <a:cs typeface="DejaVu Sans"/>
-              </a:defRPr>
-            </a:pPr>
-            <a:r>
-              <a:rPr sz="1950" b="0">
-                <a:solidFill>
-                  <a:srgbClr val="4C626E"/>
-                </a:solidFill>
-                <a:latin typeface="DejaVu Sans"/>
-                <a:ea typeface="DejaVu Sans"/>
-                <a:cs typeface="DejaVu Sans"/>
-              </a:rPr>
-              <a:t>remained a possible extension.</a:t>
+              <a:t>Dimensioned views and neutral STEP geometry preserve the designs.</a:t>
             </a:r>
           </a:p>
         </p:txBody>
@@ -7543,19 +10500,19 @@
           <p:cNvPr id="7" name="Next iteration">
             <a:extLst xmlns:a="http://schemas.openxmlformats.org/drawingml/2006/main">
               <a:ext uri="{FF2B5EF4-FFF2-40B4-BE49-F238E27FC236}">
-                <a16:creationId xmlns:a16="http://schemas.microsoft.com/office/drawing/2014/main" id="{28F1DDB1-FECF-40AA-A777-CA0322F939F0}"/>
-              </a:ext>
-            </a:extLst>
-          </p:cNvPr>
-          <p:cNvSpPr>
-            <a:spLocks xmlns:a="http://schemas.openxmlformats.org/drawingml/2006/main" noGrp="1"/>
-          </p:cNvSpPr>
-          <p:nvPr/>
-        </p:nvSpPr>
-        <p:spPr>
-          <a:xfrm xmlns:a="http://schemas.openxmlformats.org/drawingml/2006/main">
-            <a:off x="6667500" y="4410075"/>
-            <a:ext cx="4667250" cy="400050"/>
+                <a16:creationId xmlns:a16="http://schemas.microsoft.com/office/drawing/2014/main" id="{A42F1779-9B97-4CC4-B026-D47CCBDCCCAD}"/>
+              </a:ext>
+            </a:extLst>
+          </p:cNvPr>
+          <p:cNvSpPr>
+            <a:spLocks xmlns:a="http://schemas.openxmlformats.org/drawingml/2006/main" noGrp="1"/>
+          </p:cNvSpPr>
+          <p:nvPr/>
+        </p:nvSpPr>
+        <p:spPr>
+          <a:xfrm xmlns:a="http://schemas.openxmlformats.org/drawingml/2006/main">
+            <a:off x="609600" y="4895850"/>
+            <a:ext cx="4381500" cy="361950"/>
           </a:xfrm>
           <a:prstGeom xmlns:a="http://schemas.openxmlformats.org/drawingml/2006/main" prst="rect">
             <a:avLst/>
@@ -7572,9 +10529,10 @@
           <a:lstStyle xmlns:a="http://schemas.openxmlformats.org/drawingml/2006/main"/>
           <a:p xmlns:a="http://schemas.openxmlformats.org/drawingml/2006/main">
             <a:pPr>
-              <a:defRPr sz="2100" b="1">
-                <a:solidFill>
-                  <a:srgbClr val="147F80"/>
+              <a:buNone/>
+              <a:defRPr sz="1950" b="1">
+                <a:solidFill>
+                  <a:srgbClr val="102637"/>
                 </a:solidFill>
                 <a:latin typeface="DejaVu Sans"/>
                 <a:ea typeface="DejaVu Sans"/>
@@ -7582,9 +10540,9 @@
               </a:defRPr>
             </a:pPr>
             <a:r>
-              <a:rPr sz="2100" b="1">
-                <a:solidFill>
-                  <a:srgbClr val="147F80"/>
+              <a:rPr sz="1950" b="1">
+                <a:solidFill>
+                  <a:srgbClr val="102637"/>
                 </a:solidFill>
                 <a:latin typeface="DejaVu Sans"/>
                 <a:ea typeface="DejaVu Sans"/>
@@ -7597,22 +10555,22 @@
       </p:sp>
       <p:sp>
         <p:nvSpPr>
-          <p:cNvPr id="8" name="Evaluate the material prototype, then calibra">
-            <a:extLst xmlns:a="http://schemas.openxmlformats.org/drawingml/2006/main">
-              <a:ext uri="{FF2B5EF4-FFF2-40B4-BE49-F238E27FC236}">
-                <a16:creationId xmlns:a16="http://schemas.microsoft.com/office/drawing/2014/main" id="{A071032B-86FC-443E-999B-77DE095325B5}"/>
-              </a:ext>
-            </a:extLst>
-          </p:cNvPr>
-          <p:cNvSpPr>
-            <a:spLocks xmlns:a="http://schemas.openxmlformats.org/drawingml/2006/main" noGrp="1"/>
-          </p:cNvSpPr>
-          <p:nvPr/>
-        </p:nvSpPr>
-        <p:spPr>
-          <a:xfrm xmlns:a="http://schemas.openxmlformats.org/drawingml/2006/main">
-            <a:off x="6667500" y="4924425"/>
-            <a:ext cx="4810125" cy="1171575"/>
+          <p:cNvPr id="8" name="Check manufacturability and base consistency ">
+            <a:extLst xmlns:a="http://schemas.openxmlformats.org/drawingml/2006/main">
+              <a:ext uri="{FF2B5EF4-FFF2-40B4-BE49-F238E27FC236}">
+                <a16:creationId xmlns:a16="http://schemas.microsoft.com/office/drawing/2014/main" id="{617FE6DA-1AD2-49D1-A639-D5837D6703C8}"/>
+              </a:ext>
+            </a:extLst>
+          </p:cNvPr>
+          <p:cNvSpPr>
+            <a:spLocks xmlns:a="http://schemas.openxmlformats.org/drawingml/2006/main" noGrp="1"/>
+          </p:cNvSpPr>
+          <p:nvPr/>
+        </p:nvSpPr>
+        <p:spPr>
+          <a:xfrm xmlns:a="http://schemas.openxmlformats.org/drawingml/2006/main">
+            <a:off x="609600" y="5305425"/>
+            <a:ext cx="4381500" cy="1143000"/>
           </a:xfrm>
           <a:prstGeom xmlns:a="http://schemas.openxmlformats.org/drawingml/2006/main" prst="rect">
             <a:avLst/>
@@ -7629,7 +10587,8 @@
           <a:lstStyle xmlns:a="http://schemas.openxmlformats.org/drawingml/2006/main"/>
           <a:p xmlns:a="http://schemas.openxmlformats.org/drawingml/2006/main">
             <a:pPr>
-              <a:defRPr sz="1950" b="0">
+              <a:buNone/>
+              <a:defRPr sz="1800" b="0">
                 <a:solidFill>
                   <a:srgbClr val="4C626E"/>
                 </a:solidFill>
@@ -7639,7 +10598,7 @@
               </a:defRPr>
             </a:pPr>
             <a:r>
-              <a:rPr sz="1950" b="0">
+              <a:rPr sz="1800" b="0">
                 <a:solidFill>
                   <a:srgbClr val="4C626E"/>
                 </a:solidFill>
@@ -7647,15 +10606,37 @@
                 <a:ea typeface="DejaVu Sans"/>
                 <a:cs typeface="DejaVu Sans"/>
               </a:rPr>
-              <a:t>Evaluate the material prototype, then calibrate one sensor before designing a wearable layout.</a:t>
-            </a:r>
-          </a:p>
-        </p:txBody>
-      </p:sp>
+              <a:t>Check manufacturability and base consistency with a physical test print.</a:t>
+            </a:r>
+          </a:p>
+        </p:txBody>
+      </p:sp>
+      <p:pic>
+        <p:nvPicPr>
+          <p:cNvPr id="20" name=""/>
+          <p:cNvPicPr>
+            <a:picLocks xmlns:a="http://schemas.openxmlformats.org/drawingml/2006/main" noChangeAspect="1"/>
+          </p:cNvPicPr>
+          <p:nvPr/>
+        </p:nvPicPr>
+        <p:blipFill>
+          <a:blip xmlns:r="http://schemas.openxmlformats.org/officeDocument/2006/relationships" xmlns:a="http://schemas.openxmlformats.org/drawingml/2006/main" r:embed="R8818e8b329b0413d"/>
+          <a:stretch xmlns:a="http://schemas.openxmlformats.org/drawingml/2006/main"/>
+        </p:blipFill>
+        <p:spPr>
+          <a:xfrm xmlns:a="http://schemas.openxmlformats.org/drawingml/2006/main">
+            <a:off x="5334000" y="2067091"/>
+            <a:ext cx="6248400" cy="4028743"/>
+          </a:xfrm>
+          <a:prstGeom xmlns:a="http://schemas.openxmlformats.org/drawingml/2006/main" prst="rect">
+            <a:avLst/>
+          </a:prstGeom>
+        </p:spPr>
+      </p:pic>
     </p:spTree>
     <p:extLst>
       <p:ext uri="{BB962C8B-B14F-4D97-AF65-F5344CB8AC3E}">
-        <p14:creationId xmlns:p14="http://schemas.microsoft.com/office/powerpoint/2010/main" val="855157008"/>
+        <p14:creationId xmlns:p14="http://schemas.microsoft.com/office/powerpoint/2010/main" val="426864410"/>
       </p:ext>
     </p:extLst>
   </p:cSld>
@@ -7683,10 +10664,10 @@
       </p:grpSpPr>
       <p:sp>
         <p:nvSpPr>
-          <p:cNvPr id="10" name="Bridge build and design reflection">
-            <a:extLst xmlns:a="http://schemas.openxmlformats.org/drawingml/2006/main">
-              <a:ext uri="{FF2B5EF4-FFF2-40B4-BE49-F238E27FC236}">
-                <a16:creationId xmlns:a16="http://schemas.microsoft.com/office/drawing/2014/main" id="{0DB09621-2BDE-426F-B728-BA1385B66ADE}"/>
+          <p:cNvPr id="7" name="">
+            <a:extLst xmlns:a="http://schemas.openxmlformats.org/drawingml/2006/main">
+              <a:ext uri="{FF2B5EF4-FFF2-40B4-BE49-F238E27FC236}">
+                <a16:creationId xmlns:a16="http://schemas.microsoft.com/office/drawing/2014/main" id="{28ED7D19-2269-4D2D-AEBA-27EE3634CE6A}"/>
               </a:ext>
             </a:extLst>
           </p:cNvPr>
@@ -7733,17 +10714,17 @@
                 <a:ea typeface="DejaVu Sans"/>
                 <a:cs typeface="DejaVu Sans"/>
               </a:rPr>
-              <a:t>Bridge build and design reflection</a:t>
-            </a:r>
-          </a:p>
-        </p:txBody>
-      </p:sp>
-      <p:sp>
-        <p:nvSpPr>
-          <p:cNvPr id="2" name="PLTW 2024 · Individual physical build">
-            <a:extLst xmlns:a="http://schemas.openxmlformats.org/drawingml/2006/main">
-              <a:ext uri="{FF2B5EF4-FFF2-40B4-BE49-F238E27FC236}">
-                <a16:creationId xmlns:a16="http://schemas.microsoft.com/office/drawing/2014/main" id="{F9011DF8-B4C0-47A8-BCC8-8E598CF22853}"/>
+              <a:t>Knight</a:t>
+            </a:r>
+          </a:p>
+        </p:txBody>
+      </p:sp>
+      <p:sp>
+        <p:nvSpPr>
+          <p:cNvPr id="2" name="">
+            <a:extLst xmlns:a="http://schemas.openxmlformats.org/drawingml/2006/main">
+              <a:ext uri="{FF2B5EF4-FFF2-40B4-BE49-F238E27FC236}">
+                <a16:creationId xmlns:a16="http://schemas.microsoft.com/office/drawing/2014/main" id="{0E77CA61-3D4B-4B43-AAEC-CD8F4D25BDE7}"/>
               </a:ext>
             </a:extLst>
           </p:cNvPr>
@@ -7790,29 +10771,73 @@
                 <a:ea typeface="DejaVu Sans"/>
                 <a:cs typeface="DejaVu Sans"/>
               </a:rPr>
-              <a:t>PLTW 2024 · Individual physical build</a:t>
-            </a:r>
-          </a:p>
-        </p:txBody>
-      </p:sp>
-      <p:sp>
-        <p:nvSpPr>
-          <p:cNvPr id="3" name="Constraints">
-            <a:extLst xmlns:a="http://schemas.openxmlformats.org/drawingml/2006/main">
-              <a:ext uri="{FF2B5EF4-FFF2-40B4-BE49-F238E27FC236}">
-                <a16:creationId xmlns:a16="http://schemas.microsoft.com/office/drawing/2014/main" id="{4CE220DB-3F22-4BCC-86B2-8B9689A6AFC6}"/>
-              </a:ext>
-            </a:extLst>
-          </p:cNvPr>
-          <p:cNvSpPr>
-            <a:spLocks xmlns:a="http://schemas.openxmlformats.org/drawingml/2006/main" noGrp="1"/>
-          </p:cNvSpPr>
-          <p:nvPr/>
-        </p:nvSpPr>
-        <p:spPr>
-          <a:xfrm xmlns:a="http://schemas.openxmlformats.org/drawingml/2006/main">
-            <a:off x="609600" y="1847850"/>
-            <a:ext cx="4371975" cy="361950"/>
+              <a:t>My Minecraft chess design</a:t>
+            </a:r>
+          </a:p>
+        </p:txBody>
+      </p:sp>
+      <p:pic>
+        <p:nvPicPr>
+          <p:cNvPr id="9" name=""/>
+          <p:cNvPicPr>
+            <a:picLocks xmlns:a="http://schemas.openxmlformats.org/drawingml/2006/main" noChangeAspect="1"/>
+          </p:cNvPicPr>
+          <p:nvPr/>
+        </p:nvPicPr>
+        <p:blipFill>
+          <a:blip xmlns:r="http://schemas.openxmlformats.org/officeDocument/2006/relationships" xmlns:a="http://schemas.openxmlformats.org/drawingml/2006/main" r:embed="Rf8ee6ab9c7914ab2"/>
+          <a:stretch xmlns:a="http://schemas.openxmlformats.org/drawingml/2006/main"/>
+        </p:blipFill>
+        <p:spPr>
+          <a:xfrm xmlns:a="http://schemas.openxmlformats.org/drawingml/2006/main">
+            <a:off x="609600" y="2218892"/>
+            <a:ext cx="4238625" cy="3467966"/>
+          </a:xfrm>
+          <a:prstGeom xmlns:a="http://schemas.openxmlformats.org/drawingml/2006/main" prst="rect">
+            <a:avLst/>
+          </a:prstGeom>
+        </p:spPr>
+      </p:pic>
+      <p:pic>
+        <p:nvPicPr>
+          <p:cNvPr id="10" name=""/>
+          <p:cNvPicPr>
+            <a:picLocks xmlns:a="http://schemas.openxmlformats.org/drawingml/2006/main" noChangeAspect="1"/>
+          </p:cNvPicPr>
+          <p:nvPr/>
+        </p:nvPicPr>
+        <p:blipFill>
+          <a:blip xmlns:r="http://schemas.openxmlformats.org/officeDocument/2006/relationships" xmlns:a="http://schemas.openxmlformats.org/drawingml/2006/main" r:embed="Rc055e61c220042fb"/>
+          <a:stretch xmlns:a="http://schemas.openxmlformats.org/drawingml/2006/main"/>
+        </p:blipFill>
+        <p:spPr>
+          <a:xfrm xmlns:a="http://schemas.openxmlformats.org/drawingml/2006/main">
+            <a:off x="5257800" y="1926831"/>
+            <a:ext cx="6324600" cy="4052089"/>
+          </a:xfrm>
+          <a:prstGeom xmlns:a="http://schemas.openxmlformats.org/drawingml/2006/main" prst="rect">
+            <a:avLst/>
+          </a:prstGeom>
+        </p:spPr>
+      </p:pic>
+      <p:sp>
+        <p:nvSpPr>
+          <p:cNvPr id="5" name="">
+            <a:extLst xmlns:a="http://schemas.openxmlformats.org/drawingml/2006/main">
+              <a:ext uri="{FF2B5EF4-FFF2-40B4-BE49-F238E27FC236}">
+                <a16:creationId xmlns:a16="http://schemas.microsoft.com/office/drawing/2014/main" id="{54AE0E94-2D3F-411D-8701-1FE4B0EA1DCE}"/>
+              </a:ext>
+            </a:extLst>
+          </p:cNvPr>
+          <p:cNvSpPr>
+            <a:spLocks xmlns:a="http://schemas.openxmlformats.org/drawingml/2006/main" noGrp="1"/>
+          </p:cNvSpPr>
+          <p:nvPr/>
+        </p:nvSpPr>
+        <p:spPr>
+          <a:xfrm xmlns:a="http://schemas.openxmlformats.org/drawingml/2006/main">
+            <a:off x="609600" y="6257925"/>
+            <a:ext cx="4238625" cy="314325"/>
           </a:xfrm>
           <a:prstGeom xmlns:a="http://schemas.openxmlformats.org/drawingml/2006/main" prst="rect">
             <a:avLst/>
@@ -7829,9 +10854,9 @@
           <a:lstStyle xmlns:a="http://schemas.openxmlformats.org/drawingml/2006/main"/>
           <a:p xmlns:a="http://schemas.openxmlformats.org/drawingml/2006/main">
             <a:pPr>
-              <a:defRPr sz="1950" b="1">
-                <a:solidFill>
-                  <a:srgbClr val="102637"/>
+              <a:defRPr sz="1500" b="0">
+                <a:solidFill>
+                  <a:srgbClr val="4C626E"/>
                 </a:solidFill>
                 <a:latin typeface="DejaVu Sans"/>
                 <a:ea typeface="DejaVu Sans"/>
@@ -7839,37 +10864,37 @@
               </a:defRPr>
             </a:pPr>
             <a:r>
-              <a:rPr sz="1950" b="1">
-                <a:solidFill>
-                  <a:srgbClr val="102637"/>
+              <a:rPr sz="1500" b="0">
+                <a:solidFill>
+                  <a:srgbClr val="4C626E"/>
                 </a:solidFill>
                 <a:latin typeface="DejaVu Sans"/>
                 <a:ea typeface="DejaVu Sans"/>
                 <a:cs typeface="DejaVu Sans"/>
               </a:rPr>
-              <a:t>Constraints</a:t>
-            </a:r>
-          </a:p>
-        </p:txBody>
-      </p:sp>
-      <p:sp>
-        <p:nvSpPr>
-          <p:cNvPr id="4" name="At most 60 popsicle sticks and a required 24-">
-            <a:extLst xmlns:a="http://schemas.openxmlformats.org/drawingml/2006/main">
-              <a:ext uri="{FF2B5EF4-FFF2-40B4-BE49-F238E27FC236}">
-                <a16:creationId xmlns:a16="http://schemas.microsoft.com/office/drawing/2014/main" id="{CEE308BB-A341-4E83-AAE0-9543275C060A}"/>
-              </a:ext>
-            </a:extLst>
-          </p:cNvPr>
-          <p:cNvSpPr>
-            <a:spLocks xmlns:a="http://schemas.openxmlformats.org/drawingml/2006/main" noGrp="1"/>
-          </p:cNvSpPr>
-          <p:nvPr/>
-        </p:nvSpPr>
-        <p:spPr>
-          <a:xfrm xmlns:a="http://schemas.openxmlformats.org/drawingml/2006/main">
-            <a:off x="609600" y="2257425"/>
-            <a:ext cx="4371975" cy="1143000"/>
+              <a:t>CAD geometry</a:t>
+            </a:r>
+          </a:p>
+        </p:txBody>
+      </p:sp>
+      <p:sp>
+        <p:nvSpPr>
+          <p:cNvPr id="6" name="">
+            <a:extLst xmlns:a="http://schemas.openxmlformats.org/drawingml/2006/main">
+              <a:ext uri="{FF2B5EF4-FFF2-40B4-BE49-F238E27FC236}">
+                <a16:creationId xmlns:a16="http://schemas.microsoft.com/office/drawing/2014/main" id="{959BB191-4C9A-4152-8240-363992AC4F9F}"/>
+              </a:ext>
+            </a:extLst>
+          </p:cNvPr>
+          <p:cNvSpPr>
+            <a:spLocks xmlns:a="http://schemas.openxmlformats.org/drawingml/2006/main" noGrp="1"/>
+          </p:cNvSpPr>
+          <p:nvPr/>
+        </p:nvSpPr>
+        <p:spPr>
+          <a:xfrm xmlns:a="http://schemas.openxmlformats.org/drawingml/2006/main">
+            <a:off x="5257800" y="6257925"/>
+            <a:ext cx="6324600" cy="314325"/>
           </a:xfrm>
           <a:prstGeom xmlns:a="http://schemas.openxmlformats.org/drawingml/2006/main" prst="rect">
             <a:avLst/>
@@ -7886,7 +10911,7 @@
           <a:lstStyle xmlns:a="http://schemas.openxmlformats.org/drawingml/2006/main"/>
           <a:p xmlns:a="http://schemas.openxmlformats.org/drawingml/2006/main">
             <a:pPr>
-              <a:defRPr sz="1800" b="0">
+              <a:defRPr sz="1500" b="0">
                 <a:solidFill>
                   <a:srgbClr val="4C626E"/>
                 </a:solidFill>
@@ -7896,7 +10921,7 @@
               </a:defRPr>
             </a:pPr>
             <a:r>
-              <a:rPr sz="1800" b="0">
+              <a:rPr sz="1500" b="0">
                 <a:solidFill>
                   <a:srgbClr val="4C626E"/>
                 </a:solidFill>
@@ -7904,265 +10929,15 @@
                 <a:ea typeface="DejaVu Sans"/>
                 <a:cs typeface="DejaVu Sans"/>
               </a:rPr>
-              <a:t>At most 60 popsicle sticks and a required 24-inch span.</a:t>
-            </a:r>
-          </a:p>
-        </p:txBody>
-      </p:sp>
-      <p:sp>
-        <p:nvSpPr>
-          <p:cNvPr id="5" name="Outcome">
-            <a:extLst xmlns:a="http://schemas.openxmlformats.org/drawingml/2006/main">
-              <a:ext uri="{FF2B5EF4-FFF2-40B4-BE49-F238E27FC236}">
-                <a16:creationId xmlns:a16="http://schemas.microsoft.com/office/drawing/2014/main" id="{4DE6399F-274F-4ACD-B471-5D7E42E6A364}"/>
-              </a:ext>
-            </a:extLst>
-          </p:cNvPr>
-          <p:cNvSpPr>
-            <a:spLocks xmlns:a="http://schemas.openxmlformats.org/drawingml/2006/main" noGrp="1"/>
-          </p:cNvSpPr>
-          <p:nvPr/>
-        </p:nvSpPr>
-        <p:spPr>
-          <a:xfrm xmlns:a="http://schemas.openxmlformats.org/drawingml/2006/main">
-            <a:off x="609600" y="3371850"/>
-            <a:ext cx="4371975" cy="361950"/>
-          </a:xfrm>
-          <a:prstGeom xmlns:a="http://schemas.openxmlformats.org/drawingml/2006/main" prst="rect">
-            <a:avLst/>
-          </a:prstGeom>
-          <a:noFill xmlns:a="http://schemas.openxmlformats.org/drawingml/2006/main"/>
-          <a:ln xmlns:a="http://schemas.openxmlformats.org/drawingml/2006/main" w="0">
-            <a:noFill/>
-          </a:ln>
-        </p:spPr>
-        <p:txBody>
-          <a:bodyPr xmlns:a="http://schemas.openxmlformats.org/drawingml/2006/main">
-            <a:noAutofit/>
-          </a:bodyPr>
-          <a:lstStyle xmlns:a="http://schemas.openxmlformats.org/drawingml/2006/main"/>
-          <a:p xmlns:a="http://schemas.openxmlformats.org/drawingml/2006/main">
-            <a:pPr>
-              <a:defRPr sz="1950" b="1">
-                <a:solidFill>
-                  <a:srgbClr val="102637"/>
-                </a:solidFill>
-                <a:latin typeface="DejaVu Sans"/>
-                <a:ea typeface="DejaVu Sans"/>
-                <a:cs typeface="DejaVu Sans"/>
-              </a:defRPr>
-            </a:pPr>
-            <a:r>
-              <a:rPr sz="1950" b="1">
-                <a:solidFill>
-                  <a:srgbClr val="102637"/>
-                </a:solidFill>
-                <a:latin typeface="DejaVu Sans"/>
-                <a:ea typeface="DejaVu Sans"/>
-                <a:cs typeface="DejaVu Sans"/>
-              </a:rPr>
-              <a:t>Outcome</a:t>
-            </a:r>
-          </a:p>
-        </p:txBody>
-      </p:sp>
-      <p:sp>
-        <p:nvSpPr>
-          <p:cNvPr id="6" name="The bridge carried a load but fell about four">
-            <a:extLst xmlns:a="http://schemas.openxmlformats.org/drawingml/2006/main">
-              <a:ext uri="{FF2B5EF4-FFF2-40B4-BE49-F238E27FC236}">
-                <a16:creationId xmlns:a16="http://schemas.microsoft.com/office/drawing/2014/main" id="{3C29DEFD-9DC3-41D2-8869-DD63B521FB4A}"/>
-              </a:ext>
-            </a:extLst>
-          </p:cNvPr>
-          <p:cNvSpPr>
-            <a:spLocks xmlns:a="http://schemas.openxmlformats.org/drawingml/2006/main" noGrp="1"/>
-          </p:cNvSpPr>
-          <p:nvPr/>
-        </p:nvSpPr>
-        <p:spPr>
-          <a:xfrm xmlns:a="http://schemas.openxmlformats.org/drawingml/2006/main">
-            <a:off x="609600" y="3781425"/>
-            <a:ext cx="4371975" cy="1143000"/>
-          </a:xfrm>
-          <a:prstGeom xmlns:a="http://schemas.openxmlformats.org/drawingml/2006/main" prst="rect">
-            <a:avLst/>
-          </a:prstGeom>
-          <a:noFill xmlns:a="http://schemas.openxmlformats.org/drawingml/2006/main"/>
-          <a:ln xmlns:a="http://schemas.openxmlformats.org/drawingml/2006/main" w="0">
-            <a:noFill/>
-          </a:ln>
-        </p:spPr>
-        <p:txBody>
-          <a:bodyPr xmlns:a="http://schemas.openxmlformats.org/drawingml/2006/main">
-            <a:noAutofit/>
-          </a:bodyPr>
-          <a:lstStyle xmlns:a="http://schemas.openxmlformats.org/drawingml/2006/main"/>
-          <a:p xmlns:a="http://schemas.openxmlformats.org/drawingml/2006/main">
-            <a:pPr>
-              <a:defRPr sz="1800" b="0">
-                <a:solidFill>
-                  <a:srgbClr val="4C626E"/>
-                </a:solidFill>
-                <a:latin typeface="DejaVu Sans"/>
-                <a:ea typeface="DejaVu Sans"/>
-                <a:cs typeface="DejaVu Sans"/>
-              </a:defRPr>
-            </a:pPr>
-            <a:r>
-              <a:rPr sz="1800" b="0">
-                <a:solidFill>
-                  <a:srgbClr val="4C626E"/>
-                </a:solidFill>
-                <a:latin typeface="DejaVu Sans"/>
-                <a:ea typeface="DejaVu Sans"/>
-                <a:cs typeface="DejaVu Sans"/>
-              </a:rPr>
-              <a:t>The bridge carried a load but fell about four inches short of the required span.</a:t>
-            </a:r>
-          </a:p>
-        </p:txBody>
-      </p:sp>
-      <p:sp>
-        <p:nvSpPr>
-          <p:cNvPr id="7" name="Lesson">
-            <a:extLst xmlns:a="http://schemas.openxmlformats.org/drawingml/2006/main">
-              <a:ext uri="{FF2B5EF4-FFF2-40B4-BE49-F238E27FC236}">
-                <a16:creationId xmlns:a16="http://schemas.microsoft.com/office/drawing/2014/main" id="{2B83B824-1898-49FD-A103-F42B000523FF}"/>
-              </a:ext>
-            </a:extLst>
-          </p:cNvPr>
-          <p:cNvSpPr>
-            <a:spLocks xmlns:a="http://schemas.openxmlformats.org/drawingml/2006/main" noGrp="1"/>
-          </p:cNvSpPr>
-          <p:nvPr/>
-        </p:nvSpPr>
-        <p:spPr>
-          <a:xfrm xmlns:a="http://schemas.openxmlformats.org/drawingml/2006/main">
-            <a:off x="609600" y="4895850"/>
-            <a:ext cx="4371975" cy="361950"/>
-          </a:xfrm>
-          <a:prstGeom xmlns:a="http://schemas.openxmlformats.org/drawingml/2006/main" prst="rect">
-            <a:avLst/>
-          </a:prstGeom>
-          <a:noFill xmlns:a="http://schemas.openxmlformats.org/drawingml/2006/main"/>
-          <a:ln xmlns:a="http://schemas.openxmlformats.org/drawingml/2006/main" w="0">
-            <a:noFill/>
-          </a:ln>
-        </p:spPr>
-        <p:txBody>
-          <a:bodyPr xmlns:a="http://schemas.openxmlformats.org/drawingml/2006/main">
-            <a:noAutofit/>
-          </a:bodyPr>
-          <a:lstStyle xmlns:a="http://schemas.openxmlformats.org/drawingml/2006/main"/>
-          <a:p xmlns:a="http://schemas.openxmlformats.org/drawingml/2006/main">
-            <a:pPr>
-              <a:defRPr sz="1950" b="1">
-                <a:solidFill>
-                  <a:srgbClr val="102637"/>
-                </a:solidFill>
-                <a:latin typeface="DejaVu Sans"/>
-                <a:ea typeface="DejaVu Sans"/>
-                <a:cs typeface="DejaVu Sans"/>
-              </a:defRPr>
-            </a:pPr>
-            <a:r>
-              <a:rPr sz="1950" b="1">
-                <a:solidFill>
-                  <a:srgbClr val="102637"/>
-                </a:solidFill>
-                <a:latin typeface="DejaVu Sans"/>
-                <a:ea typeface="DejaVu Sans"/>
-                <a:cs typeface="DejaVu Sans"/>
-              </a:rPr>
-              <a:t>Lesson</a:t>
-            </a:r>
-          </a:p>
-        </p:txBody>
-      </p:sp>
-      <p:sp>
-        <p:nvSpPr>
-          <p:cNvPr id="8" name="Verify dimensions before bracing. A stronger ">
-            <a:extLst xmlns:a="http://schemas.openxmlformats.org/drawingml/2006/main">
-              <a:ext uri="{FF2B5EF4-FFF2-40B4-BE49-F238E27FC236}">
-                <a16:creationId xmlns:a16="http://schemas.microsoft.com/office/drawing/2014/main" id="{87B61969-7280-4E47-AA0D-0F5866E3A927}"/>
-              </a:ext>
-            </a:extLst>
-          </p:cNvPr>
-          <p:cNvSpPr>
-            <a:spLocks xmlns:a="http://schemas.openxmlformats.org/drawingml/2006/main" noGrp="1"/>
-          </p:cNvSpPr>
-          <p:nvPr/>
-        </p:nvSpPr>
-        <p:spPr>
-          <a:xfrm xmlns:a="http://schemas.openxmlformats.org/drawingml/2006/main">
-            <a:off x="609600" y="5305425"/>
-            <a:ext cx="4371975" cy="1143000"/>
-          </a:xfrm>
-          <a:prstGeom xmlns:a="http://schemas.openxmlformats.org/drawingml/2006/main" prst="rect">
-            <a:avLst/>
-          </a:prstGeom>
-          <a:noFill xmlns:a="http://schemas.openxmlformats.org/drawingml/2006/main"/>
-          <a:ln xmlns:a="http://schemas.openxmlformats.org/drawingml/2006/main" w="0">
-            <a:noFill/>
-          </a:ln>
-        </p:spPr>
-        <p:txBody>
-          <a:bodyPr xmlns:a="http://schemas.openxmlformats.org/drawingml/2006/main">
-            <a:noAutofit/>
-          </a:bodyPr>
-          <a:lstStyle xmlns:a="http://schemas.openxmlformats.org/drawingml/2006/main"/>
-          <a:p xmlns:a="http://schemas.openxmlformats.org/drawingml/2006/main">
-            <a:pPr>
-              <a:defRPr sz="1800" b="0">
-                <a:solidFill>
-                  <a:srgbClr val="4C626E"/>
-                </a:solidFill>
-                <a:latin typeface="DejaVu Sans"/>
-                <a:ea typeface="DejaVu Sans"/>
-                <a:cs typeface="DejaVu Sans"/>
-              </a:defRPr>
-            </a:pPr>
-            <a:r>
-              <a:rPr sz="1800" b="0">
-                <a:solidFill>
-                  <a:srgbClr val="4C626E"/>
-                </a:solidFill>
-                <a:latin typeface="DejaVu Sans"/>
-                <a:ea typeface="DejaVu Sans"/>
-                <a:cs typeface="DejaVu Sans"/>
-              </a:rPr>
-              <a:t>Verify dimensions before bracing. A stronger structure still has to meet its original requirements.</a:t>
-            </a:r>
-          </a:p>
-        </p:txBody>
-      </p:sp>
-      <p:pic>
-        <p:nvPicPr>
-          <p:cNvPr id="18" name=""/>
-          <p:cNvPicPr>
-            <a:picLocks xmlns:a="http://schemas.openxmlformats.org/drawingml/2006/main" noChangeAspect="1"/>
-          </p:cNvPicPr>
-          <p:nvPr/>
-        </p:nvPicPr>
-        <p:blipFill>
-          <a:blip xmlns:r="http://schemas.openxmlformats.org/officeDocument/2006/relationships" xmlns:a="http://schemas.openxmlformats.org/drawingml/2006/main" r:embed="Rf75303092f3a4758"/>
-          <a:stretch xmlns:a="http://schemas.openxmlformats.org/drawingml/2006/main"/>
-        </p:blipFill>
-        <p:spPr>
-          <a:xfrm xmlns:a="http://schemas.openxmlformats.org/drawingml/2006/main">
-            <a:off x="5721350" y="2000250"/>
-            <a:ext cx="5511800" cy="4133850"/>
-          </a:xfrm>
-          <a:prstGeom xmlns:a="http://schemas.openxmlformats.org/drawingml/2006/main" prst="rect">
-            <a:avLst/>
-          </a:prstGeom>
-        </p:spPr>
-      </p:pic>
+              <a:t>Original engineering drawing</a:t>
+            </a:r>
+          </a:p>
+        </p:txBody>
+      </p:sp>
     </p:spTree>
     <p:extLst>
       <p:ext uri="{BB962C8B-B14F-4D97-AF65-F5344CB8AC3E}">
-        <p14:creationId xmlns:p14="http://schemas.microsoft.com/office/powerpoint/2010/main" val="1426738055"/>
+        <p14:creationId xmlns:p14="http://schemas.microsoft.com/office/powerpoint/2010/main" val="481790429"/>
       </p:ext>
     </p:extLst>
   </p:cSld>
